--- a/presentation.pptx
+++ b/presentation.pptx
@@ -18,11 +18,9 @@
     <p:sldId id="266" r:id="rId12"/>
     <p:sldId id="267" r:id="rId13"/>
     <p:sldId id="268" r:id="rId14"/>
-    <p:sldId id="269" r:id="rId15"/>
-    <p:sldId id="270" r:id="rId16"/>
   </p:sldIdLst>
   <p:notesMasterIdLst>
-    <p:notesMasterId r:id="rId17"/>
+    <p:notesMasterId r:id="rId15"/>
   </p:notesMasterIdLst>
   <p:sldSz cx="12192000" cy="6858000"/>
   <p:notesSz cx="6858000" cy="12192000"/>
@@ -892,182 +890,6 @@
             <a:fld id="{F7021451-1387-4CA6-816F-3879F97B5CBC}" type="slidenum">
               <a:rPr lang="en-US"/>
               <a:t>13</a:t>
-            </a:fld>
-            <a:endParaRPr lang="en-US"/>
-          </a:p>
-        </p:txBody>
-      </p:sp>
-    </p:spTree>
-    <p:extLst>
-      <p:ext uri="{BB962C8B-B14F-4D97-AF65-F5344CB8AC3E}">
-        <p14:creationId xmlns:p14="http://schemas.microsoft.com/office/powerpoint/2010/main" val="1024086991"/>
-      </p:ext>
-    </p:extLst>
-  </p:cSld>
-  <p:clrMapOvr>
-    <a:masterClrMapping/>
-  </p:clrMapOvr>
-</p:notes>
-</file>
-
-<file path=ppt/notesSlides/notesSlide14.xml><?xml version="1.0" encoding="utf-8"?>
-<p:notes xmlns:a="http://schemas.openxmlformats.org/drawingml/2006/main" xmlns:r="http://schemas.openxmlformats.org/officeDocument/2006/relationships" xmlns:p="http://schemas.openxmlformats.org/presentationml/2006/main">
-  <p:cSld>
-    <p:spTree>
-      <p:nvGrpSpPr>
-        <p:cNvPr id="1" name=""/>
-        <p:cNvGrpSpPr/>
-        <p:nvPr/>
-      </p:nvGrpSpPr>
-      <p:grpSpPr>
-        <a:xfrm>
-          <a:off x="0" y="0"/>
-          <a:ext cx="0" cy="0"/>
-          <a:chOff x="0" y="0"/>
-          <a:chExt cx="0" cy="0"/>
-        </a:xfrm>
-      </p:grpSpPr>
-      <p:sp>
-        <p:nvSpPr>
-          <p:cNvPr id="2" name="Slide Image Placeholder 1"/>
-          <p:cNvSpPr>
-            <a:spLocks noGrp="1" noRot="1" noChangeAspect="1"/>
-          </p:cNvSpPr>
-          <p:nvPr>
-            <p:ph type="sldImg"/>
-          </p:nvPr>
-        </p:nvSpPr>
-        <p:spPr/>
-      </p:sp>
-      <p:sp>
-        <p:nvSpPr>
-          <p:cNvPr id="3" name="Notes Placeholder 2"/>
-          <p:cNvSpPr>
-            <a:spLocks noGrp="1"/>
-          </p:cNvSpPr>
-          <p:nvPr>
-            <p:ph type="body" idx="1"/>
-          </p:nvPr>
-        </p:nvSpPr>
-        <p:spPr/>
-        <p:txBody>
-          <a:bodyPr/>
-          <a:lstStyle/>
-          <a:p>
-            <a:r>
-              <a:rPr lang="en-US" dirty="0"/>
-              <a:t/>
-            </a:r>
-            <a:endParaRPr lang="en-US" dirty="0"/>
-          </a:p>
-        </p:txBody>
-      </p:sp>
-      <p:sp>
-        <p:nvSpPr>
-          <p:cNvPr id="4" name="Slide Number Placeholder 3"/>
-          <p:cNvSpPr>
-            <a:spLocks noGrp="1"/>
-          </p:cNvSpPr>
-          <p:nvPr>
-            <p:ph type="sldNum" sz="quarter" idx="10"/>
-          </p:nvPr>
-        </p:nvSpPr>
-        <p:spPr/>
-        <p:txBody>
-          <a:bodyPr/>
-          <a:lstStyle/>
-          <a:p>
-            <a:fld id="{F7021451-1387-4CA6-816F-3879F97B5CBC}" type="slidenum">
-              <a:rPr lang="en-US"/>
-              <a:t>14</a:t>
-            </a:fld>
-            <a:endParaRPr lang="en-US"/>
-          </a:p>
-        </p:txBody>
-      </p:sp>
-    </p:spTree>
-    <p:extLst>
-      <p:ext uri="{BB962C8B-B14F-4D97-AF65-F5344CB8AC3E}">
-        <p14:creationId xmlns:p14="http://schemas.microsoft.com/office/powerpoint/2010/main" val="1024086991"/>
-      </p:ext>
-    </p:extLst>
-  </p:cSld>
-  <p:clrMapOvr>
-    <a:masterClrMapping/>
-  </p:clrMapOvr>
-</p:notes>
-</file>
-
-<file path=ppt/notesSlides/notesSlide15.xml><?xml version="1.0" encoding="utf-8"?>
-<p:notes xmlns:a="http://schemas.openxmlformats.org/drawingml/2006/main" xmlns:r="http://schemas.openxmlformats.org/officeDocument/2006/relationships" xmlns:p="http://schemas.openxmlformats.org/presentationml/2006/main">
-  <p:cSld>
-    <p:spTree>
-      <p:nvGrpSpPr>
-        <p:cNvPr id="1" name=""/>
-        <p:cNvGrpSpPr/>
-        <p:nvPr/>
-      </p:nvGrpSpPr>
-      <p:grpSpPr>
-        <a:xfrm>
-          <a:off x="0" y="0"/>
-          <a:ext cx="0" cy="0"/>
-          <a:chOff x="0" y="0"/>
-          <a:chExt cx="0" cy="0"/>
-        </a:xfrm>
-      </p:grpSpPr>
-      <p:sp>
-        <p:nvSpPr>
-          <p:cNvPr id="2" name="Slide Image Placeholder 1"/>
-          <p:cNvSpPr>
-            <a:spLocks noGrp="1" noRot="1" noChangeAspect="1"/>
-          </p:cNvSpPr>
-          <p:nvPr>
-            <p:ph type="sldImg"/>
-          </p:nvPr>
-        </p:nvSpPr>
-        <p:spPr/>
-      </p:sp>
-      <p:sp>
-        <p:nvSpPr>
-          <p:cNvPr id="3" name="Notes Placeholder 2"/>
-          <p:cNvSpPr>
-            <a:spLocks noGrp="1"/>
-          </p:cNvSpPr>
-          <p:nvPr>
-            <p:ph type="body" idx="1"/>
-          </p:nvPr>
-        </p:nvSpPr>
-        <p:spPr/>
-        <p:txBody>
-          <a:bodyPr/>
-          <a:lstStyle/>
-          <a:p>
-            <a:r>
-              <a:rPr lang="en-US" dirty="0"/>
-              <a:t/>
-            </a:r>
-            <a:endParaRPr lang="en-US" dirty="0"/>
-          </a:p>
-        </p:txBody>
-      </p:sp>
-      <p:sp>
-        <p:nvSpPr>
-          <p:cNvPr id="4" name="Slide Number Placeholder 3"/>
-          <p:cNvSpPr>
-            <a:spLocks noGrp="1"/>
-          </p:cNvSpPr>
-          <p:nvPr>
-            <p:ph type="sldNum" sz="quarter" idx="10"/>
-          </p:nvPr>
-        </p:nvSpPr>
-        <p:spPr/>
-        <p:txBody>
-          <a:bodyPr/>
-          <a:lstStyle/>
-          <a:p>
-            <a:fld id="{F7021451-1387-4CA6-816F-3879F97B5CBC}" type="slidenum">
-              <a:rPr lang="en-US"/>
-              <a:t>15</a:t>
             </a:fld>
             <a:endParaRPr lang="en-US"/>
           </a:p>
@@ -2471,7 +2293,7 @@
                 <a:ea typeface="Georgia" pitchFamily="34" charset="-122"/>
                 <a:cs typeface="Georgia" pitchFamily="34" charset="-120"/>
               </a:rPr>
-              <a:t>Coalitions réelles : l'Assemblée en blocs</a:t>
+              <a:t>Le mode de scrutin déplace le pouvoir</a:t>
             </a:r>
             <a:endParaRPr lang="en-US" sz="2700" dirty="0"/>
           </a:p>
@@ -2510,7 +2332,7 @@
                   <a:srgbClr val="333333"/>
                 </a:solidFill>
               </a:rPr>
-              <a:t>Au-delà des groupes, on agrège l'Assemblée 2024 en blocs politiques (NFP, Ensemble, RN, LR...), comme le demande le sujet. Le paradoxe réapparaît en grand.</a:t>
+              <a:t>À suffrages strictement constants, on fait varier la seule règle d'attribution des sièges et on recalcule le pouvoir. Le mode de scrutin pèse plus que la part de sièges.</a:t>
             </a:r>
             <a:endParaRPr lang="en-US" sz="1500" dirty="0"/>
           </a:p>
@@ -2525,7 +2347,7 @@
         <p:spPr>
           <a:xfrm>
             <a:off x="731520" y="2057400"/>
-            <a:ext cx="6675120" cy="3108960"/>
+            <a:ext cx="5257800" cy="3200400"/>
           </a:xfrm>
           <a:prstGeom prst="rect">
             <a:avLst/>
@@ -2557,7 +2379,7 @@
         <p:spPr>
           <a:xfrm>
             <a:off x="960120" y="2240280"/>
-            <a:ext cx="6217920" cy="365760"/>
+            <a:ext cx="4846320" cy="365760"/>
           </a:xfrm>
           <a:prstGeom prst="rect">
             <a:avLst/>
@@ -2573,7 +2395,7 @@
               <a:buNone/>
             </a:pPr>
             <a:r>
-              <a:rPr lang="en-US" sz="1600" b="1" dirty="0">
+              <a:rPr lang="en-US" sz="1500" b="1" dirty="0">
                 <a:solidFill>
                   <a:srgbClr val="1E2761"/>
                 </a:solidFill>
@@ -2581,9 +2403,9 @@
                 <a:ea typeface="Georgia" pitchFamily="34" charset="-122"/>
                 <a:cs typeface="Georgia" pitchFamily="34" charset="-120"/>
               </a:rPr>
-              <a:t>Trois blocs se partagent tout le pouvoir</a:t>
-            </a:r>
-            <a:endParaRPr lang="en-US" sz="1600" dirty="0"/>
+              <a:t>Européennes 2024, pouvoir du RN</a:t>
+            </a:r>
+            <a:endParaRPr lang="en-US" sz="1500" dirty="0"/>
           </a:p>
         </p:txBody>
       </p:sp>
@@ -2595,8 +2417,8 @@
         </p:nvSpPr>
         <p:spPr>
           <a:xfrm>
-            <a:off x="960120" y="2743200"/>
-            <a:ext cx="2011680" cy="457200"/>
+            <a:off x="960120" y="2788920"/>
+            <a:ext cx="2377440" cy="457200"/>
           </a:xfrm>
           <a:prstGeom prst="rect">
             <a:avLst/>
@@ -2612,12 +2434,192 @@
               <a:buNone/>
             </a:pPr>
             <a:r>
+              <a:rPr lang="en-US" sz="1400" b="1" dirty="0">
+                <a:solidFill>
+                  <a:srgbClr val="1E2761"/>
+                </a:solidFill>
+              </a:rPr>
+              <a:t>D'Hondt</a:t>
+            </a:r>
+            <a:endParaRPr lang="en-US" sz="1400" dirty="0"/>
+          </a:p>
+        </p:txBody>
+      </p:sp>
+      <p:sp>
+        <p:nvSpPr>
+          <p:cNvPr id="8" name="Text 6"/>
+          <p:cNvSpPr/>
+          <p:nvPr/>
+        </p:nvSpPr>
+        <p:spPr>
+          <a:xfrm>
+            <a:off x="3291840" y="2788920"/>
+            <a:ext cx="1280160" cy="457200"/>
+          </a:xfrm>
+          <a:prstGeom prst="rect">
+            <a:avLst/>
+          </a:prstGeom>
+          <a:noFill/>
+          <a:ln/>
+        </p:spPr>
+        <p:txBody>
+          <a:bodyPr wrap="square" lIns="0" tIns="0" rIns="0" bIns="0" rtlCol="0" anchor="ctr"/>
+          <a:lstStyle/>
+          <a:p>
+            <a:pPr indent="0" marL="0">
+              <a:buNone/>
+            </a:pPr>
+            <a:r>
+              <a:rPr lang="en-US" sz="1300" dirty="0">
+                <a:solidFill>
+                  <a:srgbClr val="333333"/>
+                </a:solidFill>
+              </a:rPr>
+              <a:t>30 sièges</a:t>
+            </a:r>
+            <a:endParaRPr lang="en-US" sz="1300" dirty="0"/>
+          </a:p>
+        </p:txBody>
+      </p:sp>
+      <p:sp>
+        <p:nvSpPr>
+          <p:cNvPr id="9" name="Text 7"/>
+          <p:cNvSpPr/>
+          <p:nvPr/>
+        </p:nvSpPr>
+        <p:spPr>
+          <a:xfrm>
+            <a:off x="4572000" y="2788920"/>
+            <a:ext cx="1280160" cy="457200"/>
+          </a:xfrm>
+          <a:prstGeom prst="rect">
+            <a:avLst/>
+          </a:prstGeom>
+          <a:noFill/>
+          <a:ln/>
+        </p:spPr>
+        <p:txBody>
+          <a:bodyPr wrap="square" lIns="0" tIns="0" rIns="0" bIns="0" rtlCol="0" anchor="ctr"/>
+          <a:lstStyle/>
+          <a:p>
+            <a:pPr indent="0" marL="0">
+              <a:buNone/>
+            </a:pPr>
+            <a:r>
               <a:rPr lang="en-US" sz="1500" b="1" dirty="0">
                 <a:solidFill>
+                  <a:srgbClr val="F2A900"/>
+                </a:solidFill>
+              </a:rPr>
+              <a:t>50,5 %</a:t>
+            </a:r>
+            <a:endParaRPr lang="en-US" sz="1500" dirty="0"/>
+          </a:p>
+        </p:txBody>
+      </p:sp>
+      <p:sp>
+        <p:nvSpPr>
+          <p:cNvPr id="10" name="Text 8"/>
+          <p:cNvSpPr/>
+          <p:nvPr/>
+        </p:nvSpPr>
+        <p:spPr>
+          <a:xfrm>
+            <a:off x="960120" y="3429000"/>
+            <a:ext cx="2377440" cy="457200"/>
+          </a:xfrm>
+          <a:prstGeom prst="rect">
+            <a:avLst/>
+          </a:prstGeom>
+          <a:noFill/>
+          <a:ln/>
+        </p:spPr>
+        <p:txBody>
+          <a:bodyPr wrap="square" lIns="0" tIns="0" rIns="0" bIns="0" rtlCol="0" anchor="ctr"/>
+          <a:lstStyle/>
+          <a:p>
+            <a:pPr indent="0" marL="0">
+              <a:buNone/>
+            </a:pPr>
+            <a:r>
+              <a:rPr lang="en-US" sz="1400" b="1" dirty="0">
+                <a:solidFill>
                   <a:srgbClr val="1E2761"/>
                 </a:solidFill>
               </a:rPr>
-              <a:t>NFP</a:t>
+              <a:t>Sainte-Laguë</a:t>
+            </a:r>
+            <a:endParaRPr lang="en-US" sz="1400" dirty="0"/>
+          </a:p>
+        </p:txBody>
+      </p:sp>
+      <p:sp>
+        <p:nvSpPr>
+          <p:cNvPr id="11" name="Text 9"/>
+          <p:cNvSpPr/>
+          <p:nvPr/>
+        </p:nvSpPr>
+        <p:spPr>
+          <a:xfrm>
+            <a:off x="3291840" y="3429000"/>
+            <a:ext cx="1280160" cy="457200"/>
+          </a:xfrm>
+          <a:prstGeom prst="rect">
+            <a:avLst/>
+          </a:prstGeom>
+          <a:noFill/>
+          <a:ln/>
+        </p:spPr>
+        <p:txBody>
+          <a:bodyPr wrap="square" lIns="0" tIns="0" rIns="0" bIns="0" rtlCol="0" anchor="ctr"/>
+          <a:lstStyle/>
+          <a:p>
+            <a:pPr indent="0" marL="0">
+              <a:buNone/>
+            </a:pPr>
+            <a:r>
+              <a:rPr lang="en-US" sz="1300" dirty="0">
+                <a:solidFill>
+                  <a:srgbClr val="333333"/>
+                </a:solidFill>
+              </a:rPr>
+              <a:t>29 sièges</a:t>
+            </a:r>
+            <a:endParaRPr lang="en-US" sz="1300" dirty="0"/>
+          </a:p>
+        </p:txBody>
+      </p:sp>
+      <p:sp>
+        <p:nvSpPr>
+          <p:cNvPr id="12" name="Text 10"/>
+          <p:cNvSpPr/>
+          <p:nvPr/>
+        </p:nvSpPr>
+        <p:spPr>
+          <a:xfrm>
+            <a:off x="4572000" y="3429000"/>
+            <a:ext cx="1280160" cy="457200"/>
+          </a:xfrm>
+          <a:prstGeom prst="rect">
+            <a:avLst/>
+          </a:prstGeom>
+          <a:noFill/>
+          <a:ln/>
+        </p:spPr>
+        <p:txBody>
+          <a:bodyPr wrap="square" lIns="0" tIns="0" rIns="0" bIns="0" rtlCol="0" anchor="ctr"/>
+          <a:lstStyle/>
+          <a:p>
+            <a:pPr indent="0" marL="0">
+              <a:buNone/>
+            </a:pPr>
+            <a:r>
+              <a:rPr lang="en-US" sz="1500" b="1" dirty="0">
+                <a:solidFill>
+                  <a:srgbClr val="F2A900"/>
+                </a:solidFill>
+              </a:rPr>
+              <a:t>50,5 %</a:t>
             </a:r>
             <a:endParaRPr lang="en-US" sz="1500" dirty="0"/>
           </a:p>
@@ -2625,14 +2627,14 @@
       </p:sp>
       <p:sp>
         <p:nvSpPr>
-          <p:cNvPr id="8" name="Text 6"/>
-          <p:cNvSpPr/>
-          <p:nvPr/>
-        </p:nvSpPr>
-        <p:spPr>
-          <a:xfrm>
-            <a:off x="2926080" y="2743200"/>
-            <a:ext cx="1828800" cy="457200"/>
+          <p:cNvPr id="13" name="Text 11"/>
+          <p:cNvSpPr/>
+          <p:nvPr/>
+        </p:nvSpPr>
+        <p:spPr>
+          <a:xfrm>
+            <a:off x="960120" y="4069080"/>
+            <a:ext cx="2377440" cy="457200"/>
           </a:xfrm>
           <a:prstGeom prst="rect">
             <a:avLst/>
@@ -2648,27 +2650,63 @@
               <a:buNone/>
             </a:pPr>
             <a:r>
-              <a:rPr lang="en-US" sz="1400" dirty="0">
+              <a:rPr lang="en-US" sz="1400" b="1" dirty="0">
+                <a:solidFill>
+                  <a:srgbClr val="1E2761"/>
+                </a:solidFill>
+              </a:rPr>
+              <a:t>Majoritaire intégral</a:t>
+            </a:r>
+            <a:endParaRPr lang="en-US" sz="1400" dirty="0"/>
+          </a:p>
+        </p:txBody>
+      </p:sp>
+      <p:sp>
+        <p:nvSpPr>
+          <p:cNvPr id="14" name="Text 12"/>
+          <p:cNvSpPr/>
+          <p:nvPr/>
+        </p:nvSpPr>
+        <p:spPr>
+          <a:xfrm>
+            <a:off x="3291840" y="4069080"/>
+            <a:ext cx="1280160" cy="457200"/>
+          </a:xfrm>
+          <a:prstGeom prst="rect">
+            <a:avLst/>
+          </a:prstGeom>
+          <a:noFill/>
+          <a:ln/>
+        </p:spPr>
+        <p:txBody>
+          <a:bodyPr wrap="square" lIns="0" tIns="0" rIns="0" bIns="0" rtlCol="0" anchor="ctr"/>
+          <a:lstStyle/>
+          <a:p>
+            <a:pPr indent="0" marL="0">
+              <a:buNone/>
+            </a:pPr>
+            <a:r>
+              <a:rPr lang="en-US" sz="1300" dirty="0">
                 <a:solidFill>
                   <a:srgbClr val="333333"/>
                 </a:solidFill>
               </a:rPr>
-              <a:t>193 sièges</a:t>
-            </a:r>
-            <a:endParaRPr lang="en-US" sz="1400" dirty="0"/>
-          </a:p>
-        </p:txBody>
-      </p:sp>
-      <p:sp>
-        <p:nvSpPr>
-          <p:cNvPr id="9" name="Text 7"/>
-          <p:cNvSpPr/>
-          <p:nvPr/>
-        </p:nvSpPr>
-        <p:spPr>
-          <a:xfrm>
-            <a:off x="4754880" y="2743200"/>
-            <a:ext cx="2468880" cy="457200"/>
+              <a:t>81 sièges</a:t>
+            </a:r>
+            <a:endParaRPr lang="en-US" sz="1300" dirty="0"/>
+          </a:p>
+        </p:txBody>
+      </p:sp>
+      <p:sp>
+        <p:nvSpPr>
+          <p:cNvPr id="15" name="Text 13"/>
+          <p:cNvSpPr/>
+          <p:nvPr/>
+        </p:nvSpPr>
+        <p:spPr>
+          <a:xfrm>
+            <a:off x="4572000" y="4069080"/>
+            <a:ext cx="1280160" cy="457200"/>
           </a:xfrm>
           <a:prstGeom prst="rect">
             <a:avLst/>
@@ -2686,10 +2724,10 @@
             <a:r>
               <a:rPr lang="en-US" sz="1500" b="1" dirty="0">
                 <a:solidFill>
-                  <a:srgbClr val="F2A900"/>
-                </a:solidFill>
-              </a:rPr>
-              <a:t>33,3 % de pouvoir</a:t>
+                  <a:srgbClr val="C0392B"/>
+                </a:solidFill>
+              </a:rPr>
+              <a:t>100 %</a:t>
             </a:r>
             <a:endParaRPr lang="en-US" sz="1500" dirty="0"/>
           </a:p>
@@ -2697,14 +2735,14 @@
       </p:sp>
       <p:sp>
         <p:nvSpPr>
-          <p:cNvPr id="10" name="Text 8"/>
-          <p:cNvSpPr/>
-          <p:nvPr/>
-        </p:nvSpPr>
-        <p:spPr>
-          <a:xfrm>
-            <a:off x="960120" y="3310128"/>
-            <a:ext cx="2011680" cy="457200"/>
+          <p:cNvPr id="16" name="Text 14"/>
+          <p:cNvSpPr/>
+          <p:nvPr/>
+        </p:nvSpPr>
+        <p:spPr>
+          <a:xfrm>
+            <a:off x="960120" y="4754880"/>
+            <a:ext cx="4846320" cy="457200"/>
           </a:xfrm>
           <a:prstGeom prst="rect">
             <a:avLst/>
@@ -2720,230 +2758,14 @@
               <a:buNone/>
             </a:pPr>
             <a:r>
-              <a:rPr lang="en-US" sz="1500" b="1" dirty="0">
-                <a:solidFill>
-                  <a:srgbClr val="1E2761"/>
-                </a:solidFill>
-              </a:rPr>
-              <a:t>Ensemble</a:t>
-            </a:r>
-            <a:endParaRPr lang="en-US" sz="1500" dirty="0"/>
-          </a:p>
-        </p:txBody>
-      </p:sp>
-      <p:sp>
-        <p:nvSpPr>
-          <p:cNvPr id="11" name="Text 9"/>
-          <p:cNvSpPr/>
-          <p:nvPr/>
-        </p:nvSpPr>
-        <p:spPr>
-          <a:xfrm>
-            <a:off x="2926080" y="3310128"/>
-            <a:ext cx="1828800" cy="457200"/>
-          </a:xfrm>
-          <a:prstGeom prst="rect">
-            <a:avLst/>
-          </a:prstGeom>
-          <a:noFill/>
-          <a:ln/>
-        </p:spPr>
-        <p:txBody>
-          <a:bodyPr wrap="square" lIns="0" tIns="0" rIns="0" bIns="0" rtlCol="0" anchor="ctr"/>
-          <a:lstStyle/>
-          <a:p>
-            <a:pPr indent="0" marL="0">
-              <a:buNone/>
-            </a:pPr>
-            <a:r>
-              <a:rPr lang="en-US" sz="1400" dirty="0">
-                <a:solidFill>
-                  <a:srgbClr val="333333"/>
-                </a:solidFill>
-              </a:rPr>
-              <a:t>166 sièges</a:t>
-            </a:r>
-            <a:endParaRPr lang="en-US" sz="1400" dirty="0"/>
-          </a:p>
-        </p:txBody>
-      </p:sp>
-      <p:sp>
-        <p:nvSpPr>
-          <p:cNvPr id="12" name="Text 10"/>
-          <p:cNvSpPr/>
-          <p:nvPr/>
-        </p:nvSpPr>
-        <p:spPr>
-          <a:xfrm>
-            <a:off x="4754880" y="3310128"/>
-            <a:ext cx="2468880" cy="457200"/>
-          </a:xfrm>
-          <a:prstGeom prst="rect">
-            <a:avLst/>
-          </a:prstGeom>
-          <a:noFill/>
-          <a:ln/>
-        </p:spPr>
-        <p:txBody>
-          <a:bodyPr wrap="square" lIns="0" tIns="0" rIns="0" bIns="0" rtlCol="0" anchor="ctr"/>
-          <a:lstStyle/>
-          <a:p>
-            <a:pPr indent="0" marL="0">
-              <a:buNone/>
-            </a:pPr>
-            <a:r>
-              <a:rPr lang="en-US" sz="1500" b="1" dirty="0">
-                <a:solidFill>
-                  <a:srgbClr val="F2A900"/>
-                </a:solidFill>
-              </a:rPr>
-              <a:t>33,3 % de pouvoir</a:t>
-            </a:r>
-            <a:endParaRPr lang="en-US" sz="1500" dirty="0"/>
-          </a:p>
-        </p:txBody>
-      </p:sp>
-      <p:sp>
-        <p:nvSpPr>
-          <p:cNvPr id="13" name="Text 11"/>
-          <p:cNvSpPr/>
-          <p:nvPr/>
-        </p:nvSpPr>
-        <p:spPr>
-          <a:xfrm>
-            <a:off x="960120" y="3877056"/>
-            <a:ext cx="2011680" cy="457200"/>
-          </a:xfrm>
-          <a:prstGeom prst="rect">
-            <a:avLst/>
-          </a:prstGeom>
-          <a:noFill/>
-          <a:ln/>
-        </p:spPr>
-        <p:txBody>
-          <a:bodyPr wrap="square" lIns="0" tIns="0" rIns="0" bIns="0" rtlCol="0" anchor="ctr"/>
-          <a:lstStyle/>
-          <a:p>
-            <a:pPr indent="0" marL="0">
-              <a:buNone/>
-            </a:pPr>
-            <a:r>
-              <a:rPr lang="en-US" sz="1500" b="1" dirty="0">
-                <a:solidFill>
-                  <a:srgbClr val="1E2761"/>
-                </a:solidFill>
-              </a:rPr>
-              <a:t>RN</a:t>
-            </a:r>
-            <a:endParaRPr lang="en-US" sz="1500" dirty="0"/>
-          </a:p>
-        </p:txBody>
-      </p:sp>
-      <p:sp>
-        <p:nvSpPr>
-          <p:cNvPr id="14" name="Text 12"/>
-          <p:cNvSpPr/>
-          <p:nvPr/>
-        </p:nvSpPr>
-        <p:spPr>
-          <a:xfrm>
-            <a:off x="2926080" y="3877056"/>
-            <a:ext cx="1828800" cy="457200"/>
-          </a:xfrm>
-          <a:prstGeom prst="rect">
-            <a:avLst/>
-          </a:prstGeom>
-          <a:noFill/>
-          <a:ln/>
-        </p:spPr>
-        <p:txBody>
-          <a:bodyPr wrap="square" lIns="0" tIns="0" rIns="0" bIns="0" rtlCol="0" anchor="ctr"/>
-          <a:lstStyle/>
-          <a:p>
-            <a:pPr indent="0" marL="0">
-              <a:buNone/>
-            </a:pPr>
-            <a:r>
-              <a:rPr lang="en-US" sz="1400" dirty="0">
-                <a:solidFill>
-                  <a:srgbClr val="333333"/>
-                </a:solidFill>
-              </a:rPr>
-              <a:t>126 sièges</a:t>
-            </a:r>
-            <a:endParaRPr lang="en-US" sz="1400" dirty="0"/>
-          </a:p>
-        </p:txBody>
-      </p:sp>
-      <p:sp>
-        <p:nvSpPr>
-          <p:cNvPr id="15" name="Text 13"/>
-          <p:cNvSpPr/>
-          <p:nvPr/>
-        </p:nvSpPr>
-        <p:spPr>
-          <a:xfrm>
-            <a:off x="4754880" y="3877056"/>
-            <a:ext cx="2468880" cy="457200"/>
-          </a:xfrm>
-          <a:prstGeom prst="rect">
-            <a:avLst/>
-          </a:prstGeom>
-          <a:noFill/>
-          <a:ln/>
-        </p:spPr>
-        <p:txBody>
-          <a:bodyPr wrap="square" lIns="0" tIns="0" rIns="0" bIns="0" rtlCol="0" anchor="ctr"/>
-          <a:lstStyle/>
-          <a:p>
-            <a:pPr indent="0" marL="0">
-              <a:buNone/>
-            </a:pPr>
-            <a:r>
-              <a:rPr lang="en-US" sz="1500" b="1" dirty="0">
-                <a:solidFill>
-                  <a:srgbClr val="F2A900"/>
-                </a:solidFill>
-              </a:rPr>
-              <a:t>33,3 % de pouvoir</a:t>
-            </a:r>
-            <a:endParaRPr lang="en-US" sz="1500" dirty="0"/>
-          </a:p>
-        </p:txBody>
-      </p:sp>
-      <p:sp>
-        <p:nvSpPr>
-          <p:cNvPr id="16" name="Text 14"/>
-          <p:cNvSpPr/>
-          <p:nvPr/>
-        </p:nvSpPr>
-        <p:spPr>
-          <a:xfrm>
-            <a:off x="960120" y="4572000"/>
-            <a:ext cx="6217920" cy="457200"/>
-          </a:xfrm>
-          <a:prstGeom prst="rect">
-            <a:avLst/>
-          </a:prstGeom>
-          <a:noFill/>
-          <a:ln/>
-        </p:spPr>
-        <p:txBody>
-          <a:bodyPr wrap="square" lIns="0" tIns="0" rIns="0" bIns="0" rtlCol="0" anchor="ctr"/>
-          <a:lstStyle/>
-          <a:p>
-            <a:pPr indent="0" marL="0">
-              <a:buNone/>
-            </a:pPr>
-            <a:r>
-              <a:rPr lang="en-US" sz="1250" i="1" dirty="0">
+              <a:rPr lang="en-US" sz="1200" i="1" dirty="0">
                 <a:solidFill>
                   <a:srgbClr val="5B6478"/>
                 </a:solidFill>
               </a:rPr>
-              <a:t>LR, LIOT et UDR : 0 % de pouvoir malgré leurs sièges (jamais pivots).</a:t>
-            </a:r>
-            <a:endParaRPr lang="en-US" sz="1250" dirty="0"/>
+              <a:t>Le majoritaire intégral transforme le RN en dictateur (100 % du pouvoir).</a:t>
+            </a:r>
+            <a:endParaRPr lang="en-US" sz="1200" dirty="0"/>
           </a:p>
         </p:txBody>
       </p:sp>
@@ -2955,8 +2777,8 @@
         </p:nvSpPr>
         <p:spPr>
           <a:xfrm>
-            <a:off x="7680960" y="2057400"/>
-            <a:ext cx="3749040" cy="3108960"/>
+            <a:off x="6172200" y="2057400"/>
+            <a:ext cx="5257800" cy="3200400"/>
           </a:xfrm>
           <a:prstGeom prst="rect">
             <a:avLst/>
@@ -2982,8 +2804,8 @@
         </p:nvSpPr>
         <p:spPr>
           <a:xfrm>
-            <a:off x="7909560" y="2240280"/>
-            <a:ext cx="3291840" cy="640080"/>
+            <a:off x="6400800" y="2240280"/>
+            <a:ext cx="4846320" cy="365760"/>
           </a:xfrm>
           <a:prstGeom prst="rect">
             <a:avLst/>
@@ -3007,7 +2829,7 @@
                 <a:ea typeface="Georgia" pitchFamily="34" charset="-122"/>
                 <a:cs typeface="Georgia" pitchFamily="34" charset="-120"/>
               </a:rPr>
-              <a:t>Contrefactuel : unir la gauche ?</a:t>
+              <a:t>Régionales IdF 2021 : prime majoritaire</a:t>
             </a:r>
             <a:endParaRPr lang="en-US" sz="1500" dirty="0"/>
           </a:p>
@@ -3021,8 +2843,108 @@
         </p:nvSpPr>
         <p:spPr>
           <a:xfrm>
-            <a:off x="7909560" y="2788920"/>
-            <a:ext cx="3291840" cy="2286000"/>
+            <a:off x="6400800" y="2743200"/>
+            <a:ext cx="4846320" cy="548640"/>
+          </a:xfrm>
+          <a:prstGeom prst="rect">
+            <a:avLst/>
+          </a:prstGeom>
+          <a:noFill/>
+          <a:ln/>
+        </p:spPr>
+        <p:txBody>
+          <a:bodyPr wrap="square" lIns="0" tIns="0" rIns="0" bIns="0" rtlCol="0" anchor="ctr"/>
+          <a:lstStyle/>
+          <a:p>
+            <a:pPr indent="0" marL="0">
+              <a:buNone/>
+            </a:pPr>
+            <a:r>
+              <a:rPr lang="en-US" sz="3000" b="1" dirty="0">
+                <a:solidFill>
+                  <a:srgbClr val="FFFFFF"/>
+                </a:solidFill>
+                <a:latin typeface="Georgia" pitchFamily="34" charset="0"/>
+                <a:ea typeface="Georgia" pitchFamily="34" charset="-122"/>
+                <a:cs typeface="Georgia" pitchFamily="34" charset="-120"/>
+              </a:rPr>
+              <a:t>45,9 %</a:t>
+            </a:r>
+            <a:pPr indent="0" marL="0">
+              <a:buNone/>
+            </a:pPr>
+            <a:r>
+              <a:rPr lang="en-US" sz="1300" dirty="0">
+                <a:solidFill>
+                  <a:srgbClr val="CADCFC"/>
+                </a:solidFill>
+              </a:rPr>
+              <a:t>  des voix pour la liste en tête</a:t>
+            </a:r>
+            <a:endParaRPr lang="en-US" sz="3000" dirty="0"/>
+          </a:p>
+        </p:txBody>
+      </p:sp>
+      <p:sp>
+        <p:nvSpPr>
+          <p:cNvPr id="20" name="Text 18"/>
+          <p:cNvSpPr/>
+          <p:nvPr/>
+        </p:nvSpPr>
+        <p:spPr>
+          <a:xfrm>
+            <a:off x="6400800" y="3383280"/>
+            <a:ext cx="4846320" cy="548640"/>
+          </a:xfrm>
+          <a:prstGeom prst="rect">
+            <a:avLst/>
+          </a:prstGeom>
+          <a:noFill/>
+          <a:ln/>
+        </p:spPr>
+        <p:txBody>
+          <a:bodyPr wrap="square" lIns="0" tIns="0" rIns="0" bIns="0" rtlCol="0" anchor="ctr"/>
+          <a:lstStyle/>
+          <a:p>
+            <a:pPr indent="0" marL="0">
+              <a:buNone/>
+            </a:pPr>
+            <a:r>
+              <a:rPr lang="en-US" sz="3000" b="1" dirty="0">
+                <a:solidFill>
+                  <a:srgbClr val="F2A900"/>
+                </a:solidFill>
+                <a:latin typeface="Georgia" pitchFamily="34" charset="0"/>
+                <a:ea typeface="Georgia" pitchFamily="34" charset="-122"/>
+                <a:cs typeface="Georgia" pitchFamily="34" charset="-120"/>
+              </a:rPr>
+              <a:t>59,8 %</a:t>
+            </a:r>
+            <a:pPr indent="0" marL="0">
+              <a:buNone/>
+            </a:pPr>
+            <a:r>
+              <a:rPr lang="en-US" sz="1300" dirty="0">
+                <a:solidFill>
+                  <a:srgbClr val="CADCFC"/>
+                </a:solidFill>
+              </a:rPr>
+              <a:t>  des sièges grâce à la prime → dictateur</a:t>
+            </a:r>
+            <a:endParaRPr lang="en-US" sz="3000" dirty="0"/>
+          </a:p>
+        </p:txBody>
+      </p:sp>
+      <p:sp>
+        <p:nvSpPr>
+          <p:cNvPr id="21" name="Text 19"/>
+          <p:cNvSpPr/>
+          <p:nvPr/>
+        </p:nvSpPr>
+        <p:spPr>
+          <a:xfrm>
+            <a:off x="6400800" y="4114800"/>
+            <a:ext cx="4846320" cy="822960"/>
           </a:xfrm>
           <a:prstGeom prst="rect">
             <a:avLst/>
@@ -3035,57 +2957,59 @@
           <a:lstStyle/>
           <a:p>
             <a:pPr indent="0" marL="0">
-              <a:spcAft>
-                <a:spcPts val="1000"/>
-              </a:spcAft>
-              <a:buNone/>
-            </a:pPr>
-            <a:r>
-              <a:rPr lang="en-US" sz="1350" dirty="0">
-                <a:solidFill>
-                  <a:srgbClr val="FFFFFF"/>
-                </a:solidFill>
-              </a:rPr>
-              <a:t>Fusionner la gauche en un seul bloc ne fait passer son pouvoir que de 32,7 % à 33,3 %.</a:t>
-            </a:r>
-            <a:endParaRPr lang="en-US" sz="1350" dirty="0"/>
-          </a:p>
+              <a:buNone/>
+            </a:pPr>
+            <a:r>
+              <a:rPr lang="en-US" sz="1250" i="1" dirty="0">
+                <a:solidFill>
+                  <a:srgbClr val="CADCFC"/>
+                </a:solidFill>
+              </a:rPr>
+              <a:t>La proportionnelle pure ne lui donnerait que 50 % de pouvoir, partagé. La prime majoritaire fabrique un pouvoir absolu.</a:t>
+            </a:r>
+            <a:endParaRPr lang="en-US" sz="1250" dirty="0"/>
+          </a:p>
+        </p:txBody>
+      </p:sp>
+      <p:sp>
+        <p:nvSpPr>
+          <p:cNvPr id="22" name="Text 20"/>
+          <p:cNvSpPr/>
+          <p:nvPr/>
+        </p:nvSpPr>
+        <p:spPr>
+          <a:xfrm>
+            <a:off x="731520" y="5349240"/>
+            <a:ext cx="10698480" cy="365760"/>
+          </a:xfrm>
+          <a:prstGeom prst="rect">
+            <a:avLst/>
+          </a:prstGeom>
+          <a:noFill/>
+          <a:ln/>
+        </p:spPr>
+        <p:txBody>
+          <a:bodyPr wrap="square" lIns="0" tIns="0" rIns="0" bIns="0" rtlCol="0" anchor="ctr"/>
+          <a:lstStyle/>
           <a:p>
             <a:pPr indent="0" marL="0">
-              <a:spcAft>
-                <a:spcPts val="1000"/>
-              </a:spcAft>
-              <a:buNone/>
-            </a:pPr>
-            <a:r>
-              <a:rPr lang="en-US" sz="1400" b="1" dirty="0">
-                <a:solidFill>
-                  <a:srgbClr val="FFFFFF"/>
-                </a:solidFill>
-              </a:rPr>
-              <a:t>Gain quasi nul : +0,7 point.</a:t>
-            </a:r>
-            <a:endParaRPr lang="en-US" sz="1350" dirty="0"/>
-          </a:p>
-          <a:p>
-            <a:pPr indent="0" marL="0">
-              <a:buNone/>
-            </a:pPr>
-            <a:r>
-              <a:rPr lang="en-US" sz="1250" i="1" dirty="0">
-                <a:solidFill>
-                  <a:srgbClr val="CADCFC"/>
-                </a:solidFill>
-              </a:rPr>
-              <a:t>L'union n'apporte du pouvoir que si elle crée une position de pivot, pas mécaniquement.</a:t>
-            </a:r>
-            <a:endParaRPr lang="en-US" sz="1350" dirty="0"/>
-          </a:p>
-        </p:txBody>
-      </p:sp>
-      <p:sp>
-        <p:nvSpPr>
-          <p:cNvPr id="20" name="Text 18"/>
+              <a:buNone/>
+            </a:pPr>
+            <a:r>
+              <a:rPr lang="en-US" sz="1200" i="1" dirty="0">
+                <a:solidFill>
+                  <a:srgbClr val="5B6478"/>
+                </a:solidFill>
+              </a:rPr>
+              <a:t>Notre implémentation de D'Hondt reproduit exactement la répartition officielle des 81 sièges français.</a:t>
+            </a:r>
+            <a:endParaRPr lang="en-US" sz="1200" dirty="0"/>
+          </a:p>
+        </p:txBody>
+      </p:sp>
+      <p:sp>
+        <p:nvSpPr>
+          <p:cNvPr id="23" name="Text 21"/>
           <p:cNvSpPr/>
           <p:nvPr/>
         </p:nvSpPr>
@@ -3121,7 +3045,7 @@
       </p:sp>
       <p:sp>
         <p:nvSpPr>
-          <p:cNvPr id="21" name="Text 19"/>
+          <p:cNvPr id="24" name="Text 22"/>
           <p:cNvSpPr/>
           <p:nvPr/>
         </p:nvSpPr>
@@ -3149,7 +3073,7 @@
                   <a:srgbClr val="5B6478"/>
                 </a:solidFill>
               </a:rPr>
-              <a:t>10 / 15</a:t>
+              <a:t>10 / 13</a:t>
             </a:r>
             <a:endParaRPr lang="en-US" sz="900" dirty="0"/>
           </a:p>
@@ -3240,7 +3164,7 @@
                 <a:ea typeface="Georgia" pitchFamily="34" charset="-122"/>
                 <a:cs typeface="Georgia" pitchFamily="34" charset="-120"/>
               </a:rPr>
-              <a:t>Confrontation à un vote réel : la censure de 2024</a:t>
+              <a:t>Architecture et validation</a:t>
             </a:r>
             <a:endParaRPr lang="en-US" sz="2700" dirty="0"/>
           </a:p>
@@ -3248,255 +3172,14 @@
       </p:sp>
       <p:sp>
         <p:nvSpPr>
-          <p:cNvPr id="4" name="Text 2"/>
-          <p:cNvSpPr/>
-          <p:nvPr/>
-        </p:nvSpPr>
-        <p:spPr>
-          <a:xfrm>
-            <a:off x="731520" y="1280160"/>
-            <a:ext cx="10698480" cy="640080"/>
-          </a:xfrm>
-          <a:prstGeom prst="rect">
-            <a:avLst/>
-          </a:prstGeom>
-          <a:noFill/>
-          <a:ln/>
-        </p:spPr>
-        <p:txBody>
-          <a:bodyPr wrap="square" lIns="0" tIns="0" rIns="0" bIns="0" rtlCol="0" anchor="ctr"/>
-          <a:lstStyle/>
-          <a:p>
-            <a:pPr indent="0" marL="0">
-              <a:lnSpc>
-                <a:spcPct val="115000"/>
-              </a:lnSpc>
-              <a:buNone/>
-            </a:pPr>
-            <a:r>
-              <a:rPr lang="en-US" sz="1500" dirty="0">
-                <a:solidFill>
-                  <a:srgbClr val="333333"/>
-                </a:solidFill>
-              </a:rPr>
-              <a:t>La théorie prédit un pouvoir a priori. La motion de censure du gouvernement Barnier (4 décembre 2024) fournit un vote réel pour la confronter.</a:t>
-            </a:r>
-            <a:endParaRPr lang="en-US" sz="1500" dirty="0"/>
-          </a:p>
-        </p:txBody>
-      </p:sp>
-      <p:sp>
-        <p:nvSpPr>
-          <p:cNvPr id="5" name="Shape 3"/>
-          <p:cNvSpPr/>
-          <p:nvPr/>
-        </p:nvSpPr>
-        <p:spPr>
-          <a:xfrm>
-            <a:off x="731520" y="2057400"/>
-            <a:ext cx="5120640" cy="3200400"/>
-          </a:xfrm>
-          <a:prstGeom prst="rect">
-            <a:avLst/>
-          </a:prstGeom>
-          <a:solidFill>
-            <a:srgbClr val="1E2761"/>
-          </a:solidFill>
-          <a:ln/>
-          <a:effectLst>
-            <a:outerShdw sx="100000" sy="100000" kx="0" ky="0" algn="bl" rotWithShape="0" blurRad="88900" dist="38100" dir="8100000">
-              <a:srgbClr val="000000">
-                <a:alpha val="12000"/>
-              </a:srgbClr>
-            </a:outerShdw>
-          </a:effectLst>
-        </p:spPr>
-      </p:sp>
-      <p:sp>
-        <p:nvSpPr>
-          <p:cNvPr id="6" name="Text 4"/>
-          <p:cNvSpPr/>
-          <p:nvPr/>
-        </p:nvSpPr>
-        <p:spPr>
-          <a:xfrm>
-            <a:off x="960120" y="2240280"/>
-            <a:ext cx="4663440" cy="365760"/>
-          </a:xfrm>
-          <a:prstGeom prst="rect">
-            <a:avLst/>
-          </a:prstGeom>
-          <a:noFill/>
-          <a:ln/>
-        </p:spPr>
-        <p:txBody>
-          <a:bodyPr wrap="square" lIns="0" tIns="0" rIns="0" bIns="0" rtlCol="0" anchor="ctr"/>
-          <a:lstStyle/>
-          <a:p>
-            <a:pPr indent="0" marL="0">
-              <a:buNone/>
-            </a:pPr>
-            <a:r>
-              <a:rPr lang="en-US" sz="1600" b="1" dirty="0">
-                <a:solidFill>
-                  <a:srgbClr val="F2A900"/>
-                </a:solidFill>
-                <a:latin typeface="Georgia" pitchFamily="34" charset="0"/>
-                <a:ea typeface="Georgia" pitchFamily="34" charset="-122"/>
-                <a:cs typeface="Georgia" pitchFamily="34" charset="-120"/>
-              </a:rPr>
-              <a:t>Coalition NFP + RN + UDR</a:t>
-            </a:r>
-            <a:endParaRPr lang="en-US" sz="1600" dirty="0"/>
-          </a:p>
-        </p:txBody>
-      </p:sp>
-      <p:sp>
-        <p:nvSpPr>
-          <p:cNvPr id="7" name="Text 5"/>
-          <p:cNvSpPr/>
-          <p:nvPr/>
-        </p:nvSpPr>
-        <p:spPr>
-          <a:xfrm>
-            <a:off x="960120" y="2743200"/>
-            <a:ext cx="4663440" cy="548640"/>
-          </a:xfrm>
-          <a:prstGeom prst="rect">
-            <a:avLst/>
-          </a:prstGeom>
-          <a:noFill/>
-          <a:ln/>
-        </p:spPr>
-        <p:txBody>
-          <a:bodyPr wrap="square" lIns="0" tIns="0" rIns="0" bIns="0" rtlCol="0" anchor="ctr"/>
-          <a:lstStyle/>
-          <a:p>
-            <a:pPr indent="0" marL="0">
-              <a:buNone/>
-            </a:pPr>
-            <a:r>
-              <a:rPr lang="en-US" sz="3400" b="1" dirty="0">
-                <a:solidFill>
-                  <a:srgbClr val="FFFFFF"/>
-                </a:solidFill>
-                <a:latin typeface="Georgia" pitchFamily="34" charset="0"/>
-                <a:ea typeface="Georgia" pitchFamily="34" charset="-122"/>
-                <a:cs typeface="Georgia" pitchFamily="34" charset="-120"/>
-              </a:rPr>
-              <a:t>335</a:t>
-            </a:r>
-            <a:pPr indent="0" marL="0">
-              <a:buNone/>
-            </a:pPr>
-            <a:r>
-              <a:rPr lang="en-US" sz="1300" dirty="0">
-                <a:solidFill>
-                  <a:srgbClr val="CADCFC"/>
-                </a:solidFill>
-              </a:rPr>
-              <a:t>  sièges si discipline parfaite</a:t>
-            </a:r>
-            <a:endParaRPr lang="en-US" sz="3400" dirty="0"/>
-          </a:p>
-        </p:txBody>
-      </p:sp>
-      <p:sp>
-        <p:nvSpPr>
-          <p:cNvPr id="8" name="Text 6"/>
-          <p:cNvSpPr/>
-          <p:nvPr/>
-        </p:nvSpPr>
-        <p:spPr>
-          <a:xfrm>
-            <a:off x="960120" y="3383280"/>
-            <a:ext cx="4663440" cy="548640"/>
-          </a:xfrm>
-          <a:prstGeom prst="rect">
-            <a:avLst/>
-          </a:prstGeom>
-          <a:noFill/>
-          <a:ln/>
-        </p:spPr>
-        <p:txBody>
-          <a:bodyPr wrap="square" lIns="0" tIns="0" rIns="0" bIns="0" rtlCol="0" anchor="ctr"/>
-          <a:lstStyle/>
-          <a:p>
-            <a:pPr indent="0" marL="0">
-              <a:buNone/>
-            </a:pPr>
-            <a:r>
-              <a:rPr lang="en-US" sz="3400" b="1" dirty="0">
-                <a:solidFill>
-                  <a:srgbClr val="F2A900"/>
-                </a:solidFill>
-                <a:latin typeface="Georgia" pitchFamily="34" charset="0"/>
-                <a:ea typeface="Georgia" pitchFamily="34" charset="-122"/>
-                <a:cs typeface="Georgia" pitchFamily="34" charset="-120"/>
-              </a:rPr>
-              <a:t>331</a:t>
-            </a:r>
-            <a:pPr indent="0" marL="0">
-              <a:buNone/>
-            </a:pPr>
-            <a:r>
-              <a:rPr lang="en-US" sz="1300" dirty="0">
-                <a:solidFill>
-                  <a:srgbClr val="CADCFC"/>
-                </a:solidFill>
-              </a:rPr>
-              <a:t>  voix réelles (seuil requis : 288)</a:t>
-            </a:r>
-            <a:endParaRPr lang="en-US" sz="3400" dirty="0"/>
-          </a:p>
-        </p:txBody>
-      </p:sp>
-      <p:sp>
-        <p:nvSpPr>
-          <p:cNvPr id="9" name="Text 7"/>
-          <p:cNvSpPr/>
-          <p:nvPr/>
-        </p:nvSpPr>
-        <p:spPr>
-          <a:xfrm>
-            <a:off x="960120" y="4114800"/>
-            <a:ext cx="4663440" cy="822960"/>
-          </a:xfrm>
-          <a:prstGeom prst="rect">
-            <a:avLst/>
-          </a:prstGeom>
-          <a:noFill/>
-          <a:ln/>
-        </p:spPr>
-        <p:txBody>
-          <a:bodyPr wrap="square" lIns="0" tIns="0" rIns="0" bIns="0" rtlCol="0" anchor="t"/>
-          <a:lstStyle/>
-          <a:p>
-            <a:pPr indent="0" marL="0">
-              <a:buNone/>
-            </a:pPr>
-            <a:r>
-              <a:rPr lang="en-US" sz="1250" i="1" dirty="0">
-                <a:solidFill>
-                  <a:srgbClr val="CADCFC"/>
-                </a:solidFill>
-              </a:rPr>
-              <a:t>Coalition gagnante mais non minimale. Groupes réellement critiques : RN, LFI, SOC.</a:t>
-            </a:r>
-            <a:endParaRPr lang="en-US" sz="1250" dirty="0"/>
-          </a:p>
-        </p:txBody>
-      </p:sp>
-      <p:sp>
-        <p:nvSpPr>
-          <p:cNvPr id="10" name="Shape 8"/>
-          <p:cNvSpPr/>
-          <p:nvPr/>
-        </p:nvSpPr>
-        <p:spPr>
-          <a:xfrm>
-            <a:off x="6126480" y="2057400"/>
-            <a:ext cx="5303520" cy="3200400"/>
+          <p:cNvPr id="4" name="Shape 2"/>
+          <p:cNvSpPr/>
+          <p:nvPr/>
+        </p:nvSpPr>
+        <p:spPr>
+          <a:xfrm>
+            <a:off x="731520" y="1417320"/>
+            <a:ext cx="5212080" cy="868680"/>
           </a:xfrm>
           <a:prstGeom prst="rect">
             <a:avLst/>
@@ -3521,14 +3204,14 @@
       </p:sp>
       <p:sp>
         <p:nvSpPr>
-          <p:cNvPr id="11" name="Text 9"/>
-          <p:cNvSpPr/>
-          <p:nvPr/>
-        </p:nvSpPr>
-        <p:spPr>
-          <a:xfrm>
-            <a:off x="6355080" y="2240280"/>
-            <a:ext cx="4846320" cy="640080"/>
+          <p:cNvPr id="5" name="Text 3"/>
+          <p:cNvSpPr/>
+          <p:nvPr/>
+        </p:nvSpPr>
+        <p:spPr>
+          <a:xfrm>
+            <a:off x="914400" y="1527048"/>
+            <a:ext cx="1371600" cy="640080"/>
           </a:xfrm>
           <a:prstGeom prst="rect">
             <a:avLst/>
@@ -3544,643 +3227,66 @@
               <a:buNone/>
             </a:pPr>
             <a:r>
-              <a:rPr lang="en-US" sz="1500" b="1" dirty="0">
-                <a:solidFill>
-                  <a:srgbClr val="1E2761"/>
-                </a:solidFill>
-                <a:latin typeface="Georgia" pitchFamily="34" charset="0"/>
-                <a:ea typeface="Georgia" pitchFamily="34" charset="-122"/>
-                <a:cs typeface="Georgia" pitchFamily="34" charset="-120"/>
-              </a:rPr>
-              <a:t>L'écart mesure l'imperfection de la discipline</a:t>
-            </a:r>
-            <a:endParaRPr lang="en-US" sz="1500" dirty="0"/>
-          </a:p>
-        </p:txBody>
-      </p:sp>
-      <p:sp>
-        <p:nvSpPr>
-          <p:cNvPr id="12" name="Text 10"/>
-          <p:cNvSpPr/>
-          <p:nvPr/>
-        </p:nvSpPr>
-        <p:spPr>
-          <a:xfrm>
-            <a:off x="6355080" y="2880360"/>
-            <a:ext cx="4846320" cy="2286000"/>
-          </a:xfrm>
-          <a:prstGeom prst="rect">
-            <a:avLst/>
-          </a:prstGeom>
-          <a:noFill/>
-          <a:ln/>
-        </p:spPr>
-        <p:txBody>
-          <a:bodyPr wrap="square" lIns="0" tIns="0" rIns="0" bIns="0" rtlCol="0" anchor="t"/>
+              <a:rPr lang="en-US" sz="1600" b="1" dirty="0">
+                <a:solidFill>
+                  <a:srgbClr val="F2A900"/>
+                </a:solidFill>
+                <a:latin typeface="Consolas" pitchFamily="34" charset="0"/>
+                <a:ea typeface="Consolas" pitchFamily="34" charset="-122"/>
+                <a:cs typeface="Consolas" pitchFamily="34" charset="-120"/>
+              </a:rPr>
+              <a:t>core</a:t>
+            </a:r>
+            <a:endParaRPr lang="en-US" sz="1600" dirty="0"/>
+          </a:p>
+        </p:txBody>
+      </p:sp>
+      <p:sp>
+        <p:nvSpPr>
+          <p:cNvPr id="6" name="Text 4"/>
+          <p:cNvSpPr/>
+          <p:nvPr/>
+        </p:nvSpPr>
+        <p:spPr>
+          <a:xfrm>
+            <a:off x="2286000" y="1508760"/>
+            <a:ext cx="3566160" cy="685800"/>
+          </a:xfrm>
+          <a:prstGeom prst="rect">
+            <a:avLst/>
+          </a:prstGeom>
+          <a:noFill/>
+          <a:ln/>
+        </p:spPr>
+        <p:txBody>
+          <a:bodyPr wrap="square" lIns="0" tIns="0" rIns="0" bIns="0" rtlCol="0" anchor="ctr"/>
           <a:lstStyle/>
           <a:p>
             <a:pPr indent="0" marL="0">
-              <a:spcAft>
-                <a:spcPts val="1000"/>
-              </a:spcAft>
-              <a:buNone/>
-            </a:pPr>
-            <a:r>
-              <a:rPr lang="en-US" sz="1350" dirty="0">
+              <a:buNone/>
+            </a:pPr>
+            <a:r>
+              <a:rPr lang="en-US" sz="1200" dirty="0">
                 <a:solidFill>
                   <a:srgbClr val="333333"/>
                 </a:solidFill>
               </a:rPr>
-              <a:t>Notre modèle suppose une discipline de vote parfaite. L'écart de 4 voix entre 335 et 331 la met à l'épreuve.</a:t>
-            </a:r>
-            <a:endParaRPr lang="en-US" sz="1350" dirty="0"/>
-          </a:p>
-          <a:p>
-            <a:pPr marL="342900" indent="-342900">
-              <a:buSzPct val="100000"/>
-              <a:buChar char="•"/>
-            </a:pPr>
-            <a:r>
-              <a:rPr lang="en-US" sz="1400" dirty="0">
-                <a:solidFill>
-                  <a:srgbClr val="C0392B"/>
-                </a:solidFill>
-              </a:rPr>
-              <a:t>6 défections internes à la coalition</a:t>
-            </a:r>
-            <a:endParaRPr lang="en-US" sz="1350" dirty="0"/>
-          </a:p>
-          <a:p>
-            <a:pPr marL="342900" indent="-342900">
-              <a:spcAft>
-                <a:spcPts val="800"/>
-              </a:spcAft>
-              <a:buSzPct val="100000"/>
-              <a:buChar char="•"/>
-            </a:pPr>
-            <a:r>
-              <a:rPr lang="en-US" sz="1400" dirty="0">
-                <a:solidFill>
-                  <a:srgbClr val="2C8A4A"/>
-                </a:solidFill>
-              </a:rPr>
-              <a:t>2 ralliements externes (1 non-inscrit, 1 LIOT)</a:t>
-            </a:r>
-            <a:endParaRPr lang="en-US" sz="1350" dirty="0"/>
-          </a:p>
-          <a:p>
-            <a:pPr indent="0" marL="0">
-              <a:buNone/>
-            </a:pPr>
-            <a:r>
-              <a:rPr lang="en-US" sz="1250" i="1" dirty="0">
-                <a:solidFill>
-                  <a:srgbClr val="5B6478"/>
-                </a:solidFill>
-              </a:rPr>
-              <a:t>L'écart net cache donc des mouvements de sens opposés.</a:t>
-            </a:r>
-            <a:endParaRPr lang="en-US" sz="1350" dirty="0"/>
-          </a:p>
-        </p:txBody>
-      </p:sp>
-      <p:sp>
-        <p:nvSpPr>
-          <p:cNvPr id="13" name="Text 11"/>
-          <p:cNvSpPr/>
-          <p:nvPr/>
-        </p:nvSpPr>
-        <p:spPr>
-          <a:xfrm>
-            <a:off x="457200" y="6446520"/>
-            <a:ext cx="7315200" cy="274320"/>
-          </a:xfrm>
-          <a:prstGeom prst="rect">
-            <a:avLst/>
-          </a:prstGeom>
-          <a:noFill/>
-          <a:ln/>
-        </p:spPr>
-        <p:txBody>
-          <a:bodyPr wrap="square" lIns="0" tIns="0" rIns="0" bIns="0" rtlCol="0" anchor="ctr"/>
-          <a:lstStyle/>
-          <a:p>
-            <a:pPr algn="l" indent="0" marL="0">
-              <a:buNone/>
-            </a:pPr>
-            <a:r>
-              <a:rPr lang="en-US" sz="900" dirty="0">
-                <a:solidFill>
-                  <a:srgbClr val="5B6478"/>
-                </a:solidFill>
-              </a:rPr>
-              <a:t>T1 - Pouvoir de coalition par vérification formelle</a:t>
-            </a:r>
-            <a:endParaRPr lang="en-US" sz="900" dirty="0"/>
-          </a:p>
-        </p:txBody>
-      </p:sp>
-      <p:sp>
-        <p:nvSpPr>
-          <p:cNvPr id="14" name="Text 12"/>
-          <p:cNvSpPr/>
-          <p:nvPr/>
-        </p:nvSpPr>
-        <p:spPr>
-          <a:xfrm>
-            <a:off x="10972800" y="6446520"/>
-            <a:ext cx="731520" cy="274320"/>
-          </a:xfrm>
-          <a:prstGeom prst="rect">
-            <a:avLst/>
-          </a:prstGeom>
-          <a:noFill/>
-          <a:ln/>
-        </p:spPr>
-        <p:txBody>
-          <a:bodyPr wrap="square" lIns="0" tIns="0" rIns="0" bIns="0" rtlCol="0" anchor="ctr"/>
-          <a:lstStyle/>
-          <a:p>
-            <a:pPr algn="r" indent="0" marL="0">
-              <a:buNone/>
-            </a:pPr>
-            <a:r>
-              <a:rPr lang="en-US" sz="900" dirty="0">
-                <a:solidFill>
-                  <a:srgbClr val="5B6478"/>
-                </a:solidFill>
-              </a:rPr>
-              <a:t>11 / 15</a:t>
-            </a:r>
-            <a:endParaRPr lang="en-US" sz="900" dirty="0"/>
-          </a:p>
-        </p:txBody>
-      </p:sp>
-    </p:spTree>
-  </p:cSld>
-  <p:clrMapOvr>
-    <a:masterClrMapping/>
-  </p:clrMapOvr>
-</p:sld>
-</file>
-
-<file path=ppt/slides/slide12.xml><?xml version="1.0" encoding="utf-8"?>
-<p:sld xmlns:a="http://schemas.openxmlformats.org/drawingml/2006/main" xmlns:r="http://schemas.openxmlformats.org/officeDocument/2006/relationships" xmlns:p="http://schemas.openxmlformats.org/presentationml/2006/main">
-  <p:cSld name="Slide 12">
-    <p:bg>
-      <p:bgPr>
-        <a:solidFill>
-          <a:srgbClr val="F5F7FA"/>
-        </a:solidFill>
-      </p:bgPr>
-    </p:bg>
-    <p:spTree>
-      <p:nvGrpSpPr>
-        <p:cNvPr id="1" name=""/>
-        <p:cNvGrpSpPr/>
-        <p:nvPr/>
-      </p:nvGrpSpPr>
-      <p:grpSpPr>
-        <a:xfrm>
-          <a:off x="0" y="0"/>
-          <a:ext cx="0" cy="0"/>
-          <a:chOff x="0" y="0"/>
-          <a:chExt cx="0" cy="0"/>
-        </a:xfrm>
-      </p:grpSpPr>
-      <p:sp>
-        <p:nvSpPr>
-          <p:cNvPr id="2" name="Shape 0"/>
-          <p:cNvSpPr/>
-          <p:nvPr/>
-        </p:nvSpPr>
-        <p:spPr>
-          <a:xfrm>
-            <a:off x="457200" y="411480"/>
-            <a:ext cx="109728" cy="566928"/>
-          </a:xfrm>
-          <a:prstGeom prst="rect">
-            <a:avLst/>
-          </a:prstGeom>
-          <a:solidFill>
-            <a:srgbClr val="F2A900"/>
-          </a:solidFill>
-          <a:ln/>
-        </p:spPr>
-      </p:sp>
-      <p:sp>
-        <p:nvSpPr>
-          <p:cNvPr id="3" name="Text 1"/>
-          <p:cNvSpPr/>
-          <p:nvPr/>
-        </p:nvSpPr>
-        <p:spPr>
-          <a:xfrm>
-            <a:off x="713232" y="384048"/>
-            <a:ext cx="10789920" cy="640080"/>
-          </a:xfrm>
-          <a:prstGeom prst="rect">
-            <a:avLst/>
-          </a:prstGeom>
-          <a:noFill/>
-          <a:ln/>
-        </p:spPr>
-        <p:txBody>
-          <a:bodyPr wrap="square" lIns="0" tIns="0" rIns="0" bIns="0" rtlCol="0" anchor="ctr"/>
-          <a:lstStyle/>
-          <a:p>
-            <a:pPr algn="l" indent="0" marL="0">
-              <a:buNone/>
-            </a:pPr>
-            <a:r>
-              <a:rPr lang="en-US" sz="2700" b="1" dirty="0">
-                <a:solidFill>
-                  <a:srgbClr val="1E2761"/>
-                </a:solidFill>
-                <a:latin typeface="Georgia" pitchFamily="34" charset="0"/>
-                <a:ea typeface="Georgia" pitchFamily="34" charset="-122"/>
-                <a:cs typeface="Georgia" pitchFamily="34" charset="-120"/>
-              </a:rPr>
-              <a:t>Application : européennes 2024 (D'Hondt)</a:t>
-            </a:r>
-            <a:endParaRPr lang="en-US" sz="2700" dirty="0"/>
-          </a:p>
-        </p:txBody>
-      </p:sp>
-      <p:pic>
-        <p:nvPicPr>
-          <p:cNvPr id="4" name="Image 0" descr="/private/tmp/claude-501/-Users-iliaskalalou-EPITA-IA-symbolic/41e9eafa-8b36-4a62-b3f1-971646836a16/scratchpad/slides_t1/dhondt_2024.png">    </p:cNvPr>
-          <p:cNvPicPr>
-            <a:picLocks noChangeAspect="1"/>
-          </p:cNvPicPr>
-          <p:nvPr/>
-        </p:nvPicPr>
-        <p:blipFill>
-          <a:blip r:embed="rId1"/>
-          <a:srcRect l="0" r="0" t="0" b="0"/>
-          <a:stretch/>
-        </p:blipFill>
-        <p:spPr>
-          <a:xfrm>
-            <a:off x="640080" y="1371600"/>
-            <a:ext cx="6949440" cy="4023360"/>
-          </a:xfrm>
-          <a:prstGeom prst="rect">
-            <a:avLst/>
-          </a:prstGeom>
-        </p:spPr>
-      </p:pic>
-      <p:sp>
-        <p:nvSpPr>
-          <p:cNvPr id="5" name="Shape 2"/>
-          <p:cNvSpPr/>
-          <p:nvPr/>
-        </p:nvSpPr>
-        <p:spPr>
-          <a:xfrm>
-            <a:off x="7863840" y="1554480"/>
-            <a:ext cx="3611880" cy="3200400"/>
-          </a:xfrm>
-          <a:prstGeom prst="rect">
-            <a:avLst/>
-          </a:prstGeom>
-          <a:solidFill>
-            <a:srgbClr val="1E2761"/>
-          </a:solidFill>
-          <a:ln/>
-          <a:effectLst>
-            <a:outerShdw sx="100000" sy="100000" kx="0" ky="0" algn="bl" rotWithShape="0" blurRad="88900" dist="38100" dir="8100000">
-              <a:srgbClr val="000000">
-                <a:alpha val="12000"/>
-              </a:srgbClr>
-            </a:outerShdw>
-          </a:effectLst>
-        </p:spPr>
-      </p:sp>
-      <p:sp>
-        <p:nvSpPr>
-          <p:cNvPr id="6" name="Text 3"/>
-          <p:cNvSpPr/>
-          <p:nvPr/>
-        </p:nvSpPr>
-        <p:spPr>
-          <a:xfrm>
-            <a:off x="8092440" y="1783080"/>
-            <a:ext cx="3200400" cy="731520"/>
-          </a:xfrm>
-          <a:prstGeom prst="rect">
-            <a:avLst/>
-          </a:prstGeom>
-          <a:noFill/>
-          <a:ln/>
-        </p:spPr>
-        <p:txBody>
-          <a:bodyPr wrap="square" lIns="0" tIns="0" rIns="0" bIns="0" rtlCol="0" anchor="ctr"/>
-          <a:lstStyle/>
-          <a:p>
-            <a:pPr indent="0" marL="0">
-              <a:buNone/>
-            </a:pPr>
-            <a:r>
-              <a:rPr lang="en-US" sz="1600" b="1" dirty="0">
-                <a:solidFill>
-                  <a:srgbClr val="F2A900"/>
-                </a:solidFill>
-                <a:latin typeface="Georgia" pitchFamily="34" charset="0"/>
-                <a:ea typeface="Georgia" pitchFamily="34" charset="-122"/>
-                <a:cs typeface="Georgia" pitchFamily="34" charset="-120"/>
-              </a:rPr>
-              <a:t>Proportionnelle à la plus forte moyenne</a:t>
-            </a:r>
-            <a:endParaRPr lang="en-US" sz="1600" dirty="0"/>
-          </a:p>
-        </p:txBody>
-      </p:sp>
-      <p:sp>
-        <p:nvSpPr>
-          <p:cNvPr id="7" name="Text 4"/>
-          <p:cNvSpPr/>
-          <p:nvPr/>
-        </p:nvSpPr>
-        <p:spPr>
-          <a:xfrm>
-            <a:off x="8092440" y="2606040"/>
-            <a:ext cx="3200400" cy="2103120"/>
-          </a:xfrm>
-          <a:prstGeom prst="rect">
-            <a:avLst/>
-          </a:prstGeom>
-          <a:noFill/>
-          <a:ln/>
-        </p:spPr>
-        <p:txBody>
-          <a:bodyPr wrap="square" lIns="0" tIns="0" rIns="0" bIns="0" rtlCol="0" anchor="t"/>
-          <a:lstStyle/>
-          <a:p>
-            <a:pPr marL="342900" indent="-342900">
-              <a:spcAft>
-                <a:spcPts val="800"/>
-              </a:spcAft>
-              <a:buSzPct val="100000"/>
-              <a:buChar char="•"/>
-            </a:pPr>
-            <a:r>
-              <a:rPr lang="en-US" sz="1350" dirty="0">
-                <a:solidFill>
-                  <a:srgbClr val="FFFFFF"/>
-                </a:solidFill>
-              </a:rPr>
-              <a:t>81 sièges, seuil de 5 %.</a:t>
-            </a:r>
-            <a:endParaRPr lang="en-US" sz="1350" dirty="0"/>
-          </a:p>
-          <a:p>
-            <a:pPr marL="342900" indent="-342900">
-              <a:spcAft>
-                <a:spcPts val="800"/>
-              </a:spcAft>
-              <a:buSzPct val="100000"/>
-              <a:buChar char="•"/>
-            </a:pPr>
-            <a:r>
-              <a:rPr lang="en-US" sz="1350" dirty="0">
-                <a:solidFill>
-                  <a:srgbClr val="FFFFFF"/>
-                </a:solidFill>
-              </a:rPr>
-              <a:t>Notre implémentation reproduit exactement la répartition officielle.</a:t>
-            </a:r>
-            <a:endParaRPr lang="en-US" sz="1350" dirty="0"/>
-          </a:p>
-          <a:p>
-            <a:pPr marL="342900" indent="-342900">
-              <a:buSzPct val="100000"/>
-              <a:buChar char="•"/>
-            </a:pPr>
-            <a:r>
-              <a:rPr lang="en-US" sz="1350" dirty="0">
-                <a:solidFill>
-                  <a:srgbClr val="FFFFFF"/>
-                </a:solidFill>
-              </a:rPr>
-              <a:t>Le dernier siège s'obtient à un quotient frontière : c'est le prix effectif d'un siège.</a:t>
-            </a:r>
-            <a:endParaRPr lang="en-US" sz="1350" dirty="0"/>
-          </a:p>
-        </p:txBody>
-      </p:sp>
-      <p:sp>
-        <p:nvSpPr>
-          <p:cNvPr id="8" name="Text 5"/>
-          <p:cNvSpPr/>
-          <p:nvPr/>
-        </p:nvSpPr>
-        <p:spPr>
-          <a:xfrm>
-            <a:off x="457200" y="6446520"/>
-            <a:ext cx="7315200" cy="274320"/>
-          </a:xfrm>
-          <a:prstGeom prst="rect">
-            <a:avLst/>
-          </a:prstGeom>
-          <a:noFill/>
-          <a:ln/>
-        </p:spPr>
-        <p:txBody>
-          <a:bodyPr wrap="square" lIns="0" tIns="0" rIns="0" bIns="0" rtlCol="0" anchor="ctr"/>
-          <a:lstStyle/>
-          <a:p>
-            <a:pPr algn="l" indent="0" marL="0">
-              <a:buNone/>
-            </a:pPr>
-            <a:r>
-              <a:rPr lang="en-US" sz="900" dirty="0">
-                <a:solidFill>
-                  <a:srgbClr val="5B6478"/>
-                </a:solidFill>
-              </a:rPr>
-              <a:t>T1 - Pouvoir de coalition par vérification formelle</a:t>
-            </a:r>
-            <a:endParaRPr lang="en-US" sz="900" dirty="0"/>
-          </a:p>
-        </p:txBody>
-      </p:sp>
-      <p:sp>
-        <p:nvSpPr>
-          <p:cNvPr id="9" name="Text 6"/>
-          <p:cNvSpPr/>
-          <p:nvPr/>
-        </p:nvSpPr>
-        <p:spPr>
-          <a:xfrm>
-            <a:off x="10972800" y="6446520"/>
-            <a:ext cx="731520" cy="274320"/>
-          </a:xfrm>
-          <a:prstGeom prst="rect">
-            <a:avLst/>
-          </a:prstGeom>
-          <a:noFill/>
-          <a:ln/>
-        </p:spPr>
-        <p:txBody>
-          <a:bodyPr wrap="square" lIns="0" tIns="0" rIns="0" bIns="0" rtlCol="0" anchor="ctr"/>
-          <a:lstStyle/>
-          <a:p>
-            <a:pPr algn="r" indent="0" marL="0">
-              <a:buNone/>
-            </a:pPr>
-            <a:r>
-              <a:rPr lang="en-US" sz="900" dirty="0">
-                <a:solidFill>
-                  <a:srgbClr val="5B6478"/>
-                </a:solidFill>
-              </a:rPr>
-              <a:t>12 / 15</a:t>
-            </a:r>
-            <a:endParaRPr lang="en-US" sz="900" dirty="0"/>
-          </a:p>
-        </p:txBody>
-      </p:sp>
-    </p:spTree>
-  </p:cSld>
-  <p:clrMapOvr>
-    <a:masterClrMapping/>
-  </p:clrMapOvr>
-</p:sld>
-</file>
-
-<file path=ppt/slides/slide13.xml><?xml version="1.0" encoding="utf-8"?>
-<p:sld xmlns:a="http://schemas.openxmlformats.org/drawingml/2006/main" xmlns:r="http://schemas.openxmlformats.org/officeDocument/2006/relationships" xmlns:p="http://schemas.openxmlformats.org/presentationml/2006/main">
-  <p:cSld name="Slide 13">
-    <p:bg>
-      <p:bgPr>
-        <a:solidFill>
-          <a:srgbClr val="F5F7FA"/>
-        </a:solidFill>
-      </p:bgPr>
-    </p:bg>
-    <p:spTree>
-      <p:nvGrpSpPr>
-        <p:cNvPr id="1" name=""/>
-        <p:cNvGrpSpPr/>
-        <p:nvPr/>
-      </p:nvGrpSpPr>
-      <p:grpSpPr>
-        <a:xfrm>
-          <a:off x="0" y="0"/>
-          <a:ext cx="0" cy="0"/>
-          <a:chOff x="0" y="0"/>
-          <a:chExt cx="0" cy="0"/>
-        </a:xfrm>
-      </p:grpSpPr>
-      <p:sp>
-        <p:nvSpPr>
-          <p:cNvPr id="2" name="Shape 0"/>
-          <p:cNvSpPr/>
-          <p:nvPr/>
-        </p:nvSpPr>
-        <p:spPr>
-          <a:xfrm>
-            <a:off x="457200" y="411480"/>
-            <a:ext cx="109728" cy="566928"/>
-          </a:xfrm>
-          <a:prstGeom prst="rect">
-            <a:avLst/>
-          </a:prstGeom>
-          <a:solidFill>
-            <a:srgbClr val="F2A900"/>
-          </a:solidFill>
-          <a:ln/>
-        </p:spPr>
-      </p:sp>
-      <p:sp>
-        <p:nvSpPr>
-          <p:cNvPr id="3" name="Text 1"/>
-          <p:cNvSpPr/>
-          <p:nvPr/>
-        </p:nvSpPr>
-        <p:spPr>
-          <a:xfrm>
-            <a:off x="713232" y="384048"/>
-            <a:ext cx="10789920" cy="640080"/>
-          </a:xfrm>
-          <a:prstGeom prst="rect">
-            <a:avLst/>
-          </a:prstGeom>
-          <a:noFill/>
-          <a:ln/>
-        </p:spPr>
-        <p:txBody>
-          <a:bodyPr wrap="square" lIns="0" tIns="0" rIns="0" bIns="0" rtlCol="0" anchor="ctr"/>
-          <a:lstStyle/>
-          <a:p>
-            <a:pPr algn="l" indent="0" marL="0">
-              <a:buNone/>
-            </a:pPr>
-            <a:r>
-              <a:rPr lang="en-US" sz="2700" b="1" dirty="0">
-                <a:solidFill>
-                  <a:srgbClr val="1E2761"/>
-                </a:solidFill>
-                <a:latin typeface="Georgia" pitchFamily="34" charset="0"/>
-                <a:ea typeface="Georgia" pitchFamily="34" charset="-122"/>
-                <a:cs typeface="Georgia" pitchFamily="34" charset="-120"/>
-              </a:rPr>
-              <a:t>Le mode de scrutin déplace le pouvoir</a:t>
-            </a:r>
-            <a:endParaRPr lang="en-US" sz="2700" dirty="0"/>
-          </a:p>
-        </p:txBody>
-      </p:sp>
-      <p:sp>
-        <p:nvSpPr>
-          <p:cNvPr id="4" name="Text 2"/>
-          <p:cNvSpPr/>
-          <p:nvPr/>
-        </p:nvSpPr>
-        <p:spPr>
-          <a:xfrm>
-            <a:off x="731520" y="1280160"/>
-            <a:ext cx="10698480" cy="640080"/>
-          </a:xfrm>
-          <a:prstGeom prst="rect">
-            <a:avLst/>
-          </a:prstGeom>
-          <a:noFill/>
-          <a:ln/>
-        </p:spPr>
-        <p:txBody>
-          <a:bodyPr wrap="square" lIns="0" tIns="0" rIns="0" bIns="0" rtlCol="0" anchor="ctr"/>
-          <a:lstStyle/>
-          <a:p>
-            <a:pPr indent="0" marL="0">
-              <a:lnSpc>
-                <a:spcPct val="115000"/>
-              </a:lnSpc>
-              <a:buNone/>
-            </a:pPr>
-            <a:r>
-              <a:rPr lang="en-US" sz="1500" dirty="0">
-                <a:solidFill>
-                  <a:srgbClr val="333333"/>
-                </a:solidFill>
-              </a:rPr>
-              <a:t>À suffrages strictement constants, on fait varier la seule règle d'attribution des sièges et on recalcule le pouvoir. Le mode de scrutin pèse plus que la part de sièges.</a:t>
-            </a:r>
-            <a:endParaRPr lang="en-US" sz="1500" dirty="0"/>
-          </a:p>
-        </p:txBody>
-      </p:sp>
-      <p:sp>
-        <p:nvSpPr>
-          <p:cNvPr id="5" name="Shape 3"/>
-          <p:cNvSpPr/>
-          <p:nvPr/>
-        </p:nvSpPr>
-        <p:spPr>
-          <a:xfrm>
-            <a:off x="731520" y="2057400"/>
-            <a:ext cx="5257800" cy="3200400"/>
+              <a:t>Jeux de vote pondérés, coalitions, statut des joueurs</a:t>
+            </a:r>
+            <a:endParaRPr lang="en-US" sz="1200" dirty="0"/>
+          </a:p>
+        </p:txBody>
+      </p:sp>
+      <p:sp>
+        <p:nvSpPr>
+          <p:cNvPr id="7" name="Shape 5"/>
+          <p:cNvSpPr/>
+          <p:nvPr/>
+        </p:nvSpPr>
+        <p:spPr>
+          <a:xfrm>
+            <a:off x="6217920" y="1417320"/>
+            <a:ext cx="5212080" cy="868680"/>
           </a:xfrm>
           <a:prstGeom prst="rect">
             <a:avLst/>
@@ -4205,14 +3311,14 @@
       </p:sp>
       <p:sp>
         <p:nvSpPr>
-          <p:cNvPr id="6" name="Text 4"/>
-          <p:cNvSpPr/>
-          <p:nvPr/>
-        </p:nvSpPr>
-        <p:spPr>
-          <a:xfrm>
-            <a:off x="960120" y="2240280"/>
-            <a:ext cx="4846320" cy="365760"/>
+          <p:cNvPr id="8" name="Text 6"/>
+          <p:cNvSpPr/>
+          <p:nvPr/>
+        </p:nvSpPr>
+        <p:spPr>
+          <a:xfrm>
+            <a:off x="6400800" y="1527048"/>
+            <a:ext cx="1371600" cy="640080"/>
           </a:xfrm>
           <a:prstGeom prst="rect">
             <a:avLst/>
@@ -4228,30 +3334,30 @@
               <a:buNone/>
             </a:pPr>
             <a:r>
-              <a:rPr lang="en-US" sz="1500" b="1" dirty="0">
-                <a:solidFill>
-                  <a:srgbClr val="1E2761"/>
-                </a:solidFill>
-                <a:latin typeface="Georgia" pitchFamily="34" charset="0"/>
-                <a:ea typeface="Georgia" pitchFamily="34" charset="-122"/>
-                <a:cs typeface="Georgia" pitchFamily="34" charset="-120"/>
-              </a:rPr>
-              <a:t>Européennes 2024, pouvoir du RN</a:t>
-            </a:r>
-            <a:endParaRPr lang="en-US" sz="1500" dirty="0"/>
-          </a:p>
-        </p:txBody>
-      </p:sp>
-      <p:sp>
-        <p:nvSpPr>
-          <p:cNvPr id="7" name="Text 5"/>
-          <p:cNvSpPr/>
-          <p:nvPr/>
-        </p:nvSpPr>
-        <p:spPr>
-          <a:xfrm>
-            <a:off x="960120" y="2788920"/>
-            <a:ext cx="2377440" cy="457200"/>
+              <a:rPr lang="en-US" sz="1600" b="1" dirty="0">
+                <a:solidFill>
+                  <a:srgbClr val="F2A900"/>
+                </a:solidFill>
+                <a:latin typeface="Consolas" pitchFamily="34" charset="0"/>
+                <a:ea typeface="Consolas" pitchFamily="34" charset="-122"/>
+                <a:cs typeface="Consolas" pitchFamily="34" charset="-120"/>
+              </a:rPr>
+              <a:t>indices</a:t>
+            </a:r>
+            <a:endParaRPr lang="en-US" sz="1600" dirty="0"/>
+          </a:p>
+        </p:txBody>
+      </p:sp>
+      <p:sp>
+        <p:nvSpPr>
+          <p:cNvPr id="9" name="Text 7"/>
+          <p:cNvSpPr/>
+          <p:nvPr/>
+        </p:nvSpPr>
+        <p:spPr>
+          <a:xfrm>
+            <a:off x="7772400" y="1508760"/>
+            <a:ext cx="3566160" cy="685800"/>
           </a:xfrm>
           <a:prstGeom prst="rect">
             <a:avLst/>
@@ -4267,336 +3373,12 @@
               <a:buNone/>
             </a:pPr>
             <a:r>
-              <a:rPr lang="en-US" sz="1400" b="1" dirty="0">
-                <a:solidFill>
-                  <a:srgbClr val="1E2761"/>
-                </a:solidFill>
-              </a:rPr>
-              <a:t>D'Hondt</a:t>
-            </a:r>
-            <a:endParaRPr lang="en-US" sz="1400" dirty="0"/>
-          </a:p>
-        </p:txBody>
-      </p:sp>
-      <p:sp>
-        <p:nvSpPr>
-          <p:cNvPr id="8" name="Text 6"/>
-          <p:cNvSpPr/>
-          <p:nvPr/>
-        </p:nvSpPr>
-        <p:spPr>
-          <a:xfrm>
-            <a:off x="3291840" y="2788920"/>
-            <a:ext cx="1280160" cy="457200"/>
-          </a:xfrm>
-          <a:prstGeom prst="rect">
-            <a:avLst/>
-          </a:prstGeom>
-          <a:noFill/>
-          <a:ln/>
-        </p:spPr>
-        <p:txBody>
-          <a:bodyPr wrap="square" lIns="0" tIns="0" rIns="0" bIns="0" rtlCol="0" anchor="ctr"/>
-          <a:lstStyle/>
-          <a:p>
-            <a:pPr indent="0" marL="0">
-              <a:buNone/>
-            </a:pPr>
-            <a:r>
-              <a:rPr lang="en-US" sz="1300" dirty="0">
+              <a:rPr lang="en-US" sz="1200" dirty="0">
                 <a:solidFill>
                   <a:srgbClr val="333333"/>
                 </a:solidFill>
               </a:rPr>
-              <a:t>30 sièges</a:t>
-            </a:r>
-            <a:endParaRPr lang="en-US" sz="1300" dirty="0"/>
-          </a:p>
-        </p:txBody>
-      </p:sp>
-      <p:sp>
-        <p:nvSpPr>
-          <p:cNvPr id="9" name="Text 7"/>
-          <p:cNvSpPr/>
-          <p:nvPr/>
-        </p:nvSpPr>
-        <p:spPr>
-          <a:xfrm>
-            <a:off x="4572000" y="2788920"/>
-            <a:ext cx="1280160" cy="457200"/>
-          </a:xfrm>
-          <a:prstGeom prst="rect">
-            <a:avLst/>
-          </a:prstGeom>
-          <a:noFill/>
-          <a:ln/>
-        </p:spPr>
-        <p:txBody>
-          <a:bodyPr wrap="square" lIns="0" tIns="0" rIns="0" bIns="0" rtlCol="0" anchor="ctr"/>
-          <a:lstStyle/>
-          <a:p>
-            <a:pPr indent="0" marL="0">
-              <a:buNone/>
-            </a:pPr>
-            <a:r>
-              <a:rPr lang="en-US" sz="1500" b="1" dirty="0">
-                <a:solidFill>
-                  <a:srgbClr val="F2A900"/>
-                </a:solidFill>
-              </a:rPr>
-              <a:t>50,5 %</a:t>
-            </a:r>
-            <a:endParaRPr lang="en-US" sz="1500" dirty="0"/>
-          </a:p>
-        </p:txBody>
-      </p:sp>
-      <p:sp>
-        <p:nvSpPr>
-          <p:cNvPr id="10" name="Text 8"/>
-          <p:cNvSpPr/>
-          <p:nvPr/>
-        </p:nvSpPr>
-        <p:spPr>
-          <a:xfrm>
-            <a:off x="960120" y="3429000"/>
-            <a:ext cx="2377440" cy="457200"/>
-          </a:xfrm>
-          <a:prstGeom prst="rect">
-            <a:avLst/>
-          </a:prstGeom>
-          <a:noFill/>
-          <a:ln/>
-        </p:spPr>
-        <p:txBody>
-          <a:bodyPr wrap="square" lIns="0" tIns="0" rIns="0" bIns="0" rtlCol="0" anchor="ctr"/>
-          <a:lstStyle/>
-          <a:p>
-            <a:pPr indent="0" marL="0">
-              <a:buNone/>
-            </a:pPr>
-            <a:r>
-              <a:rPr lang="en-US" sz="1400" b="1" dirty="0">
-                <a:solidFill>
-                  <a:srgbClr val="1E2761"/>
-                </a:solidFill>
-              </a:rPr>
-              <a:t>Sainte-Laguë</a:t>
-            </a:r>
-            <a:endParaRPr lang="en-US" sz="1400" dirty="0"/>
-          </a:p>
-        </p:txBody>
-      </p:sp>
-      <p:sp>
-        <p:nvSpPr>
-          <p:cNvPr id="11" name="Text 9"/>
-          <p:cNvSpPr/>
-          <p:nvPr/>
-        </p:nvSpPr>
-        <p:spPr>
-          <a:xfrm>
-            <a:off x="3291840" y="3429000"/>
-            <a:ext cx="1280160" cy="457200"/>
-          </a:xfrm>
-          <a:prstGeom prst="rect">
-            <a:avLst/>
-          </a:prstGeom>
-          <a:noFill/>
-          <a:ln/>
-        </p:spPr>
-        <p:txBody>
-          <a:bodyPr wrap="square" lIns="0" tIns="0" rIns="0" bIns="0" rtlCol="0" anchor="ctr"/>
-          <a:lstStyle/>
-          <a:p>
-            <a:pPr indent="0" marL="0">
-              <a:buNone/>
-            </a:pPr>
-            <a:r>
-              <a:rPr lang="en-US" sz="1300" dirty="0">
-                <a:solidFill>
-                  <a:srgbClr val="333333"/>
-                </a:solidFill>
-              </a:rPr>
-              <a:t>29 sièges</a:t>
-            </a:r>
-            <a:endParaRPr lang="en-US" sz="1300" dirty="0"/>
-          </a:p>
-        </p:txBody>
-      </p:sp>
-      <p:sp>
-        <p:nvSpPr>
-          <p:cNvPr id="12" name="Text 10"/>
-          <p:cNvSpPr/>
-          <p:nvPr/>
-        </p:nvSpPr>
-        <p:spPr>
-          <a:xfrm>
-            <a:off x="4572000" y="3429000"/>
-            <a:ext cx="1280160" cy="457200"/>
-          </a:xfrm>
-          <a:prstGeom prst="rect">
-            <a:avLst/>
-          </a:prstGeom>
-          <a:noFill/>
-          <a:ln/>
-        </p:spPr>
-        <p:txBody>
-          <a:bodyPr wrap="square" lIns="0" tIns="0" rIns="0" bIns="0" rtlCol="0" anchor="ctr"/>
-          <a:lstStyle/>
-          <a:p>
-            <a:pPr indent="0" marL="0">
-              <a:buNone/>
-            </a:pPr>
-            <a:r>
-              <a:rPr lang="en-US" sz="1500" b="1" dirty="0">
-                <a:solidFill>
-                  <a:srgbClr val="F2A900"/>
-                </a:solidFill>
-              </a:rPr>
-              <a:t>50,5 %</a:t>
-            </a:r>
-            <a:endParaRPr lang="en-US" sz="1500" dirty="0"/>
-          </a:p>
-        </p:txBody>
-      </p:sp>
-      <p:sp>
-        <p:nvSpPr>
-          <p:cNvPr id="13" name="Text 11"/>
-          <p:cNvSpPr/>
-          <p:nvPr/>
-        </p:nvSpPr>
-        <p:spPr>
-          <a:xfrm>
-            <a:off x="960120" y="4069080"/>
-            <a:ext cx="2377440" cy="457200"/>
-          </a:xfrm>
-          <a:prstGeom prst="rect">
-            <a:avLst/>
-          </a:prstGeom>
-          <a:noFill/>
-          <a:ln/>
-        </p:spPr>
-        <p:txBody>
-          <a:bodyPr wrap="square" lIns="0" tIns="0" rIns="0" bIns="0" rtlCol="0" anchor="ctr"/>
-          <a:lstStyle/>
-          <a:p>
-            <a:pPr indent="0" marL="0">
-              <a:buNone/>
-            </a:pPr>
-            <a:r>
-              <a:rPr lang="en-US" sz="1400" b="1" dirty="0">
-                <a:solidFill>
-                  <a:srgbClr val="1E2761"/>
-                </a:solidFill>
-              </a:rPr>
-              <a:t>Majoritaire intégral</a:t>
-            </a:r>
-            <a:endParaRPr lang="en-US" sz="1400" dirty="0"/>
-          </a:p>
-        </p:txBody>
-      </p:sp>
-      <p:sp>
-        <p:nvSpPr>
-          <p:cNvPr id="14" name="Text 12"/>
-          <p:cNvSpPr/>
-          <p:nvPr/>
-        </p:nvSpPr>
-        <p:spPr>
-          <a:xfrm>
-            <a:off x="3291840" y="4069080"/>
-            <a:ext cx="1280160" cy="457200"/>
-          </a:xfrm>
-          <a:prstGeom prst="rect">
-            <a:avLst/>
-          </a:prstGeom>
-          <a:noFill/>
-          <a:ln/>
-        </p:spPr>
-        <p:txBody>
-          <a:bodyPr wrap="square" lIns="0" tIns="0" rIns="0" bIns="0" rtlCol="0" anchor="ctr"/>
-          <a:lstStyle/>
-          <a:p>
-            <a:pPr indent="0" marL="0">
-              <a:buNone/>
-            </a:pPr>
-            <a:r>
-              <a:rPr lang="en-US" sz="1300" dirty="0">
-                <a:solidFill>
-                  <a:srgbClr val="333333"/>
-                </a:solidFill>
-              </a:rPr>
-              <a:t>81 sièges</a:t>
-            </a:r>
-            <a:endParaRPr lang="en-US" sz="1300" dirty="0"/>
-          </a:p>
-        </p:txBody>
-      </p:sp>
-      <p:sp>
-        <p:nvSpPr>
-          <p:cNvPr id="15" name="Text 13"/>
-          <p:cNvSpPr/>
-          <p:nvPr/>
-        </p:nvSpPr>
-        <p:spPr>
-          <a:xfrm>
-            <a:off x="4572000" y="4069080"/>
-            <a:ext cx="1280160" cy="457200"/>
-          </a:xfrm>
-          <a:prstGeom prst="rect">
-            <a:avLst/>
-          </a:prstGeom>
-          <a:noFill/>
-          <a:ln/>
-        </p:spPr>
-        <p:txBody>
-          <a:bodyPr wrap="square" lIns="0" tIns="0" rIns="0" bIns="0" rtlCol="0" anchor="ctr"/>
-          <a:lstStyle/>
-          <a:p>
-            <a:pPr indent="0" marL="0">
-              <a:buNone/>
-            </a:pPr>
-            <a:r>
-              <a:rPr lang="en-US" sz="1500" b="1" dirty="0">
-                <a:solidFill>
-                  <a:srgbClr val="C0392B"/>
-                </a:solidFill>
-              </a:rPr>
-              <a:t>100 %</a:t>
-            </a:r>
-            <a:endParaRPr lang="en-US" sz="1500" dirty="0"/>
-          </a:p>
-        </p:txBody>
-      </p:sp>
-      <p:sp>
-        <p:nvSpPr>
-          <p:cNvPr id="16" name="Text 14"/>
-          <p:cNvSpPr/>
-          <p:nvPr/>
-        </p:nvSpPr>
-        <p:spPr>
-          <a:xfrm>
-            <a:off x="960120" y="4754880"/>
-            <a:ext cx="4846320" cy="457200"/>
-          </a:xfrm>
-          <a:prstGeom prst="rect">
-            <a:avLst/>
-          </a:prstGeom>
-          <a:noFill/>
-          <a:ln/>
-        </p:spPr>
-        <p:txBody>
-          <a:bodyPr wrap="square" lIns="0" tIns="0" rIns="0" bIns="0" rtlCol="0" anchor="ctr"/>
-          <a:lstStyle/>
-          <a:p>
-            <a:pPr indent="0" marL="0">
-              <a:buNone/>
-            </a:pPr>
-            <a:r>
-              <a:rPr lang="en-US" sz="1200" i="1" dirty="0">
-                <a:solidFill>
-                  <a:srgbClr val="5B6478"/>
-                </a:solidFill>
-              </a:rPr>
-              <a:t>Le majoritaire intégral transforme le RN en dictateur (100 % du pouvoir).</a:t>
+              <a:t>Shapley-Shubik, Banzhaf, Deegan-Packel</a:t>
             </a:r>
             <a:endParaRPr lang="en-US" sz="1200" dirty="0"/>
           </a:p>
@@ -4604,378 +3386,13 @@
       </p:sp>
       <p:sp>
         <p:nvSpPr>
-          <p:cNvPr id="17" name="Shape 15"/>
-          <p:cNvSpPr/>
-          <p:nvPr/>
-        </p:nvSpPr>
-        <p:spPr>
-          <a:xfrm>
-            <a:off x="6172200" y="2057400"/>
-            <a:ext cx="5257800" cy="3200400"/>
-          </a:xfrm>
-          <a:prstGeom prst="rect">
-            <a:avLst/>
-          </a:prstGeom>
-          <a:solidFill>
-            <a:srgbClr val="1E2761"/>
-          </a:solidFill>
-          <a:ln/>
-          <a:effectLst>
-            <a:outerShdw sx="100000" sy="100000" kx="0" ky="0" algn="bl" rotWithShape="0" blurRad="88900" dist="38100" dir="8100000">
-              <a:srgbClr val="000000">
-                <a:alpha val="12000"/>
-              </a:srgbClr>
-            </a:outerShdw>
-          </a:effectLst>
-        </p:spPr>
-      </p:sp>
-      <p:sp>
-        <p:nvSpPr>
-          <p:cNvPr id="18" name="Text 16"/>
-          <p:cNvSpPr/>
-          <p:nvPr/>
-        </p:nvSpPr>
-        <p:spPr>
-          <a:xfrm>
-            <a:off x="6400800" y="2240280"/>
-            <a:ext cx="4846320" cy="365760"/>
-          </a:xfrm>
-          <a:prstGeom prst="rect">
-            <a:avLst/>
-          </a:prstGeom>
-          <a:noFill/>
-          <a:ln/>
-        </p:spPr>
-        <p:txBody>
-          <a:bodyPr wrap="square" lIns="0" tIns="0" rIns="0" bIns="0" rtlCol="0" anchor="ctr"/>
-          <a:lstStyle/>
-          <a:p>
-            <a:pPr indent="0" marL="0">
-              <a:buNone/>
-            </a:pPr>
-            <a:r>
-              <a:rPr lang="en-US" sz="1500" b="1" dirty="0">
-                <a:solidFill>
-                  <a:srgbClr val="F2A900"/>
-                </a:solidFill>
-                <a:latin typeface="Georgia" pitchFamily="34" charset="0"/>
-                <a:ea typeface="Georgia" pitchFamily="34" charset="-122"/>
-                <a:cs typeface="Georgia" pitchFamily="34" charset="-120"/>
-              </a:rPr>
-              <a:t>Régionales IdF 2021 : prime majoritaire</a:t>
-            </a:r>
-            <a:endParaRPr lang="en-US" sz="1500" dirty="0"/>
-          </a:p>
-        </p:txBody>
-      </p:sp>
-      <p:sp>
-        <p:nvSpPr>
-          <p:cNvPr id="19" name="Text 17"/>
-          <p:cNvSpPr/>
-          <p:nvPr/>
-        </p:nvSpPr>
-        <p:spPr>
-          <a:xfrm>
-            <a:off x="6400800" y="2743200"/>
-            <a:ext cx="4846320" cy="548640"/>
-          </a:xfrm>
-          <a:prstGeom prst="rect">
-            <a:avLst/>
-          </a:prstGeom>
-          <a:noFill/>
-          <a:ln/>
-        </p:spPr>
-        <p:txBody>
-          <a:bodyPr wrap="square" lIns="0" tIns="0" rIns="0" bIns="0" rtlCol="0" anchor="ctr"/>
-          <a:lstStyle/>
-          <a:p>
-            <a:pPr indent="0" marL="0">
-              <a:buNone/>
-            </a:pPr>
-            <a:r>
-              <a:rPr lang="en-US" sz="3000" b="1" dirty="0">
-                <a:solidFill>
-                  <a:srgbClr val="FFFFFF"/>
-                </a:solidFill>
-                <a:latin typeface="Georgia" pitchFamily="34" charset="0"/>
-                <a:ea typeface="Georgia" pitchFamily="34" charset="-122"/>
-                <a:cs typeface="Georgia" pitchFamily="34" charset="-120"/>
-              </a:rPr>
-              <a:t>45,9 %</a:t>
-            </a:r>
-            <a:pPr indent="0" marL="0">
-              <a:buNone/>
-            </a:pPr>
-            <a:r>
-              <a:rPr lang="en-US" sz="1300" dirty="0">
-                <a:solidFill>
-                  <a:srgbClr val="CADCFC"/>
-                </a:solidFill>
-              </a:rPr>
-              <a:t>  des voix pour la liste en tête</a:t>
-            </a:r>
-            <a:endParaRPr lang="en-US" sz="3000" dirty="0"/>
-          </a:p>
-        </p:txBody>
-      </p:sp>
-      <p:sp>
-        <p:nvSpPr>
-          <p:cNvPr id="20" name="Text 18"/>
-          <p:cNvSpPr/>
-          <p:nvPr/>
-        </p:nvSpPr>
-        <p:spPr>
-          <a:xfrm>
-            <a:off x="6400800" y="3383280"/>
-            <a:ext cx="4846320" cy="548640"/>
-          </a:xfrm>
-          <a:prstGeom prst="rect">
-            <a:avLst/>
-          </a:prstGeom>
-          <a:noFill/>
-          <a:ln/>
-        </p:spPr>
-        <p:txBody>
-          <a:bodyPr wrap="square" lIns="0" tIns="0" rIns="0" bIns="0" rtlCol="0" anchor="ctr"/>
-          <a:lstStyle/>
-          <a:p>
-            <a:pPr indent="0" marL="0">
-              <a:buNone/>
-            </a:pPr>
-            <a:r>
-              <a:rPr lang="en-US" sz="3000" b="1" dirty="0">
-                <a:solidFill>
-                  <a:srgbClr val="F2A900"/>
-                </a:solidFill>
-                <a:latin typeface="Georgia" pitchFamily="34" charset="0"/>
-                <a:ea typeface="Georgia" pitchFamily="34" charset="-122"/>
-                <a:cs typeface="Georgia" pitchFamily="34" charset="-120"/>
-              </a:rPr>
-              <a:t>59,8 %</a:t>
-            </a:r>
-            <a:pPr indent="0" marL="0">
-              <a:buNone/>
-            </a:pPr>
-            <a:r>
-              <a:rPr lang="en-US" sz="1300" dirty="0">
-                <a:solidFill>
-                  <a:srgbClr val="CADCFC"/>
-                </a:solidFill>
-              </a:rPr>
-              <a:t>  des sièges grâce à la prime → dictateur</a:t>
-            </a:r>
-            <a:endParaRPr lang="en-US" sz="3000" dirty="0"/>
-          </a:p>
-        </p:txBody>
-      </p:sp>
-      <p:sp>
-        <p:nvSpPr>
-          <p:cNvPr id="21" name="Text 19"/>
-          <p:cNvSpPr/>
-          <p:nvPr/>
-        </p:nvSpPr>
-        <p:spPr>
-          <a:xfrm>
-            <a:off x="6400800" y="4114800"/>
-            <a:ext cx="4846320" cy="822960"/>
-          </a:xfrm>
-          <a:prstGeom prst="rect">
-            <a:avLst/>
-          </a:prstGeom>
-          <a:noFill/>
-          <a:ln/>
-        </p:spPr>
-        <p:txBody>
-          <a:bodyPr wrap="square" lIns="0" tIns="0" rIns="0" bIns="0" rtlCol="0" anchor="t"/>
-          <a:lstStyle/>
-          <a:p>
-            <a:pPr indent="0" marL="0">
-              <a:buNone/>
-            </a:pPr>
-            <a:r>
-              <a:rPr lang="en-US" sz="1250" i="1" dirty="0">
-                <a:solidFill>
-                  <a:srgbClr val="CADCFC"/>
-                </a:solidFill>
-              </a:rPr>
-              <a:t>La proportionnelle pure ne lui donnerait que 50 % de pouvoir, partagé. La prime majoritaire fabrique un pouvoir absolu.</a:t>
-            </a:r>
-            <a:endParaRPr lang="en-US" sz="1250" dirty="0"/>
-          </a:p>
-        </p:txBody>
-      </p:sp>
-      <p:sp>
-        <p:nvSpPr>
-          <p:cNvPr id="22" name="Text 20"/>
-          <p:cNvSpPr/>
-          <p:nvPr/>
-        </p:nvSpPr>
-        <p:spPr>
-          <a:xfrm>
-            <a:off x="457200" y="6446520"/>
-            <a:ext cx="7315200" cy="274320"/>
-          </a:xfrm>
-          <a:prstGeom prst="rect">
-            <a:avLst/>
-          </a:prstGeom>
-          <a:noFill/>
-          <a:ln/>
-        </p:spPr>
-        <p:txBody>
-          <a:bodyPr wrap="square" lIns="0" tIns="0" rIns="0" bIns="0" rtlCol="0" anchor="ctr"/>
-          <a:lstStyle/>
-          <a:p>
-            <a:pPr algn="l" indent="0" marL="0">
-              <a:buNone/>
-            </a:pPr>
-            <a:r>
-              <a:rPr lang="en-US" sz="900" dirty="0">
-                <a:solidFill>
-                  <a:srgbClr val="5B6478"/>
-                </a:solidFill>
-              </a:rPr>
-              <a:t>T1 - Pouvoir de coalition par vérification formelle</a:t>
-            </a:r>
-            <a:endParaRPr lang="en-US" sz="900" dirty="0"/>
-          </a:p>
-        </p:txBody>
-      </p:sp>
-      <p:sp>
-        <p:nvSpPr>
-          <p:cNvPr id="23" name="Text 21"/>
-          <p:cNvSpPr/>
-          <p:nvPr/>
-        </p:nvSpPr>
-        <p:spPr>
-          <a:xfrm>
-            <a:off x="10972800" y="6446520"/>
-            <a:ext cx="731520" cy="274320"/>
-          </a:xfrm>
-          <a:prstGeom prst="rect">
-            <a:avLst/>
-          </a:prstGeom>
-          <a:noFill/>
-          <a:ln/>
-        </p:spPr>
-        <p:txBody>
-          <a:bodyPr wrap="square" lIns="0" tIns="0" rIns="0" bIns="0" rtlCol="0" anchor="ctr"/>
-          <a:lstStyle/>
-          <a:p>
-            <a:pPr algn="r" indent="0" marL="0">
-              <a:buNone/>
-            </a:pPr>
-            <a:r>
-              <a:rPr lang="en-US" sz="900" dirty="0">
-                <a:solidFill>
-                  <a:srgbClr val="5B6478"/>
-                </a:solidFill>
-              </a:rPr>
-              <a:t>13 / 15</a:t>
-            </a:r>
-            <a:endParaRPr lang="en-US" sz="900" dirty="0"/>
-          </a:p>
-        </p:txBody>
-      </p:sp>
-    </p:spTree>
-  </p:cSld>
-  <p:clrMapOvr>
-    <a:masterClrMapping/>
-  </p:clrMapOvr>
-</p:sld>
-</file>
-
-<file path=ppt/slides/slide14.xml><?xml version="1.0" encoding="utf-8"?>
-<p:sld xmlns:a="http://schemas.openxmlformats.org/drawingml/2006/main" xmlns:r="http://schemas.openxmlformats.org/officeDocument/2006/relationships" xmlns:p="http://schemas.openxmlformats.org/presentationml/2006/main">
-  <p:cSld name="Slide 14">
-    <p:bg>
-      <p:bgPr>
-        <a:solidFill>
-          <a:srgbClr val="F5F7FA"/>
-        </a:solidFill>
-      </p:bgPr>
-    </p:bg>
-    <p:spTree>
-      <p:nvGrpSpPr>
-        <p:cNvPr id="1" name=""/>
-        <p:cNvGrpSpPr/>
-        <p:nvPr/>
-      </p:nvGrpSpPr>
-      <p:grpSpPr>
-        <a:xfrm>
-          <a:off x="0" y="0"/>
-          <a:ext cx="0" cy="0"/>
-          <a:chOff x="0" y="0"/>
-          <a:chExt cx="0" cy="0"/>
-        </a:xfrm>
-      </p:grpSpPr>
-      <p:sp>
-        <p:nvSpPr>
-          <p:cNvPr id="2" name="Shape 0"/>
-          <p:cNvSpPr/>
-          <p:nvPr/>
-        </p:nvSpPr>
-        <p:spPr>
-          <a:xfrm>
-            <a:off x="457200" y="411480"/>
-            <a:ext cx="109728" cy="566928"/>
-          </a:xfrm>
-          <a:prstGeom prst="rect">
-            <a:avLst/>
-          </a:prstGeom>
-          <a:solidFill>
-            <a:srgbClr val="F2A900"/>
-          </a:solidFill>
-          <a:ln/>
-        </p:spPr>
-      </p:sp>
-      <p:sp>
-        <p:nvSpPr>
-          <p:cNvPr id="3" name="Text 1"/>
-          <p:cNvSpPr/>
-          <p:nvPr/>
-        </p:nvSpPr>
-        <p:spPr>
-          <a:xfrm>
-            <a:off x="713232" y="384048"/>
-            <a:ext cx="10789920" cy="640080"/>
-          </a:xfrm>
-          <a:prstGeom prst="rect">
-            <a:avLst/>
-          </a:prstGeom>
-          <a:noFill/>
-          <a:ln/>
-        </p:spPr>
-        <p:txBody>
-          <a:bodyPr wrap="square" lIns="0" tIns="0" rIns="0" bIns="0" rtlCol="0" anchor="ctr"/>
-          <a:lstStyle/>
-          <a:p>
-            <a:pPr algn="l" indent="0" marL="0">
-              <a:buNone/>
-            </a:pPr>
-            <a:r>
-              <a:rPr lang="en-US" sz="2700" b="1" dirty="0">
-                <a:solidFill>
-                  <a:srgbClr val="1E2761"/>
-                </a:solidFill>
-                <a:latin typeface="Georgia" pitchFamily="34" charset="0"/>
-                <a:ea typeface="Georgia" pitchFamily="34" charset="-122"/>
-                <a:cs typeface="Georgia" pitchFamily="34" charset="-120"/>
-              </a:rPr>
-              <a:t>Architecture et validation</a:t>
-            </a:r>
-            <a:endParaRPr lang="en-US" sz="2700" dirty="0"/>
-          </a:p>
-        </p:txBody>
-      </p:sp>
-      <p:sp>
-        <p:nvSpPr>
-          <p:cNvPr id="4" name="Shape 2"/>
-          <p:cNvSpPr/>
-          <p:nvPr/>
-        </p:nvSpPr>
-        <p:spPr>
-          <a:xfrm>
-            <a:off x="731520" y="1417320"/>
+          <p:cNvPr id="10" name="Shape 8"/>
+          <p:cNvSpPr/>
+          <p:nvPr/>
+        </p:nvSpPr>
+        <p:spPr>
+          <a:xfrm>
+            <a:off x="731520" y="2468880"/>
             <a:ext cx="5212080" cy="868680"/>
           </a:xfrm>
           <a:prstGeom prst="rect">
@@ -5001,13 +3418,13 @@
       </p:sp>
       <p:sp>
         <p:nvSpPr>
-          <p:cNvPr id="5" name="Text 3"/>
-          <p:cNvSpPr/>
-          <p:nvPr/>
-        </p:nvSpPr>
-        <p:spPr>
-          <a:xfrm>
-            <a:off x="914400" y="1527048"/>
+          <p:cNvPr id="11" name="Text 9"/>
+          <p:cNvSpPr/>
+          <p:nvPr/>
+        </p:nvSpPr>
+        <p:spPr>
+          <a:xfrm>
+            <a:off x="914400" y="2578608"/>
             <a:ext cx="1371600" cy="640080"/>
           </a:xfrm>
           <a:prstGeom prst="rect">
@@ -5032,7 +3449,7 @@
                 <a:ea typeface="Consolas" pitchFamily="34" charset="-122"/>
                 <a:cs typeface="Consolas" pitchFamily="34" charset="-120"/>
               </a:rPr>
-              <a:t>core</a:t>
+              <a:t>formal</a:t>
             </a:r>
             <a:endParaRPr lang="en-US" sz="1600" dirty="0"/>
           </a:p>
@@ -5040,13 +3457,13 @@
       </p:sp>
       <p:sp>
         <p:nvSpPr>
-          <p:cNvPr id="6" name="Text 4"/>
-          <p:cNvSpPr/>
-          <p:nvPr/>
-        </p:nvSpPr>
-        <p:spPr>
-          <a:xfrm>
-            <a:off x="2286000" y="1508760"/>
+          <p:cNvPr id="12" name="Text 10"/>
+          <p:cNvSpPr/>
+          <p:nvPr/>
+        </p:nvSpPr>
+        <p:spPr>
+          <a:xfrm>
+            <a:off x="2286000" y="2560320"/>
             <a:ext cx="3566160" cy="685800"/>
           </a:xfrm>
           <a:prstGeom prst="rect">
@@ -5068,7 +3485,7 @@
                   <a:srgbClr val="333333"/>
                 </a:solidFill>
               </a:rPr>
-              <a:t>Jeux de vote pondérés, coalitions, statut des joueurs</a:t>
+              <a:t>Encodage SMT Z3, preuve des axiomes et distinction</a:t>
             </a:r>
             <a:endParaRPr lang="en-US" sz="1200" dirty="0"/>
           </a:p>
@@ -5076,13 +3493,13 @@
       </p:sp>
       <p:sp>
         <p:nvSpPr>
-          <p:cNvPr id="7" name="Shape 5"/>
-          <p:cNvSpPr/>
-          <p:nvPr/>
-        </p:nvSpPr>
-        <p:spPr>
-          <a:xfrm>
-            <a:off x="6217920" y="1417320"/>
+          <p:cNvPr id="13" name="Shape 11"/>
+          <p:cNvSpPr/>
+          <p:nvPr/>
+        </p:nvSpPr>
+        <p:spPr>
+          <a:xfrm>
+            <a:off x="6217920" y="2468880"/>
             <a:ext cx="5212080" cy="868680"/>
           </a:xfrm>
           <a:prstGeom prst="rect">
@@ -5108,13 +3525,13 @@
       </p:sp>
       <p:sp>
         <p:nvSpPr>
-          <p:cNvPr id="8" name="Text 6"/>
-          <p:cNvSpPr/>
-          <p:nvPr/>
-        </p:nvSpPr>
-        <p:spPr>
-          <a:xfrm>
-            <a:off x="6400800" y="1527048"/>
+          <p:cNvPr id="14" name="Text 12"/>
+          <p:cNvSpPr/>
+          <p:nvPr/>
+        </p:nvSpPr>
+        <p:spPr>
+          <a:xfrm>
+            <a:off x="6400800" y="2578608"/>
             <a:ext cx="1371600" cy="640080"/>
           </a:xfrm>
           <a:prstGeom prst="rect">
@@ -5139,7 +3556,7 @@
                 <a:ea typeface="Consolas" pitchFamily="34" charset="-122"/>
                 <a:cs typeface="Consolas" pitchFamily="34" charset="-120"/>
               </a:rPr>
-              <a:t>indices</a:t>
+              <a:t>data</a:t>
             </a:r>
             <a:endParaRPr lang="en-US" sz="1600" dirty="0"/>
           </a:p>
@@ -5147,13 +3564,13 @@
       </p:sp>
       <p:sp>
         <p:nvSpPr>
-          <p:cNvPr id="9" name="Text 7"/>
-          <p:cNvSpPr/>
-          <p:nvPr/>
-        </p:nvSpPr>
-        <p:spPr>
-          <a:xfrm>
-            <a:off x="7772400" y="1508760"/>
+          <p:cNvPr id="15" name="Text 13"/>
+          <p:cNvSpPr/>
+          <p:nvPr/>
+        </p:nvSpPr>
+        <p:spPr>
+          <a:xfrm>
+            <a:off x="7772400" y="2560320"/>
             <a:ext cx="3566160" cy="685800"/>
           </a:xfrm>
           <a:prstGeom prst="rect">
@@ -5175,7 +3592,7 @@
                   <a:srgbClr val="333333"/>
                 </a:solidFill>
               </a:rPr>
-              <a:t>Shapley-Shubik, Banzhaf, Deegan-Packel</a:t>
+              <a:t>Assemblée, blocs, votes réels, D'Hondt, régionales</a:t>
             </a:r>
             <a:endParaRPr lang="en-US" sz="1200" dirty="0"/>
           </a:p>
@@ -5183,13 +3600,13 @@
       </p:sp>
       <p:sp>
         <p:nvSpPr>
-          <p:cNvPr id="10" name="Shape 8"/>
-          <p:cNvSpPr/>
-          <p:nvPr/>
-        </p:nvSpPr>
-        <p:spPr>
-          <a:xfrm>
-            <a:off x="731520" y="2468880"/>
+          <p:cNvPr id="16" name="Shape 14"/>
+          <p:cNvSpPr/>
+          <p:nvPr/>
+        </p:nvSpPr>
+        <p:spPr>
+          <a:xfrm>
+            <a:off x="731520" y="3520440"/>
             <a:ext cx="5212080" cy="868680"/>
           </a:xfrm>
           <a:prstGeom prst="rect">
@@ -5215,13 +3632,13 @@
       </p:sp>
       <p:sp>
         <p:nvSpPr>
-          <p:cNvPr id="11" name="Text 9"/>
-          <p:cNvSpPr/>
-          <p:nvPr/>
-        </p:nvSpPr>
-        <p:spPr>
-          <a:xfrm>
-            <a:off x="914400" y="2578608"/>
+          <p:cNvPr id="17" name="Text 15"/>
+          <p:cNvSpPr/>
+          <p:nvPr/>
+        </p:nvSpPr>
+        <p:spPr>
+          <a:xfrm>
+            <a:off x="914400" y="3630168"/>
             <a:ext cx="1371600" cy="640080"/>
           </a:xfrm>
           <a:prstGeom prst="rect">
@@ -5246,7 +3663,7 @@
                 <a:ea typeface="Consolas" pitchFamily="34" charset="-122"/>
                 <a:cs typeface="Consolas" pitchFamily="34" charset="-120"/>
               </a:rPr>
-              <a:t>formal</a:t>
+              <a:t>viz</a:t>
             </a:r>
             <a:endParaRPr lang="en-US" sz="1600" dirty="0"/>
           </a:p>
@@ -5254,13 +3671,13 @@
       </p:sp>
       <p:sp>
         <p:nvSpPr>
-          <p:cNvPr id="12" name="Text 10"/>
-          <p:cNvSpPr/>
-          <p:nvPr/>
-        </p:nvSpPr>
-        <p:spPr>
-          <a:xfrm>
-            <a:off x="2286000" y="2560320"/>
+          <p:cNvPr id="18" name="Text 16"/>
+          <p:cNvSpPr/>
+          <p:nvPr/>
+        </p:nvSpPr>
+        <p:spPr>
+          <a:xfrm>
+            <a:off x="2286000" y="3611880"/>
             <a:ext cx="3566160" cy="685800"/>
           </a:xfrm>
           <a:prstGeom prst="rect">
@@ -5282,7 +3699,7 @@
                   <a:srgbClr val="333333"/>
                 </a:solidFill>
               </a:rPr>
-              <a:t>Encodage SMT Z3, preuve des axiomes et distinction</a:t>
+              <a:t>Visualisations sièges, pouvoir, coalitions</a:t>
             </a:r>
             <a:endParaRPr lang="en-US" sz="1200" dirty="0"/>
           </a:p>
@@ -5290,13 +3707,13 @@
       </p:sp>
       <p:sp>
         <p:nvSpPr>
-          <p:cNvPr id="13" name="Shape 11"/>
-          <p:cNvSpPr/>
-          <p:nvPr/>
-        </p:nvSpPr>
-        <p:spPr>
-          <a:xfrm>
-            <a:off x="6217920" y="2468880"/>
+          <p:cNvPr id="19" name="Shape 17"/>
+          <p:cNvSpPr/>
+          <p:nvPr/>
+        </p:nvSpPr>
+        <p:spPr>
+          <a:xfrm>
+            <a:off x="6217920" y="3520440"/>
             <a:ext cx="5212080" cy="868680"/>
           </a:xfrm>
           <a:prstGeom prst="rect">
@@ -5322,13 +3739,13 @@
       </p:sp>
       <p:sp>
         <p:nvSpPr>
-          <p:cNvPr id="14" name="Text 12"/>
-          <p:cNvSpPr/>
-          <p:nvPr/>
-        </p:nvSpPr>
-        <p:spPr>
-          <a:xfrm>
-            <a:off x="6400800" y="2578608"/>
+          <p:cNvPr id="20" name="Text 18"/>
+          <p:cNvSpPr/>
+          <p:nvPr/>
+        </p:nvSpPr>
+        <p:spPr>
+          <a:xfrm>
+            <a:off x="6400800" y="3630168"/>
             <a:ext cx="1371600" cy="640080"/>
           </a:xfrm>
           <a:prstGeom prst="rect">
@@ -5353,7 +3770,7 @@
                 <a:ea typeface="Consolas" pitchFamily="34" charset="-122"/>
                 <a:cs typeface="Consolas" pitchFamily="34" charset="-120"/>
               </a:rPr>
-              <a:t>data</a:t>
+              <a:t>tests</a:t>
             </a:r>
             <a:endParaRPr lang="en-US" sz="1600" dirty="0"/>
           </a:p>
@@ -5361,13 +3778,13 @@
       </p:sp>
       <p:sp>
         <p:nvSpPr>
-          <p:cNvPr id="15" name="Text 13"/>
-          <p:cNvSpPr/>
-          <p:nvPr/>
-        </p:nvSpPr>
-        <p:spPr>
-          <a:xfrm>
-            <a:off x="7772400" y="2560320"/>
+          <p:cNvPr id="21" name="Text 19"/>
+          <p:cNvSpPr/>
+          <p:nvPr/>
+        </p:nvSpPr>
+        <p:spPr>
+          <a:xfrm>
+            <a:off x="7772400" y="3611880"/>
             <a:ext cx="3566160" cy="685800"/>
           </a:xfrm>
           <a:prstGeom prst="rect">
@@ -5389,7 +3806,7 @@
                   <a:srgbClr val="333333"/>
                 </a:solidFill>
               </a:rPr>
-              <a:t>Assemblée, blocs, votes réels, D'Hondt, régionales</a:t>
+              <a:t>131 tests : instances de référence et concordance</a:t>
             </a:r>
             <a:endParaRPr lang="en-US" sz="1200" dirty="0"/>
           </a:p>
@@ -5397,27 +3814,58 @@
       </p:sp>
       <p:sp>
         <p:nvSpPr>
-          <p:cNvPr id="16" name="Shape 14"/>
-          <p:cNvSpPr/>
-          <p:nvPr/>
-        </p:nvSpPr>
-        <p:spPr>
-          <a:xfrm>
-            <a:off x="731520" y="3520440"/>
-            <a:ext cx="5212080" cy="868680"/>
+          <p:cNvPr id="22" name="Text 20"/>
+          <p:cNvSpPr/>
+          <p:nvPr/>
+        </p:nvSpPr>
+        <p:spPr>
+          <a:xfrm>
+            <a:off x="731520" y="4407408"/>
+            <a:ext cx="10698480" cy="320040"/>
+          </a:xfrm>
+          <a:prstGeom prst="rect">
+            <a:avLst/>
+          </a:prstGeom>
+          <a:noFill/>
+          <a:ln/>
+        </p:spPr>
+        <p:txBody>
+          <a:bodyPr wrap="square" lIns="0" tIns="0" rIns="0" bIns="0" rtlCol="0" anchor="ctr"/>
+          <a:lstStyle/>
+          <a:p>
+            <a:pPr indent="0" marL="0">
+              <a:buNone/>
+            </a:pPr>
+            <a:r>
+              <a:rPr lang="en-US" sz="1200" i="1" dirty="0">
+                <a:solidFill>
+                  <a:srgbClr val="5B6478"/>
+                </a:solidFill>
+              </a:rPr>
+              <a:t>Validation : le paradoxe [51 ; 49, 48, 3] et le Conseil de sécurité de l'ONU (19,6 % par permanent) sont reproduits à l'identique.</a:t>
+            </a:r>
+            <a:endParaRPr lang="en-US" sz="1200" dirty="0"/>
+          </a:p>
+        </p:txBody>
+      </p:sp>
+      <p:sp>
+        <p:nvSpPr>
+          <p:cNvPr id="23" name="Shape 21"/>
+          <p:cNvSpPr/>
+          <p:nvPr/>
+        </p:nvSpPr>
+        <p:spPr>
+          <a:xfrm>
+            <a:off x="731520" y="4800600"/>
+            <a:ext cx="10698480" cy="960120"/>
           </a:xfrm>
           <a:prstGeom prst="rect">
             <a:avLst/>
           </a:prstGeom>
           <a:solidFill>
-            <a:srgbClr val="FFFFFF"/>
+            <a:srgbClr val="1E2761"/>
           </a:solidFill>
-          <a:ln w="19050">
-            <a:solidFill>
-              <a:srgbClr val="CADCFC"/>
-            </a:solidFill>
-            <a:prstDash val="solid"/>
-          </a:ln>
+          <a:ln/>
           <a:effectLst>
             <a:outerShdw sx="100000" sy="100000" kx="0" ky="0" algn="bl" rotWithShape="0" blurRad="88900" dist="38100" dir="8100000">
               <a:srgbClr val="000000">
@@ -5429,216 +3877,7 @@
       </p:sp>
       <p:sp>
         <p:nvSpPr>
-          <p:cNvPr id="17" name="Text 15"/>
-          <p:cNvSpPr/>
-          <p:nvPr/>
-        </p:nvSpPr>
-        <p:spPr>
-          <a:xfrm>
-            <a:off x="914400" y="3630168"/>
-            <a:ext cx="1371600" cy="640080"/>
-          </a:xfrm>
-          <a:prstGeom prst="rect">
-            <a:avLst/>
-          </a:prstGeom>
-          <a:noFill/>
-          <a:ln/>
-        </p:spPr>
-        <p:txBody>
-          <a:bodyPr wrap="square" lIns="0" tIns="0" rIns="0" bIns="0" rtlCol="0" anchor="ctr"/>
-          <a:lstStyle/>
-          <a:p>
-            <a:pPr indent="0" marL="0">
-              <a:buNone/>
-            </a:pPr>
-            <a:r>
-              <a:rPr lang="en-US" sz="1600" b="1" dirty="0">
-                <a:solidFill>
-                  <a:srgbClr val="F2A900"/>
-                </a:solidFill>
-                <a:latin typeface="Consolas" pitchFamily="34" charset="0"/>
-                <a:ea typeface="Consolas" pitchFamily="34" charset="-122"/>
-                <a:cs typeface="Consolas" pitchFamily="34" charset="-120"/>
-              </a:rPr>
-              <a:t>viz</a:t>
-            </a:r>
-            <a:endParaRPr lang="en-US" sz="1600" dirty="0"/>
-          </a:p>
-        </p:txBody>
-      </p:sp>
-      <p:sp>
-        <p:nvSpPr>
-          <p:cNvPr id="18" name="Text 16"/>
-          <p:cNvSpPr/>
-          <p:nvPr/>
-        </p:nvSpPr>
-        <p:spPr>
-          <a:xfrm>
-            <a:off x="2286000" y="3611880"/>
-            <a:ext cx="3566160" cy="685800"/>
-          </a:xfrm>
-          <a:prstGeom prst="rect">
-            <a:avLst/>
-          </a:prstGeom>
-          <a:noFill/>
-          <a:ln/>
-        </p:spPr>
-        <p:txBody>
-          <a:bodyPr wrap="square" lIns="0" tIns="0" rIns="0" bIns="0" rtlCol="0" anchor="ctr"/>
-          <a:lstStyle/>
-          <a:p>
-            <a:pPr indent="0" marL="0">
-              <a:buNone/>
-            </a:pPr>
-            <a:r>
-              <a:rPr lang="en-US" sz="1200" dirty="0">
-                <a:solidFill>
-                  <a:srgbClr val="333333"/>
-                </a:solidFill>
-              </a:rPr>
-              <a:t>Visualisations sièges, pouvoir, coalitions</a:t>
-            </a:r>
-            <a:endParaRPr lang="en-US" sz="1200" dirty="0"/>
-          </a:p>
-        </p:txBody>
-      </p:sp>
-      <p:sp>
-        <p:nvSpPr>
-          <p:cNvPr id="19" name="Shape 17"/>
-          <p:cNvSpPr/>
-          <p:nvPr/>
-        </p:nvSpPr>
-        <p:spPr>
-          <a:xfrm>
-            <a:off x="6217920" y="3520440"/>
-            <a:ext cx="5212080" cy="868680"/>
-          </a:xfrm>
-          <a:prstGeom prst="rect">
-            <a:avLst/>
-          </a:prstGeom>
-          <a:solidFill>
-            <a:srgbClr val="FFFFFF"/>
-          </a:solidFill>
-          <a:ln w="19050">
-            <a:solidFill>
-              <a:srgbClr val="CADCFC"/>
-            </a:solidFill>
-            <a:prstDash val="solid"/>
-          </a:ln>
-          <a:effectLst>
-            <a:outerShdw sx="100000" sy="100000" kx="0" ky="0" algn="bl" rotWithShape="0" blurRad="88900" dist="38100" dir="8100000">
-              <a:srgbClr val="000000">
-                <a:alpha val="12000"/>
-              </a:srgbClr>
-            </a:outerShdw>
-          </a:effectLst>
-        </p:spPr>
-      </p:sp>
-      <p:sp>
-        <p:nvSpPr>
-          <p:cNvPr id="20" name="Text 18"/>
-          <p:cNvSpPr/>
-          <p:nvPr/>
-        </p:nvSpPr>
-        <p:spPr>
-          <a:xfrm>
-            <a:off x="6400800" y="3630168"/>
-            <a:ext cx="1371600" cy="640080"/>
-          </a:xfrm>
-          <a:prstGeom prst="rect">
-            <a:avLst/>
-          </a:prstGeom>
-          <a:noFill/>
-          <a:ln/>
-        </p:spPr>
-        <p:txBody>
-          <a:bodyPr wrap="square" lIns="0" tIns="0" rIns="0" bIns="0" rtlCol="0" anchor="ctr"/>
-          <a:lstStyle/>
-          <a:p>
-            <a:pPr indent="0" marL="0">
-              <a:buNone/>
-            </a:pPr>
-            <a:r>
-              <a:rPr lang="en-US" sz="1600" b="1" dirty="0">
-                <a:solidFill>
-                  <a:srgbClr val="F2A900"/>
-                </a:solidFill>
-                <a:latin typeface="Consolas" pitchFamily="34" charset="0"/>
-                <a:ea typeface="Consolas" pitchFamily="34" charset="-122"/>
-                <a:cs typeface="Consolas" pitchFamily="34" charset="-120"/>
-              </a:rPr>
-              <a:t>tests</a:t>
-            </a:r>
-            <a:endParaRPr lang="en-US" sz="1600" dirty="0"/>
-          </a:p>
-        </p:txBody>
-      </p:sp>
-      <p:sp>
-        <p:nvSpPr>
-          <p:cNvPr id="21" name="Text 19"/>
-          <p:cNvSpPr/>
-          <p:nvPr/>
-        </p:nvSpPr>
-        <p:spPr>
-          <a:xfrm>
-            <a:off x="7772400" y="3611880"/>
-            <a:ext cx="3566160" cy="685800"/>
-          </a:xfrm>
-          <a:prstGeom prst="rect">
-            <a:avLst/>
-          </a:prstGeom>
-          <a:noFill/>
-          <a:ln/>
-        </p:spPr>
-        <p:txBody>
-          <a:bodyPr wrap="square" lIns="0" tIns="0" rIns="0" bIns="0" rtlCol="0" anchor="ctr"/>
-          <a:lstStyle/>
-          <a:p>
-            <a:pPr indent="0" marL="0">
-              <a:buNone/>
-            </a:pPr>
-            <a:r>
-              <a:rPr lang="en-US" sz="1200" dirty="0">
-                <a:solidFill>
-                  <a:srgbClr val="333333"/>
-                </a:solidFill>
-              </a:rPr>
-              <a:t>131 tests : instances de référence et concordance</a:t>
-            </a:r>
-            <a:endParaRPr lang="en-US" sz="1200" dirty="0"/>
-          </a:p>
-        </p:txBody>
-      </p:sp>
-      <p:sp>
-        <p:nvSpPr>
-          <p:cNvPr id="22" name="Shape 20"/>
-          <p:cNvSpPr/>
-          <p:nvPr/>
-        </p:nvSpPr>
-        <p:spPr>
-          <a:xfrm>
-            <a:off x="731520" y="4800600"/>
-            <a:ext cx="10698480" cy="960120"/>
-          </a:xfrm>
-          <a:prstGeom prst="rect">
-            <a:avLst/>
-          </a:prstGeom>
-          <a:solidFill>
-            <a:srgbClr val="1E2761"/>
-          </a:solidFill>
-          <a:ln/>
-          <a:effectLst>
-            <a:outerShdw sx="100000" sy="100000" kx="0" ky="0" algn="bl" rotWithShape="0" blurRad="88900" dist="38100" dir="8100000">
-              <a:srgbClr val="000000">
-                <a:alpha val="12000"/>
-              </a:srgbClr>
-            </a:outerShdw>
-          </a:effectLst>
-        </p:spPr>
-      </p:sp>
-      <p:sp>
-        <p:nvSpPr>
-          <p:cNvPr id="23" name="Text 21"/>
+          <p:cNvPr id="24" name="Text 22"/>
           <p:cNvSpPr/>
           <p:nvPr/>
         </p:nvSpPr>
@@ -5677,7 +3916,7 @@
       </p:sp>
       <p:sp>
         <p:nvSpPr>
-          <p:cNvPr id="24" name="Text 22"/>
+          <p:cNvPr id="25" name="Text 23"/>
           <p:cNvSpPr/>
           <p:nvPr/>
         </p:nvSpPr>
@@ -5713,7 +3952,7 @@
       </p:sp>
       <p:sp>
         <p:nvSpPr>
-          <p:cNvPr id="25" name="Text 23"/>
+          <p:cNvPr id="26" name="Text 24"/>
           <p:cNvSpPr/>
           <p:nvPr/>
         </p:nvSpPr>
@@ -5752,7 +3991,7 @@
       </p:sp>
       <p:sp>
         <p:nvSpPr>
-          <p:cNvPr id="26" name="Text 24"/>
+          <p:cNvPr id="27" name="Text 25"/>
           <p:cNvSpPr/>
           <p:nvPr/>
         </p:nvSpPr>
@@ -5788,7 +4027,7 @@
       </p:sp>
       <p:sp>
         <p:nvSpPr>
-          <p:cNvPr id="27" name="Text 25"/>
+          <p:cNvPr id="28" name="Text 26"/>
           <p:cNvSpPr/>
           <p:nvPr/>
         </p:nvSpPr>
@@ -5827,7 +4066,7 @@
       </p:sp>
       <p:sp>
         <p:nvSpPr>
-          <p:cNvPr id="28" name="Text 26"/>
+          <p:cNvPr id="29" name="Text 27"/>
           <p:cNvSpPr/>
           <p:nvPr/>
         </p:nvSpPr>
@@ -5863,7 +4102,7 @@
       </p:sp>
       <p:sp>
         <p:nvSpPr>
-          <p:cNvPr id="29" name="Text 27"/>
+          <p:cNvPr id="30" name="Text 28"/>
           <p:cNvSpPr/>
           <p:nvPr/>
         </p:nvSpPr>
@@ -5902,7 +4141,7 @@
       </p:sp>
       <p:sp>
         <p:nvSpPr>
-          <p:cNvPr id="30" name="Text 28"/>
+          <p:cNvPr id="31" name="Text 29"/>
           <p:cNvSpPr/>
           <p:nvPr/>
         </p:nvSpPr>
@@ -5938,7 +4177,7 @@
       </p:sp>
       <p:sp>
         <p:nvSpPr>
-          <p:cNvPr id="31" name="Text 29"/>
+          <p:cNvPr id="32" name="Text 30"/>
           <p:cNvSpPr/>
           <p:nvPr/>
         </p:nvSpPr>
@@ -5969,7 +4208,7 @@
                 <a:ea typeface="Georgia" pitchFamily="34" charset="-122"/>
                 <a:cs typeface="Georgia" pitchFamily="34" charset="-120"/>
               </a:rPr>
-              <a:t>2</a:t>
+              <a:t>5</a:t>
             </a:r>
             <a:endParaRPr lang="en-US" sz="2600" dirty="0"/>
           </a:p>
@@ -5977,7 +4216,7 @@
       </p:sp>
       <p:sp>
         <p:nvSpPr>
-          <p:cNvPr id="32" name="Text 30"/>
+          <p:cNvPr id="33" name="Text 31"/>
           <p:cNvSpPr/>
           <p:nvPr/>
         </p:nvSpPr>
@@ -6005,7 +4244,7 @@
                   <a:srgbClr val="CADCFC"/>
                 </a:solidFill>
               </a:rPr>
-              <a:t>livrables : app + notebook</a:t>
+              <a:t>objectifs traités</a:t>
             </a:r>
             <a:endParaRPr lang="en-US" sz="1100" dirty="0"/>
           </a:p>
@@ -6013,7 +4252,7 @@
       </p:sp>
       <p:sp>
         <p:nvSpPr>
-          <p:cNvPr id="33" name="Text 31"/>
+          <p:cNvPr id="34" name="Text 32"/>
           <p:cNvSpPr/>
           <p:nvPr/>
         </p:nvSpPr>
@@ -6049,7 +4288,7 @@
       </p:sp>
       <p:sp>
         <p:nvSpPr>
-          <p:cNvPr id="34" name="Text 32"/>
+          <p:cNvPr id="35" name="Text 33"/>
           <p:cNvSpPr/>
           <p:nvPr/>
         </p:nvSpPr>
@@ -6077,7 +4316,7 @@
                   <a:srgbClr val="5B6478"/>
                 </a:solidFill>
               </a:rPr>
-              <a:t>14 / 15</a:t>
+              <a:t>11 / 13</a:t>
             </a:r>
             <a:endParaRPr lang="en-US" sz="900" dirty="0"/>
           </a:p>
@@ -6091,9 +4330,9 @@
 </p:sld>
 </file>
 
-<file path=ppt/slides/slide15.xml><?xml version="1.0" encoding="utf-8"?>
+<file path=ppt/slides/slide12.xml><?xml version="1.0" encoding="utf-8"?>
 <p:sld xmlns:a="http://schemas.openxmlformats.org/drawingml/2006/main" xmlns:r="http://schemas.openxmlformats.org/officeDocument/2006/relationships" xmlns:p="http://schemas.openxmlformats.org/presentationml/2006/main">
-  <p:cSld name="Slide 15">
+  <p:cSld name="Slide 12">
     <p:bg>
       <p:bgPr>
         <a:solidFill>
@@ -6143,6 +4382,97 @@
         </p:nvSpPr>
         <p:spPr>
           <a:xfrm>
+            <a:off x="0" y="2651760"/>
+            <a:ext cx="12161520" cy="1463040"/>
+          </a:xfrm>
+          <a:prstGeom prst="rect">
+            <a:avLst/>
+          </a:prstGeom>
+          <a:noFill/>
+          <a:ln/>
+        </p:spPr>
+        <p:txBody>
+          <a:bodyPr wrap="square" lIns="0" tIns="0" rIns="0" bIns="0" rtlCol="0" anchor="ctr"/>
+          <a:lstStyle/>
+          <a:p>
+            <a:pPr algn="ctr" indent="0" marL="0">
+              <a:buNone/>
+            </a:pPr>
+            <a:r>
+              <a:rPr lang="en-US" sz="8000" b="1" dirty="0">
+                <a:solidFill>
+                  <a:srgbClr val="FFFFFF"/>
+                </a:solidFill>
+                <a:latin typeface="Georgia" pitchFamily="34" charset="0"/>
+                <a:ea typeface="Georgia" pitchFamily="34" charset="-122"/>
+                <a:cs typeface="Georgia" pitchFamily="34" charset="-120"/>
+              </a:rPr>
+              <a:t>Démo</a:t>
+            </a:r>
+            <a:endParaRPr lang="en-US" sz="8000" dirty="0"/>
+          </a:p>
+        </p:txBody>
+      </p:sp>
+    </p:spTree>
+  </p:cSld>
+  <p:clrMapOvr>
+    <a:masterClrMapping/>
+  </p:clrMapOvr>
+</p:sld>
+</file>
+
+<file path=ppt/slides/slide13.xml><?xml version="1.0" encoding="utf-8"?>
+<p:sld xmlns:a="http://schemas.openxmlformats.org/drawingml/2006/main" xmlns:r="http://schemas.openxmlformats.org/officeDocument/2006/relationships" xmlns:p="http://schemas.openxmlformats.org/presentationml/2006/main">
+  <p:cSld name="Slide 13">
+    <p:bg>
+      <p:bgPr>
+        <a:solidFill>
+          <a:srgbClr val="1E2761"/>
+        </a:solidFill>
+      </p:bgPr>
+    </p:bg>
+    <p:spTree>
+      <p:nvGrpSpPr>
+        <p:cNvPr id="1" name=""/>
+        <p:cNvGrpSpPr/>
+        <p:nvPr/>
+      </p:nvGrpSpPr>
+      <p:grpSpPr>
+        <a:xfrm>
+          <a:off x="0" y="0"/>
+          <a:ext cx="0" cy="0"/>
+          <a:chOff x="0" y="0"/>
+          <a:chExt cx="0" cy="0"/>
+        </a:xfrm>
+      </p:grpSpPr>
+      <p:sp>
+        <p:nvSpPr>
+          <p:cNvPr id="2" name="Shape 0"/>
+          <p:cNvSpPr/>
+          <p:nvPr/>
+        </p:nvSpPr>
+        <p:spPr>
+          <a:xfrm>
+            <a:off x="0" y="0"/>
+            <a:ext cx="12161520" cy="164592"/>
+          </a:xfrm>
+          <a:prstGeom prst="rect">
+            <a:avLst/>
+          </a:prstGeom>
+          <a:solidFill>
+            <a:srgbClr val="F2A900"/>
+          </a:solidFill>
+          <a:ln/>
+        </p:spPr>
+      </p:sp>
+      <p:sp>
+        <p:nvSpPr>
+          <p:cNvPr id="3" name="Text 1"/>
+          <p:cNvSpPr/>
+          <p:nvPr/>
+        </p:nvSpPr>
+        <p:spPr>
+          <a:xfrm>
             <a:off x="914400" y="731520"/>
             <a:ext cx="10058400" cy="731520"/>
           </a:xfrm>
@@ -6226,7 +4556,7 @@
                   <a:srgbClr val="CADCFC"/>
                 </a:solidFill>
               </a:rPr>
-              <a:t>Z3 sert de vérificateur symbolique : il calcule le statut des joueurs, énumère les coalitions et démontre les axiomes des trois indices.</a:t>
+              <a:t>Z3 sert de vérificateur symbolique : il calcule le statut des joueurs, énumère les coalitions, démontre les axiomes de Shapley-Shubik et de Deegan-Packel, et réfute ceux que Banzhaf viole.</a:t>
             </a:r>
             <a:endParaRPr lang="en-US" sz="1600" dirty="0"/>
           </a:p>
@@ -6863,7 +5193,7 @@
                   <a:srgbClr val="5B6478"/>
                 </a:solidFill>
               </a:rPr>
-              <a:t>2 / 15</a:t>
+              <a:t>2 / 13</a:t>
             </a:r>
             <a:endParaRPr lang="en-US" sz="900" dirty="0"/>
           </a:p>
@@ -7391,7 +5721,7 @@
                   <a:srgbClr val="5B6478"/>
                 </a:solidFill>
               </a:rPr>
-              <a:t>3 / 15</a:t>
+              <a:t>3 / 13</a:t>
             </a:r>
             <a:endParaRPr lang="en-US" sz="900" dirty="0"/>
           </a:p>
@@ -7702,14 +6032,14 @@
               <a:buNone/>
             </a:pPr>
             <a:r>
-              <a:rPr lang="en-US" sz="1300" b="1" dirty="0">
+              <a:rPr lang="en-US" sz="1200" b="1" dirty="0">
                 <a:solidFill>
                   <a:srgbClr val="2C8A4A"/>
                 </a:solidFill>
               </a:rPr>
               <a:t>Somme = 1</a:t>
             </a:r>
-            <a:endParaRPr lang="en-US" sz="1300" dirty="0"/>
+            <a:endParaRPr lang="en-US" sz="1200" dirty="0"/>
           </a:p>
         </p:txBody>
       </p:sp>
@@ -7896,7 +6226,7 @@
                   <a:srgbClr val="333333"/>
                 </a:solidFill>
               </a:rPr>
-              <a:t>Part des coalitions où le joueur est critique. Variante absolue : probabilité d'être décisif.</a:t>
+              <a:t>Part des coalitions où le joueur est critique. Deux variantes : brut (probabilité d'être décisif) et normalisé.</a:t>
             </a:r>
             <a:endParaRPr lang="en-US" sz="1350" dirty="0"/>
           </a:p>
@@ -7927,14 +6257,14 @@
               <a:buNone/>
             </a:pPr>
             <a:r>
-              <a:rPr lang="en-US" sz="1300" b="1" dirty="0">
-                <a:solidFill>
-                  <a:srgbClr val="2C8A4A"/>
-                </a:solidFill>
-              </a:rPr>
-              <a:t>Somme = 1</a:t>
-            </a:r>
-            <a:endParaRPr lang="en-US" sz="1300" dirty="0"/>
+              <a:rPr lang="en-US" sz="1200" b="1" dirty="0">
+                <a:solidFill>
+                  <a:srgbClr val="F2A900"/>
+                </a:solidFill>
+              </a:rPr>
+              <a:t>Brut : somme libre  |  Normalisé : 1</a:t>
+            </a:r>
+            <a:endParaRPr lang="en-US" sz="1200" dirty="0"/>
           </a:p>
         </p:txBody>
       </p:sp>
@@ -8152,14 +6482,14 @@
               <a:buNone/>
             </a:pPr>
             <a:r>
-              <a:rPr lang="en-US" sz="1300" b="1" dirty="0">
+              <a:rPr lang="en-US" sz="1200" b="1" dirty="0">
                 <a:solidFill>
                   <a:srgbClr val="2C8A4A"/>
                 </a:solidFill>
               </a:rPr>
               <a:t>Somme = 1</a:t>
             </a:r>
-            <a:endParaRPr lang="en-US" sz="1300" dirty="0"/>
+            <a:endParaRPr lang="en-US" sz="1200" dirty="0"/>
           </a:p>
         </p:txBody>
       </p:sp>
@@ -8171,7 +6501,7 @@
         </p:nvSpPr>
         <p:spPr>
           <a:xfrm>
-            <a:off x="731520" y="5257800"/>
+            <a:off x="731520" y="5212080"/>
             <a:ext cx="10698480" cy="548640"/>
           </a:xfrm>
           <a:prstGeom prst="rect">
@@ -8188,14 +6518,14 @@
               <a:buNone/>
             </a:pPr>
             <a:r>
-              <a:rPr lang="en-US" sz="1300" i="1" dirty="0">
+              <a:rPr lang="en-US" sz="1250" i="1" dirty="0">
                 <a:solidFill>
                   <a:srgbClr val="5B6478"/>
                 </a:solidFill>
               </a:rPr>
-              <a:t>Les trois sont calculés de manière exacte (énumération) et, pour Shapley-Shubik, par échantillonnage Monte Carlo pour les grands jeux.</a:t>
-            </a:r>
-            <a:endParaRPr lang="en-US" sz="1300" dirty="0"/>
+              <a:t>Calcul exact par énumération, plus Monte-Carlo pour Shapley-Shubik sur les grands jeux. La variante de Banzhaf employée n'est pas neutre : la distinction brut / normalisé décide de l'efficacité (slide 6).</a:t>
+            </a:r>
+            <a:endParaRPr lang="en-US" sz="1250" dirty="0"/>
           </a:p>
         </p:txBody>
       </p:sp>
@@ -8265,7 +6595,7 @@
                   <a:srgbClr val="5B6478"/>
                 </a:solidFill>
               </a:rPr>
-              <a:t>4 / 15</a:t>
+              <a:t>4 / 13</a:t>
             </a:r>
             <a:endParaRPr lang="en-US" sz="900" dirty="0"/>
           </a:p>
@@ -8356,7 +6686,7 @@
                 <a:ea typeface="Georgia" pitchFamily="34" charset="-122"/>
                 <a:cs typeface="Georgia" pitchFamily="34" charset="-120"/>
               </a:rPr>
-              <a:t>Validation sur des cas de référence</a:t>
+              <a:t>Volet symbolique 1 : encodage SMT (Z3)</a:t>
             </a:r>
             <a:endParaRPr lang="en-US" sz="2700" dirty="0"/>
           </a:p>
@@ -8364,27 +6694,154 @@
       </p:sp>
       <p:sp>
         <p:nvSpPr>
-          <p:cNvPr id="4" name="Shape 2"/>
-          <p:cNvSpPr/>
-          <p:nvPr/>
-        </p:nvSpPr>
-        <p:spPr>
-          <a:xfrm>
-            <a:off x="731520" y="1554480"/>
-            <a:ext cx="5120640" cy="3383280"/>
+          <p:cNvPr id="4" name="Text 2"/>
+          <p:cNvSpPr/>
+          <p:nvPr/>
+        </p:nvSpPr>
+        <p:spPr>
+          <a:xfrm>
+            <a:off x="731520" y="1371600"/>
+            <a:ext cx="6492240" cy="3291840"/>
+          </a:xfrm>
+          <a:prstGeom prst="rect">
+            <a:avLst/>
+          </a:prstGeom>
+          <a:noFill/>
+          <a:ln/>
+        </p:spPr>
+        <p:txBody>
+          <a:bodyPr wrap="square" rtlCol="0" anchor="ctr"/>
+          <a:lstStyle/>
+          <a:p>
+            <a:pPr indent="0" marL="0">
+              <a:lnSpc>
+                <a:spcPct val="120000"/>
+              </a:lnSpc>
+              <a:spcAft>
+                <a:spcPts val="800"/>
+              </a:spcAft>
+              <a:buNone/>
+            </a:pPr>
+            <a:r>
+              <a:rPr lang="en-US" sz="1550" dirty="0">
+                <a:solidFill>
+                  <a:srgbClr val="333333"/>
+                </a:solidFill>
+              </a:rPr>
+              <a:t>Plutôt qu'énumérer les coalitions en Python, on confie le raisonnement au solveur SMT Z3.</a:t>
+            </a:r>
+            <a:endParaRPr lang="en-US" sz="1550" dirty="0"/>
+          </a:p>
+          <a:p>
+            <a:pPr marL="342900" indent="-342900">
+              <a:lnSpc>
+                <a:spcPct val="120000"/>
+              </a:lnSpc>
+              <a:buSzPct val="100000"/>
+              <a:buChar char="•"/>
+            </a:pPr>
+            <a:r>
+              <a:rPr lang="en-US" sz="1550" dirty="0">
+                <a:solidFill>
+                  <a:srgbClr val="333333"/>
+                </a:solidFill>
+              </a:rPr>
+              <a:t>Chaque joueur devient une variable booléenne (présent ou absent).</a:t>
+            </a:r>
+            <a:endParaRPr lang="en-US" sz="1550" dirty="0"/>
+          </a:p>
+          <a:p>
+            <a:pPr marL="342900" indent="-342900">
+              <a:lnSpc>
+                <a:spcPct val="120000"/>
+              </a:lnSpc>
+              <a:buSzPct val="100000"/>
+              <a:buChar char="•"/>
+            </a:pPr>
+            <a:r>
+              <a:rPr lang="en-US" sz="1550" dirty="0">
+                <a:solidFill>
+                  <a:srgbClr val="333333"/>
+                </a:solidFill>
+              </a:rPr>
+              <a:t>Le poids de la coalition est une expression entière, la victoire une contrainte.</a:t>
+            </a:r>
+            <a:endParaRPr lang="en-US" sz="1550" dirty="0"/>
+          </a:p>
+          <a:p>
+            <a:pPr marL="342900" indent="-342900">
+              <a:lnSpc>
+                <a:spcPct val="120000"/>
+              </a:lnSpc>
+              <a:buSzPct val="100000"/>
+              <a:buChar char="•"/>
+            </a:pPr>
+            <a:r>
+              <a:rPr lang="en-US" sz="1550" dirty="0">
+                <a:solidFill>
+                  <a:srgbClr val="333333"/>
+                </a:solidFill>
+              </a:rPr>
+              <a:t>Statut des joueurs (veto, nul, dictateur) obtenu par SAT / UNSAT.</a:t>
+            </a:r>
+            <a:endParaRPr lang="en-US" sz="1550" dirty="0"/>
+          </a:p>
+          <a:p>
+            <a:pPr marL="342900" indent="-342900">
+              <a:lnSpc>
+                <a:spcPct val="120000"/>
+              </a:lnSpc>
+              <a:buSzPct val="100000"/>
+              <a:buChar char="•"/>
+            </a:pPr>
+            <a:r>
+              <a:rPr lang="en-US" sz="1550" dirty="0">
+                <a:solidFill>
+                  <a:srgbClr val="333333"/>
+                </a:solidFill>
+              </a:rPr>
+              <a:t>Coalitions critiques et minimales énumérées par blocage de modèles.</a:t>
+            </a:r>
+            <a:endParaRPr lang="en-US" sz="1550" dirty="0"/>
+          </a:p>
+          <a:p>
+            <a:pPr marL="342900" indent="-342900">
+              <a:lnSpc>
+                <a:spcPct val="120000"/>
+              </a:lnSpc>
+              <a:buSzPct val="100000"/>
+              <a:buChar char="•"/>
+            </a:pPr>
+            <a:r>
+              <a:rPr lang="en-US" sz="1550" dirty="0">
+                <a:solidFill>
+                  <a:srgbClr val="333333"/>
+                </a:solidFill>
+              </a:rPr>
+              <a:t>Les trois indices recalculés intégralement par la voie SMT, concordance testée.</a:t>
+            </a:r>
+            <a:endParaRPr lang="en-US" sz="1550" dirty="0"/>
+          </a:p>
+        </p:txBody>
+      </p:sp>
+      <p:sp>
+        <p:nvSpPr>
+          <p:cNvPr id="5" name="Shape 3"/>
+          <p:cNvSpPr/>
+          <p:nvPr/>
+        </p:nvSpPr>
+        <p:spPr>
+          <a:xfrm>
+            <a:off x="7589520" y="1554480"/>
+            <a:ext cx="3840480" cy="2697480"/>
           </a:xfrm>
           <a:prstGeom prst="rect">
             <a:avLst/>
           </a:prstGeom>
           <a:solidFill>
-            <a:srgbClr val="FFFFFF"/>
+            <a:srgbClr val="1E2761"/>
           </a:solidFill>
-          <a:ln w="19050">
-            <a:solidFill>
-              <a:srgbClr val="CADCFC"/>
-            </a:solidFill>
-            <a:prstDash val="solid"/>
-          </a:ln>
+          <a:ln/>
           <a:effectLst>
             <a:outerShdw sx="100000" sy="100000" kx="0" ky="0" algn="bl" rotWithShape="0" blurRad="88900" dist="38100" dir="8100000">
               <a:srgbClr val="000000">
@@ -8396,14 +6853,14 @@
       </p:sp>
       <p:sp>
         <p:nvSpPr>
-          <p:cNvPr id="5" name="Text 3"/>
-          <p:cNvSpPr/>
-          <p:nvPr/>
-        </p:nvSpPr>
-        <p:spPr>
-          <a:xfrm>
-            <a:off x="1005840" y="1783080"/>
-            <a:ext cx="4572000" cy="457200"/>
+          <p:cNvPr id="6" name="Text 4"/>
+          <p:cNvSpPr/>
+          <p:nvPr/>
+        </p:nvSpPr>
+        <p:spPr>
+          <a:xfrm>
+            <a:off x="7818120" y="1783080"/>
+            <a:ext cx="3383280" cy="457200"/>
           </a:xfrm>
           <a:prstGeom prst="rect">
             <a:avLst/>
@@ -8419,389 +6876,145 @@
               <a:buNone/>
             </a:pPr>
             <a:r>
-              <a:rPr lang="en-US" sz="1900" b="1" dirty="0">
-                <a:solidFill>
-                  <a:srgbClr val="1E2761"/>
+              <a:rPr lang="en-US" sz="1700" b="1" dirty="0">
+                <a:solidFill>
+                  <a:srgbClr val="F2A900"/>
                 </a:solidFill>
                 <a:latin typeface="Georgia" pitchFamily="34" charset="0"/>
                 <a:ea typeface="Georgia" pitchFamily="34" charset="-122"/>
                 <a:cs typeface="Georgia" pitchFamily="34" charset="-120"/>
               </a:rPr>
-              <a:t>Paradoxe du petit parti</a:t>
-            </a:r>
-            <a:endParaRPr lang="en-US" sz="1900" dirty="0"/>
-          </a:p>
-        </p:txBody>
-      </p:sp>
-      <p:sp>
-        <p:nvSpPr>
-          <p:cNvPr id="6" name="Text 4"/>
-          <p:cNvSpPr/>
-          <p:nvPr/>
-        </p:nvSpPr>
-        <p:spPr>
-          <a:xfrm>
-            <a:off x="1005840" y="2286000"/>
-            <a:ext cx="4572000" cy="365760"/>
-          </a:xfrm>
-          <a:prstGeom prst="rect">
-            <a:avLst/>
-          </a:prstGeom>
-          <a:noFill/>
-          <a:ln/>
-        </p:spPr>
-        <p:txBody>
-          <a:bodyPr wrap="square" lIns="0" tIns="0" rIns="0" bIns="0" rtlCol="0" anchor="ctr"/>
+              <a:t>Garantie de correction</a:t>
+            </a:r>
+            <a:endParaRPr lang="en-US" sz="1700" dirty="0"/>
+          </a:p>
+        </p:txBody>
+      </p:sp>
+      <p:sp>
+        <p:nvSpPr>
+          <p:cNvPr id="7" name="Text 5"/>
+          <p:cNvSpPr/>
+          <p:nvPr/>
+        </p:nvSpPr>
+        <p:spPr>
+          <a:xfrm>
+            <a:off x="7818120" y="2286000"/>
+            <a:ext cx="3383280" cy="1920240"/>
+          </a:xfrm>
+          <a:prstGeom prst="rect">
+            <a:avLst/>
+          </a:prstGeom>
+          <a:noFill/>
+          <a:ln/>
+        </p:spPr>
+        <p:txBody>
+          <a:bodyPr wrap="square" lIns="0" tIns="0" rIns="0" bIns="0" rtlCol="0" anchor="t"/>
           <a:lstStyle/>
           <a:p>
             <a:pPr indent="0" marL="0">
-              <a:buNone/>
-            </a:pPr>
-            <a:r>
-              <a:rPr lang="en-US" sz="1600" b="1" dirty="0">
-                <a:solidFill>
-                  <a:srgbClr val="F2A900"/>
-                </a:solidFill>
-                <a:latin typeface="Consolas" pitchFamily="34" charset="0"/>
-                <a:ea typeface="Consolas" pitchFamily="34" charset="-122"/>
-                <a:cs typeface="Consolas" pitchFamily="34" charset="-120"/>
-              </a:rPr>
-              <a:t>[ 51 ; 49, 48, 3 ]</a:t>
-            </a:r>
-            <a:endParaRPr lang="en-US" sz="1600" dirty="0"/>
-          </a:p>
-        </p:txBody>
-      </p:sp>
-      <p:sp>
-        <p:nvSpPr>
-          <p:cNvPr id="7" name="Text 5"/>
-          <p:cNvSpPr/>
-          <p:nvPr/>
-        </p:nvSpPr>
-        <p:spPr>
-          <a:xfrm>
-            <a:off x="1005840" y="2834640"/>
-            <a:ext cx="4572000" cy="1737360"/>
-          </a:xfrm>
-          <a:prstGeom prst="rect">
-            <a:avLst/>
-          </a:prstGeom>
-          <a:noFill/>
-          <a:ln/>
-        </p:spPr>
-        <p:txBody>
-          <a:bodyPr wrap="square" lIns="0" tIns="0" rIns="0" bIns="0" rtlCol="0" anchor="t"/>
-          <a:lstStyle/>
+              <a:spcAft>
+                <a:spcPts val="600"/>
+              </a:spcAft>
+              <a:buNone/>
+            </a:pPr>
+            <a:r>
+              <a:rPr lang="en-US" sz="1400" dirty="0">
+                <a:solidFill>
+                  <a:srgbClr val="CADCFC"/>
+                </a:solidFill>
+              </a:rPr>
+              <a:t>Deux voies indépendantes :</a:t>
+            </a:r>
+            <a:endParaRPr lang="en-US" sz="1400" dirty="0"/>
+          </a:p>
+          <a:p>
+            <a:pPr marL="342900" indent="-342900">
+              <a:buSzPct val="100000"/>
+              <a:buChar char="•"/>
+            </a:pPr>
+            <a:r>
+              <a:rPr lang="en-US" sz="1400" dirty="0">
+                <a:solidFill>
+                  <a:srgbClr val="FFFFFF"/>
+                </a:solidFill>
+              </a:rPr>
+              <a:t>énumération combinatoire (Python)</a:t>
+            </a:r>
+            <a:endParaRPr lang="en-US" sz="1400" dirty="0"/>
+          </a:p>
+          <a:p>
+            <a:pPr marL="342900" indent="-342900">
+              <a:spcAft>
+                <a:spcPts val="800"/>
+              </a:spcAft>
+              <a:buSzPct val="100000"/>
+              <a:buChar char="•"/>
+            </a:pPr>
+            <a:r>
+              <a:rPr lang="en-US" sz="1400" dirty="0">
+                <a:solidFill>
+                  <a:srgbClr val="FFFFFF"/>
+                </a:solidFill>
+              </a:rPr>
+              <a:t>encodage symbolique (Z3)</a:t>
+            </a:r>
+            <a:endParaRPr lang="en-US" sz="1400" dirty="0"/>
+          </a:p>
           <a:p>
             <a:pPr indent="0" marL="0">
               <a:buNone/>
             </a:pPr>
             <a:r>
-              <a:rPr lang="en-US" sz="4400" b="1" dirty="0">
-                <a:solidFill>
-                  <a:srgbClr val="1E2761"/>
-                </a:solidFill>
-                <a:latin typeface="Georgia" pitchFamily="34" charset="0"/>
-                <a:ea typeface="Georgia" pitchFamily="34" charset="-122"/>
-                <a:cs typeface="Georgia" pitchFamily="34" charset="-120"/>
-              </a:rPr>
-              <a:t>33,3 %</a:t>
-            </a:r>
-            <a:endParaRPr lang="en-US" sz="4400" dirty="0"/>
-          </a:p>
+              <a:rPr lang="en-US" sz="1300" i="1" dirty="0">
+                <a:solidFill>
+                  <a:srgbClr val="CADCFC"/>
+                </a:solidFill>
+              </a:rPr>
+              <a:t>Concordance systématique vérifiée par les tests : même statut, mêmes swings, mêmes coalitions minimales.</a:t>
+            </a:r>
+            <a:endParaRPr lang="en-US" sz="1400" dirty="0"/>
+          </a:p>
+        </p:txBody>
+      </p:sp>
+      <p:sp>
+        <p:nvSpPr>
+          <p:cNvPr id="8" name="Text 6"/>
+          <p:cNvSpPr/>
+          <p:nvPr/>
+        </p:nvSpPr>
+        <p:spPr>
+          <a:xfrm>
+            <a:off x="731520" y="5212080"/>
+            <a:ext cx="10698480" cy="457200"/>
+          </a:xfrm>
+          <a:prstGeom prst="rect">
+            <a:avLst/>
+          </a:prstGeom>
+          <a:noFill/>
+          <a:ln/>
+        </p:spPr>
+        <p:txBody>
+          <a:bodyPr wrap="square" lIns="0" tIns="0" rIns="0" bIns="0" rtlCol="0" anchor="ctr"/>
+          <a:lstStyle/>
           <a:p>
             <a:pPr indent="0" marL="0">
               <a:buNone/>
             </a:pPr>
             <a:r>
-              <a:rPr lang="en-US" sz="1400" dirty="0">
-                <a:solidFill>
-                  <a:srgbClr val="333333"/>
-                </a:solidFill>
-              </a:rPr>
-              <a:t>de pouvoir pour chaque parti, malgré des poids 49, 48 et 3</a:t>
-            </a:r>
-            <a:endParaRPr lang="en-US" sz="4400" dirty="0"/>
-          </a:p>
-        </p:txBody>
-      </p:sp>
-      <p:sp>
-        <p:nvSpPr>
-          <p:cNvPr id="8" name="Shape 6"/>
-          <p:cNvSpPr/>
-          <p:nvPr/>
-        </p:nvSpPr>
-        <p:spPr>
-          <a:xfrm>
-            <a:off x="6309360" y="1554480"/>
-            <a:ext cx="5120640" cy="3383280"/>
-          </a:xfrm>
-          <a:prstGeom prst="rect">
-            <a:avLst/>
-          </a:prstGeom>
-          <a:solidFill>
-            <a:srgbClr val="1E2761"/>
-          </a:solidFill>
-          <a:ln/>
-          <a:effectLst>
-            <a:outerShdw sx="100000" sy="100000" kx="0" ky="0" algn="bl" rotWithShape="0" blurRad="88900" dist="38100" dir="8100000">
-              <a:srgbClr val="000000">
-                <a:alpha val="12000"/>
-              </a:srgbClr>
-            </a:outerShdw>
-          </a:effectLst>
-        </p:spPr>
+              <a:rPr lang="en-US" sz="1300" i="1" dirty="0">
+                <a:solidFill>
+                  <a:srgbClr val="5B6478"/>
+                </a:solidFill>
+              </a:rPr>
+              <a:t>À ces tailles, Z3 sert d'oracle de validation croisée plutôt que d'accélérateur.</a:t>
+            </a:r>
+            <a:endParaRPr lang="en-US" sz="1300" dirty="0"/>
+          </a:p>
+        </p:txBody>
       </p:sp>
       <p:sp>
         <p:nvSpPr>
           <p:cNvPr id="9" name="Text 7"/>
-          <p:cNvSpPr/>
-          <p:nvPr/>
-        </p:nvSpPr>
-        <p:spPr>
-          <a:xfrm>
-            <a:off x="6583680" y="1783080"/>
-            <a:ext cx="4572000" cy="457200"/>
-          </a:xfrm>
-          <a:prstGeom prst="rect">
-            <a:avLst/>
-          </a:prstGeom>
-          <a:noFill/>
-          <a:ln/>
-        </p:spPr>
-        <p:txBody>
-          <a:bodyPr wrap="square" lIns="0" tIns="0" rIns="0" bIns="0" rtlCol="0" anchor="ctr"/>
-          <a:lstStyle/>
-          <a:p>
-            <a:pPr indent="0" marL="0">
-              <a:buNone/>
-            </a:pPr>
-            <a:r>
-              <a:rPr lang="en-US" sz="1900" b="1" dirty="0">
-                <a:solidFill>
-                  <a:srgbClr val="FFFFFF"/>
-                </a:solidFill>
-                <a:latin typeface="Georgia" pitchFamily="34" charset="0"/>
-                <a:ea typeface="Georgia" pitchFamily="34" charset="-122"/>
-                <a:cs typeface="Georgia" pitchFamily="34" charset="-120"/>
-              </a:rPr>
-              <a:t>Conseil de sécurité de l'ONU</a:t>
-            </a:r>
-            <a:endParaRPr lang="en-US" sz="1900" dirty="0"/>
-          </a:p>
-        </p:txBody>
-      </p:sp>
-      <p:sp>
-        <p:nvSpPr>
-          <p:cNvPr id="10" name="Text 8"/>
-          <p:cNvSpPr/>
-          <p:nvPr/>
-        </p:nvSpPr>
-        <p:spPr>
-          <a:xfrm>
-            <a:off x="6583680" y="2286000"/>
-            <a:ext cx="4572000" cy="365760"/>
-          </a:xfrm>
-          <a:prstGeom prst="rect">
-            <a:avLst/>
-          </a:prstGeom>
-          <a:noFill/>
-          <a:ln/>
-        </p:spPr>
-        <p:txBody>
-          <a:bodyPr wrap="square" lIns="0" tIns="0" rIns="0" bIns="0" rtlCol="0" anchor="ctr"/>
-          <a:lstStyle/>
-          <a:p>
-            <a:pPr indent="0" marL="0">
-              <a:buNone/>
-            </a:pPr>
-            <a:r>
-              <a:rPr lang="en-US" sz="1300" dirty="0">
-                <a:solidFill>
-                  <a:srgbClr val="CADCFC"/>
-                </a:solidFill>
-              </a:rPr>
-              <a:t>5 membres permanents à veto + 10 non permanents</a:t>
-            </a:r>
-            <a:endParaRPr lang="en-US" sz="1300" dirty="0"/>
-          </a:p>
-        </p:txBody>
-      </p:sp>
-      <p:sp>
-        <p:nvSpPr>
-          <p:cNvPr id="11" name="Text 9"/>
-          <p:cNvSpPr/>
-          <p:nvPr/>
-        </p:nvSpPr>
-        <p:spPr>
-          <a:xfrm>
-            <a:off x="6583680" y="2788920"/>
-            <a:ext cx="4572000" cy="640080"/>
-          </a:xfrm>
-          <a:prstGeom prst="rect">
-            <a:avLst/>
-          </a:prstGeom>
-          <a:noFill/>
-          <a:ln/>
-        </p:spPr>
-        <p:txBody>
-          <a:bodyPr wrap="square" lIns="0" tIns="0" rIns="0" bIns="0" rtlCol="0" anchor="ctr"/>
-          <a:lstStyle/>
-          <a:p>
-            <a:pPr indent="0" marL="0">
-              <a:buNone/>
-            </a:pPr>
-            <a:r>
-              <a:rPr lang="en-US" sz="4000" b="1" dirty="0">
-                <a:solidFill>
-                  <a:srgbClr val="F2A900"/>
-                </a:solidFill>
-                <a:latin typeface="Georgia" pitchFamily="34" charset="0"/>
-                <a:ea typeface="Georgia" pitchFamily="34" charset="-122"/>
-                <a:cs typeface="Georgia" pitchFamily="34" charset="-120"/>
-              </a:rPr>
-              <a:t>19,6 %</a:t>
-            </a:r>
-            <a:pPr indent="0" marL="0">
-              <a:buNone/>
-            </a:pPr>
-            <a:r>
-              <a:rPr lang="en-US" sz="1400" dirty="0">
-                <a:solidFill>
-                  <a:srgbClr val="CADCFC"/>
-                </a:solidFill>
-              </a:rPr>
-              <a:t>  par membre permanent</a:t>
-            </a:r>
-            <a:endParaRPr lang="en-US" sz="4000" dirty="0"/>
-          </a:p>
-        </p:txBody>
-      </p:sp>
-      <p:sp>
-        <p:nvSpPr>
-          <p:cNvPr id="12" name="Text 10"/>
-          <p:cNvSpPr/>
-          <p:nvPr/>
-        </p:nvSpPr>
-        <p:spPr>
-          <a:xfrm>
-            <a:off x="6583680" y="3611880"/>
-            <a:ext cx="4572000" cy="548640"/>
-          </a:xfrm>
-          <a:prstGeom prst="rect">
-            <a:avLst/>
-          </a:prstGeom>
-          <a:noFill/>
-          <a:ln/>
-        </p:spPr>
-        <p:txBody>
-          <a:bodyPr wrap="square" lIns="0" tIns="0" rIns="0" bIns="0" rtlCol="0" anchor="ctr"/>
-          <a:lstStyle/>
-          <a:p>
-            <a:pPr indent="0" marL="0">
-              <a:buNone/>
-            </a:pPr>
-            <a:r>
-              <a:rPr lang="en-US" sz="2800" b="1" dirty="0">
-                <a:solidFill>
-                  <a:srgbClr val="FFFFFF"/>
-                </a:solidFill>
-                <a:latin typeface="Georgia" pitchFamily="34" charset="0"/>
-                <a:ea typeface="Georgia" pitchFamily="34" charset="-122"/>
-                <a:cs typeface="Georgia" pitchFamily="34" charset="-120"/>
-              </a:rPr>
-              <a:t>0,19 %</a:t>
-            </a:r>
-            <a:pPr indent="0" marL="0">
-              <a:buNone/>
-            </a:pPr>
-            <a:r>
-              <a:rPr lang="en-US" sz="1400" dirty="0">
-                <a:solidFill>
-                  <a:srgbClr val="CADCFC"/>
-                </a:solidFill>
-              </a:rPr>
-              <a:t>  par membre non permanent</a:t>
-            </a:r>
-            <a:endParaRPr lang="en-US" sz="2800" dirty="0"/>
-          </a:p>
-        </p:txBody>
-      </p:sp>
-      <p:sp>
-        <p:nvSpPr>
-          <p:cNvPr id="13" name="Text 11"/>
-          <p:cNvSpPr/>
-          <p:nvPr/>
-        </p:nvSpPr>
-        <p:spPr>
-          <a:xfrm>
-            <a:off x="6583680" y="4297680"/>
-            <a:ext cx="4572000" cy="365760"/>
-          </a:xfrm>
-          <a:prstGeom prst="rect">
-            <a:avLst/>
-          </a:prstGeom>
-          <a:noFill/>
-          <a:ln/>
-        </p:spPr>
-        <p:txBody>
-          <a:bodyPr wrap="square" lIns="0" tIns="0" rIns="0" bIns="0" rtlCol="0" anchor="ctr"/>
-          <a:lstStyle/>
-          <a:p>
-            <a:pPr indent="0" marL="0">
-              <a:buNone/>
-            </a:pPr>
-            <a:r>
-              <a:rPr lang="en-US" sz="1200" i="1" dirty="0">
-                <a:solidFill>
-                  <a:srgbClr val="CADCFC"/>
-                </a:solidFill>
-              </a:rPr>
-              <a:t>Résultat conforme à Shapley et Shubik (1954).</a:t>
-            </a:r>
-            <a:endParaRPr lang="en-US" sz="1200" dirty="0"/>
-          </a:p>
-        </p:txBody>
-      </p:sp>
-      <p:sp>
-        <p:nvSpPr>
-          <p:cNvPr id="14" name="Text 12"/>
-          <p:cNvSpPr/>
-          <p:nvPr/>
-        </p:nvSpPr>
-        <p:spPr>
-          <a:xfrm>
-            <a:off x="731520" y="5212080"/>
-            <a:ext cx="10698480" cy="548640"/>
-          </a:xfrm>
-          <a:prstGeom prst="rect">
-            <a:avLst/>
-          </a:prstGeom>
-          <a:noFill/>
-          <a:ln/>
-        </p:spPr>
-        <p:txBody>
-          <a:bodyPr wrap="square" lIns="0" tIns="0" rIns="0" bIns="0" rtlCol="0" anchor="ctr"/>
-          <a:lstStyle/>
-          <a:p>
-            <a:pPr indent="0" marL="0">
-              <a:buNone/>
-            </a:pPr>
-            <a:r>
-              <a:rPr lang="en-US" sz="1400" i="1" dirty="0">
-                <a:solidFill>
-                  <a:srgbClr val="5B6478"/>
-                </a:solidFill>
-              </a:rPr>
-              <a:t>Les valeurs calculées coïncident exactement avec les références analytiques de la littérature.</a:t>
-            </a:r>
-            <a:endParaRPr lang="en-US" sz="1400" dirty="0"/>
-          </a:p>
-        </p:txBody>
-      </p:sp>
-      <p:sp>
-        <p:nvSpPr>
-          <p:cNvPr id="15" name="Text 13"/>
           <p:cNvSpPr/>
           <p:nvPr/>
         </p:nvSpPr>
@@ -8837,7 +7050,7 @@
       </p:sp>
       <p:sp>
         <p:nvSpPr>
-          <p:cNvPr id="16" name="Text 14"/>
+          <p:cNvPr id="10" name="Text 8"/>
           <p:cNvSpPr/>
           <p:nvPr/>
         </p:nvSpPr>
@@ -8865,7 +7078,7 @@
                   <a:srgbClr val="5B6478"/>
                 </a:solidFill>
               </a:rPr>
-              <a:t>5 / 15</a:t>
+              <a:t>5 / 13</a:t>
             </a:r>
             <a:endParaRPr lang="en-US" sz="900" dirty="0"/>
           </a:p>
@@ -8956,7 +7169,7 @@
                 <a:ea typeface="Georgia" pitchFamily="34" charset="-122"/>
                 <a:cs typeface="Georgia" pitchFamily="34" charset="-120"/>
               </a:rPr>
-              <a:t>Volet symbolique 1 : encodage SMT (Z3)</a:t>
+              <a:t>Volet symbolique 2 : preuve des axiomes par Z3</a:t>
             </a:r>
             <a:endParaRPr lang="en-US" sz="2700" dirty="0"/>
           </a:p>
@@ -8970,321 +7183,1366 @@
         </p:nvSpPr>
         <p:spPr>
           <a:xfrm>
-            <a:off x="731520" y="1371600"/>
-            <a:ext cx="6492240" cy="3291840"/>
-          </a:xfrm>
-          <a:prstGeom prst="rect">
-            <a:avLst/>
-          </a:prstGeom>
-          <a:noFill/>
-          <a:ln/>
-        </p:spPr>
-        <p:txBody>
-          <a:bodyPr wrap="square" rtlCol="0" anchor="ctr"/>
+            <a:off x="731520" y="1325880"/>
+            <a:ext cx="10698480" cy="914400"/>
+          </a:xfrm>
+          <a:prstGeom prst="rect">
+            <a:avLst/>
+          </a:prstGeom>
+          <a:noFill/>
+          <a:ln/>
+        </p:spPr>
+        <p:txBody>
+          <a:bodyPr wrap="square" lIns="0" tIns="0" rIns="0" bIns="0" rtlCol="0" anchor="ctr"/>
           <a:lstStyle/>
           <a:p>
             <a:pPr indent="0" marL="0">
               <a:lnSpc>
-                <a:spcPct val="120000"/>
+                <a:spcPct val="115000"/>
               </a:lnSpc>
-              <a:spcAft>
-                <a:spcPts val="800"/>
-              </a:spcAft>
-              <a:buNone/>
-            </a:pPr>
-            <a:r>
-              <a:rPr lang="en-US" sz="1550" dirty="0">
+              <a:buNone/>
+            </a:pPr>
+            <a:r>
+              <a:rPr lang="en-US" sz="1500" dirty="0">
                 <a:solidFill>
                   <a:srgbClr val="333333"/>
                 </a:solidFill>
               </a:rPr>
-              <a:t>Plutôt qu'énumérer les coalitions en Python, on confie le raisonnement au solveur SMT Z3.</a:t>
-            </a:r>
-            <a:endParaRPr lang="en-US" sz="1550" dirty="0"/>
-          </a:p>
-          <a:p>
-            <a:pPr marL="342900" indent="-342900">
-              <a:lnSpc>
-                <a:spcPct val="120000"/>
-              </a:lnSpc>
-              <a:buSzPct val="100000"/>
-              <a:buChar char="•"/>
-            </a:pPr>
-            <a:r>
-              <a:rPr lang="en-US" sz="1550" dirty="0">
-                <a:solidFill>
-                  <a:srgbClr val="333333"/>
-                </a:solidFill>
-              </a:rPr>
-              <a:t>Chaque joueur devient une variable booléenne (présent ou absent).</a:t>
-            </a:r>
-            <a:endParaRPr lang="en-US" sz="1550" dirty="0"/>
-          </a:p>
-          <a:p>
-            <a:pPr marL="342900" indent="-342900">
-              <a:lnSpc>
-                <a:spcPct val="120000"/>
-              </a:lnSpc>
-              <a:buSzPct val="100000"/>
-              <a:buChar char="•"/>
-            </a:pPr>
-            <a:r>
-              <a:rPr lang="en-US" sz="1550" dirty="0">
-                <a:solidFill>
-                  <a:srgbClr val="333333"/>
-                </a:solidFill>
-              </a:rPr>
-              <a:t>Le poids de la coalition est une expression entière, la victoire une contrainte.</a:t>
-            </a:r>
-            <a:endParaRPr lang="en-US" sz="1550" dirty="0"/>
-          </a:p>
-          <a:p>
-            <a:pPr marL="342900" indent="-342900">
-              <a:lnSpc>
-                <a:spcPct val="120000"/>
-              </a:lnSpc>
-              <a:buSzPct val="100000"/>
-              <a:buChar char="•"/>
-            </a:pPr>
-            <a:r>
-              <a:rPr lang="en-US" sz="1550" dirty="0">
-                <a:solidFill>
-                  <a:srgbClr val="333333"/>
-                </a:solidFill>
-              </a:rPr>
-              <a:t>Statut des joueurs (veto, nul, dictateur) obtenu par SAT / UNSAT.</a:t>
-            </a:r>
-            <a:endParaRPr lang="en-US" sz="1550" dirty="0"/>
-          </a:p>
-          <a:p>
-            <a:pPr marL="342900" indent="-342900">
-              <a:lnSpc>
-                <a:spcPct val="120000"/>
-              </a:lnSpc>
-              <a:buSzPct val="100000"/>
-              <a:buChar char="•"/>
-            </a:pPr>
-            <a:r>
-              <a:rPr lang="en-US" sz="1550" dirty="0">
-                <a:solidFill>
-                  <a:srgbClr val="333333"/>
-                </a:solidFill>
-              </a:rPr>
-              <a:t>Coalitions critiques et minimales énumérées par blocage de modèles.</a:t>
-            </a:r>
-            <a:endParaRPr lang="en-US" sz="1550" dirty="0"/>
-          </a:p>
-          <a:p>
-            <a:pPr marL="342900" indent="-342900">
-              <a:lnSpc>
-                <a:spcPct val="120000"/>
-              </a:lnSpc>
-              <a:buSzPct val="100000"/>
-              <a:buChar char="•"/>
-            </a:pPr>
-            <a:r>
-              <a:rPr lang="en-US" sz="1550" dirty="0">
-                <a:solidFill>
-                  <a:srgbClr val="333333"/>
-                </a:solidFill>
-              </a:rPr>
-              <a:t>Les trois indices recalculés intégralement par la voie SMT, concordance testée.</a:t>
-            </a:r>
-            <a:endParaRPr lang="en-US" sz="1550" dirty="0"/>
-          </a:p>
-        </p:txBody>
-      </p:sp>
-      <p:sp>
-        <p:nvSpPr>
-          <p:cNvPr id="5" name="Shape 3"/>
-          <p:cNvSpPr/>
-          <p:nvPr/>
-        </p:nvSpPr>
-        <p:spPr>
-          <a:xfrm>
-            <a:off x="7589520" y="1554480"/>
-            <a:ext cx="3840480" cy="2697480"/>
-          </a:xfrm>
-          <a:prstGeom prst="rect">
-            <a:avLst/>
-          </a:prstGeom>
-          <a:solidFill>
-            <a:srgbClr val="1E2761"/>
-          </a:solidFill>
-          <a:ln/>
-          <a:effectLst>
-            <a:outerShdw sx="100000" sy="100000" kx="0" ky="0" algn="bl" rotWithShape="0" blurRad="88900" dist="38100" dir="8100000">
-              <a:srgbClr val="000000">
-                <a:alpha val="12000"/>
-              </a:srgbClr>
-            </a:outerShdw>
-          </a:effectLst>
-        </p:spPr>
-      </p:sp>
-      <p:sp>
-        <p:nvSpPr>
-          <p:cNvPr id="6" name="Text 4"/>
-          <p:cNvSpPr/>
-          <p:nvPr/>
-        </p:nvSpPr>
-        <p:spPr>
-          <a:xfrm>
-            <a:off x="7818120" y="1783080"/>
-            <a:ext cx="3383280" cy="457200"/>
-          </a:xfrm>
-          <a:prstGeom prst="rect">
-            <a:avLst/>
-          </a:prstGeom>
-          <a:noFill/>
-          <a:ln/>
-        </p:spPr>
-        <p:txBody>
-          <a:bodyPr wrap="square" lIns="0" tIns="0" rIns="0" bIns="0" rtlCol="0" anchor="ctr"/>
+              <a:t>Nous soumettons les axiomes des trois indices à Z3. Pour un nombre de joueurs n fixé, les valeurs des coalitions deviennent des variables Z3. Chaque axiome est alors soit prouvé, en montrant que sa négation est insatisfaisable (UNSAT), soit réfuté par un contre-exemple.</a:t>
+            </a:r>
+            <a:endParaRPr lang="en-US" sz="1500" dirty="0"/>
+          </a:p>
+        </p:txBody>
+      </p:sp>
+      <p:graphicFrame>
+        <p:nvGraphicFramePr>
+          <p:cNvPr id="7" name="Table 0"/>
+          <p:cNvGraphicFramePr>
+            <a:graphicFrameLocks noGrp="1"/>
+          </p:cNvGraphicFramePr>
+          <p:nvPr>
+            <p:extLst>
+              <p:ext uri="{D42A27DB-BD31-4B8C-83A1-F6EECF244321}">
+                <p14:modId xmlns:p14="http://schemas.microsoft.com/office/powerpoint/2010/main" val="1579011935"/>
+              </p:ext>
+            </p:extLst>
+          </p:nvPr>
+        </p:nvGraphicFramePr>
+        <p:xfrm>
+          <a:off x="731520" y="2377440"/>
+          <a:ext cx="10698480" cy="914400"/>
+        </p:xfrm>
+        <a:graphic>
+          <a:graphicData uri="http://schemas.openxmlformats.org/drawingml/2006/table">
+            <a:tbl>
+              <a:tblPr/>
+              <a:tblGrid>
+                <a:gridCol w="3291840"/>
+                <a:gridCol w="2468880"/>
+                <a:gridCol w="2468880"/>
+                <a:gridCol w="2468880"/>
+              </a:tblGrid>
+              <a:tr h="402336">
+                <a:tc>
+                  <a:txBody>
+                    <a:bodyPr/>
+                    <a:lstStyle/>
+                    <a:p>
+                      <a:pPr algn="ctr" indent="0" marL="0">
+                        <a:buNone/>
+                      </a:pPr>
+                      <a:r>
+                        <a:rPr lang="en-US" sz="1300" b="1" dirty="0">
+                          <a:solidFill>
+                            <a:srgbClr val="FFFFFF"/>
+                          </a:solidFill>
+                          <a:latin typeface="Georgia" pitchFamily="34" charset="0"/>
+                          <a:ea typeface="Georgia" pitchFamily="34" charset="-122"/>
+                          <a:cs typeface="Georgia" pitchFamily="34" charset="-120"/>
+                        </a:rPr>
+                        <a:t>Axiome</a:t>
+                      </a:r>
+                      <a:endParaRPr lang="en-US" sz="1300" dirty="0">
+                        <a:latin typeface="Georgia" charset="0"/>
+                        <a:ea typeface="Georgia" charset="0"/>
+                        <a:cs typeface="Georgia" charset="0"/>
+                      </a:endParaRPr>
+                    </a:p>
+                  </a:txBody>
+                  <a:tcPr marL="50800" marR="50800" marT="50800" marB="50800" anchor="ctr">
+                    <a:lnL w="12700" cap="flat" cmpd="sng" algn="ctr">
+                      <a:solidFill>
+                        <a:srgbClr val="CADCFC"/>
+                      </a:solidFill>
+                      <a:prstDash val="solid"/>
+                      <a:round/>
+                      <a:headEnd type="none" w="med" len="med"/>
+                      <a:tailEnd type="none" w="med" len="med"/>
+                    </a:lnL>
+                    <a:lnR w="12700" cap="flat" cmpd="sng" algn="ctr">
+                      <a:solidFill>
+                        <a:srgbClr val="CADCFC"/>
+                      </a:solidFill>
+                      <a:prstDash val="solid"/>
+                      <a:round/>
+                      <a:headEnd type="none" w="med" len="med"/>
+                      <a:tailEnd type="none" w="med" len="med"/>
+                    </a:lnR>
+                    <a:lnT w="12700" cap="flat" cmpd="sng" algn="ctr">
+                      <a:solidFill>
+                        <a:srgbClr val="CADCFC"/>
+                      </a:solidFill>
+                      <a:prstDash val="solid"/>
+                      <a:round/>
+                      <a:headEnd type="none" w="med" len="med"/>
+                      <a:tailEnd type="none" w="med" len="med"/>
+                    </a:lnT>
+                    <a:lnB w="12700" cap="flat" cmpd="sng" algn="ctr">
+                      <a:solidFill>
+                        <a:srgbClr val="CADCFC"/>
+                      </a:solidFill>
+                      <a:prstDash val="solid"/>
+                      <a:round/>
+                      <a:headEnd type="none" w="med" len="med"/>
+                      <a:tailEnd type="none" w="med" len="med"/>
+                    </a:lnB>
+                    <a:solidFill>
+                      <a:srgbClr val="1E2761"/>
+                    </a:solidFill>
+                  </a:tcPr>
+                </a:tc>
+                <a:tc>
+                  <a:txBody>
+                    <a:bodyPr/>
+                    <a:lstStyle/>
+                    <a:p>
+                      <a:pPr algn="ctr" indent="0" marL="0">
+                        <a:buNone/>
+                      </a:pPr>
+                      <a:r>
+                        <a:rPr lang="en-US" sz="1300" b="1" dirty="0">
+                          <a:solidFill>
+                            <a:srgbClr val="FFFFFF"/>
+                          </a:solidFill>
+                          <a:latin typeface="Georgia" pitchFamily="34" charset="0"/>
+                          <a:ea typeface="Georgia" pitchFamily="34" charset="-122"/>
+                          <a:cs typeface="Georgia" pitchFamily="34" charset="-120"/>
+                        </a:rPr>
+                        <a:t>Shapley-Shubik</a:t>
+                      </a:r>
+                      <a:endParaRPr lang="en-US" sz="1300" dirty="0">
+                        <a:latin typeface="Georgia" charset="0"/>
+                        <a:ea typeface="Georgia" charset="0"/>
+                        <a:cs typeface="Georgia" charset="0"/>
+                      </a:endParaRPr>
+                    </a:p>
+                  </a:txBody>
+                  <a:tcPr marL="50800" marR="50800" marT="50800" marB="50800" anchor="ctr">
+                    <a:lnL w="12700" cap="flat" cmpd="sng" algn="ctr">
+                      <a:solidFill>
+                        <a:srgbClr val="CADCFC"/>
+                      </a:solidFill>
+                      <a:prstDash val="solid"/>
+                      <a:round/>
+                      <a:headEnd type="none" w="med" len="med"/>
+                      <a:tailEnd type="none" w="med" len="med"/>
+                    </a:lnL>
+                    <a:lnR w="12700" cap="flat" cmpd="sng" algn="ctr">
+                      <a:solidFill>
+                        <a:srgbClr val="CADCFC"/>
+                      </a:solidFill>
+                      <a:prstDash val="solid"/>
+                      <a:round/>
+                      <a:headEnd type="none" w="med" len="med"/>
+                      <a:tailEnd type="none" w="med" len="med"/>
+                    </a:lnR>
+                    <a:lnT w="12700" cap="flat" cmpd="sng" algn="ctr">
+                      <a:solidFill>
+                        <a:srgbClr val="CADCFC"/>
+                      </a:solidFill>
+                      <a:prstDash val="solid"/>
+                      <a:round/>
+                      <a:headEnd type="none" w="med" len="med"/>
+                      <a:tailEnd type="none" w="med" len="med"/>
+                    </a:lnT>
+                    <a:lnB w="12700" cap="flat" cmpd="sng" algn="ctr">
+                      <a:solidFill>
+                        <a:srgbClr val="CADCFC"/>
+                      </a:solidFill>
+                      <a:prstDash val="solid"/>
+                      <a:round/>
+                      <a:headEnd type="none" w="med" len="med"/>
+                      <a:tailEnd type="none" w="med" len="med"/>
+                    </a:lnB>
+                    <a:solidFill>
+                      <a:srgbClr val="1E2761"/>
+                    </a:solidFill>
+                  </a:tcPr>
+                </a:tc>
+                <a:tc>
+                  <a:txBody>
+                    <a:bodyPr/>
+                    <a:lstStyle/>
+                    <a:p>
+                      <a:pPr algn="ctr" indent="0" marL="0">
+                        <a:buNone/>
+                      </a:pPr>
+                      <a:r>
+                        <a:rPr lang="en-US" sz="1300" b="1" dirty="0">
+                          <a:solidFill>
+                            <a:srgbClr val="FFFFFF"/>
+                          </a:solidFill>
+                          <a:latin typeface="Georgia" pitchFamily="34" charset="0"/>
+                          <a:ea typeface="Georgia" pitchFamily="34" charset="-122"/>
+                          <a:cs typeface="Georgia" pitchFamily="34" charset="-120"/>
+                        </a:rPr>
+                        <a:t>Banzhaf</a:t>
+                      </a:r>
+                      <a:endParaRPr lang="en-US" sz="1300" dirty="0">
+                        <a:latin typeface="Georgia" charset="0"/>
+                        <a:ea typeface="Georgia" charset="0"/>
+                        <a:cs typeface="Georgia" charset="0"/>
+                      </a:endParaRPr>
+                    </a:p>
+                  </a:txBody>
+                  <a:tcPr marL="50800" marR="50800" marT="50800" marB="50800" anchor="ctr">
+                    <a:lnL w="12700" cap="flat" cmpd="sng" algn="ctr">
+                      <a:solidFill>
+                        <a:srgbClr val="CADCFC"/>
+                      </a:solidFill>
+                      <a:prstDash val="solid"/>
+                      <a:round/>
+                      <a:headEnd type="none" w="med" len="med"/>
+                      <a:tailEnd type="none" w="med" len="med"/>
+                    </a:lnL>
+                    <a:lnR w="12700" cap="flat" cmpd="sng" algn="ctr">
+                      <a:solidFill>
+                        <a:srgbClr val="CADCFC"/>
+                      </a:solidFill>
+                      <a:prstDash val="solid"/>
+                      <a:round/>
+                      <a:headEnd type="none" w="med" len="med"/>
+                      <a:tailEnd type="none" w="med" len="med"/>
+                    </a:lnR>
+                    <a:lnT w="12700" cap="flat" cmpd="sng" algn="ctr">
+                      <a:solidFill>
+                        <a:srgbClr val="CADCFC"/>
+                      </a:solidFill>
+                      <a:prstDash val="solid"/>
+                      <a:round/>
+                      <a:headEnd type="none" w="med" len="med"/>
+                      <a:tailEnd type="none" w="med" len="med"/>
+                    </a:lnT>
+                    <a:lnB w="12700" cap="flat" cmpd="sng" algn="ctr">
+                      <a:solidFill>
+                        <a:srgbClr val="CADCFC"/>
+                      </a:solidFill>
+                      <a:prstDash val="solid"/>
+                      <a:round/>
+                      <a:headEnd type="none" w="med" len="med"/>
+                      <a:tailEnd type="none" w="med" len="med"/>
+                    </a:lnB>
+                    <a:solidFill>
+                      <a:srgbClr val="1E2761"/>
+                    </a:solidFill>
+                  </a:tcPr>
+                </a:tc>
+                <a:tc>
+                  <a:txBody>
+                    <a:bodyPr/>
+                    <a:lstStyle/>
+                    <a:p>
+                      <a:pPr algn="ctr" indent="0" marL="0">
+                        <a:buNone/>
+                      </a:pPr>
+                      <a:r>
+                        <a:rPr lang="en-US" sz="1300" b="1" dirty="0">
+                          <a:solidFill>
+                            <a:srgbClr val="FFFFFF"/>
+                          </a:solidFill>
+                          <a:latin typeface="Georgia" pitchFamily="34" charset="0"/>
+                          <a:ea typeface="Georgia" pitchFamily="34" charset="-122"/>
+                          <a:cs typeface="Georgia" pitchFamily="34" charset="-120"/>
+                        </a:rPr>
+                        <a:t>Deegan-Packel</a:t>
+                      </a:r>
+                      <a:endParaRPr lang="en-US" sz="1300" dirty="0">
+                        <a:latin typeface="Georgia" charset="0"/>
+                        <a:ea typeface="Georgia" charset="0"/>
+                        <a:cs typeface="Georgia" charset="0"/>
+                      </a:endParaRPr>
+                    </a:p>
+                  </a:txBody>
+                  <a:tcPr marL="50800" marR="50800" marT="50800" marB="50800" anchor="ctr">
+                    <a:lnL w="12700" cap="flat" cmpd="sng" algn="ctr">
+                      <a:solidFill>
+                        <a:srgbClr val="CADCFC"/>
+                      </a:solidFill>
+                      <a:prstDash val="solid"/>
+                      <a:round/>
+                      <a:headEnd type="none" w="med" len="med"/>
+                      <a:tailEnd type="none" w="med" len="med"/>
+                    </a:lnL>
+                    <a:lnR w="12700" cap="flat" cmpd="sng" algn="ctr">
+                      <a:solidFill>
+                        <a:srgbClr val="CADCFC"/>
+                      </a:solidFill>
+                      <a:prstDash val="solid"/>
+                      <a:round/>
+                      <a:headEnd type="none" w="med" len="med"/>
+                      <a:tailEnd type="none" w="med" len="med"/>
+                    </a:lnR>
+                    <a:lnT w="12700" cap="flat" cmpd="sng" algn="ctr">
+                      <a:solidFill>
+                        <a:srgbClr val="CADCFC"/>
+                      </a:solidFill>
+                      <a:prstDash val="solid"/>
+                      <a:round/>
+                      <a:headEnd type="none" w="med" len="med"/>
+                      <a:tailEnd type="none" w="med" len="med"/>
+                    </a:lnT>
+                    <a:lnB w="12700" cap="flat" cmpd="sng" algn="ctr">
+                      <a:solidFill>
+                        <a:srgbClr val="CADCFC"/>
+                      </a:solidFill>
+                      <a:prstDash val="solid"/>
+                      <a:round/>
+                      <a:headEnd type="none" w="med" len="med"/>
+                      <a:tailEnd type="none" w="med" len="med"/>
+                    </a:lnB>
+                    <a:solidFill>
+                      <a:srgbClr val="1E2761"/>
+                    </a:solidFill>
+                  </a:tcPr>
+                </a:tc>
+              </a:tr>
+              <a:tr h="402336">
+                <a:tc>
+                  <a:txBody>
+                    <a:bodyPr/>
+                    <a:lstStyle/>
+                    <a:p>
+                      <a:pPr algn="l" indent="0" marL="0">
+                        <a:buNone/>
+                      </a:pPr>
+                      <a:r>
+                        <a:rPr lang="en-US" sz="1250" b="1" dirty="0">
+                          <a:solidFill>
+                            <a:srgbClr val="1E2761"/>
+                          </a:solidFill>
+                        </a:rPr>
+                        <a:t>Symétrie</a:t>
+                      </a:r>
+                      <a:endParaRPr lang="en-US" sz="1250" dirty="0"/>
+                    </a:p>
+                  </a:txBody>
+                  <a:tcPr marL="50800" marR="50800" marT="50800" marB="50800" anchor="ctr">
+                    <a:lnL w="12700" cap="flat" cmpd="sng" algn="ctr">
+                      <a:solidFill>
+                        <a:srgbClr val="CADCFC"/>
+                      </a:solidFill>
+                      <a:prstDash val="solid"/>
+                      <a:round/>
+                      <a:headEnd type="none" w="med" len="med"/>
+                      <a:tailEnd type="none" w="med" len="med"/>
+                    </a:lnL>
+                    <a:lnR w="12700" cap="flat" cmpd="sng" algn="ctr">
+                      <a:solidFill>
+                        <a:srgbClr val="CADCFC"/>
+                      </a:solidFill>
+                      <a:prstDash val="solid"/>
+                      <a:round/>
+                      <a:headEnd type="none" w="med" len="med"/>
+                      <a:tailEnd type="none" w="med" len="med"/>
+                    </a:lnR>
+                    <a:lnT w="12700" cap="flat" cmpd="sng" algn="ctr">
+                      <a:solidFill>
+                        <a:srgbClr val="CADCFC"/>
+                      </a:solidFill>
+                      <a:prstDash val="solid"/>
+                      <a:round/>
+                      <a:headEnd type="none" w="med" len="med"/>
+                      <a:tailEnd type="none" w="med" len="med"/>
+                    </a:lnT>
+                    <a:lnB w="12700" cap="flat" cmpd="sng" algn="ctr">
+                      <a:solidFill>
+                        <a:srgbClr val="CADCFC"/>
+                      </a:solidFill>
+                      <a:prstDash val="solid"/>
+                      <a:round/>
+                      <a:headEnd type="none" w="med" len="med"/>
+                      <a:tailEnd type="none" w="med" len="med"/>
+                    </a:lnB>
+                    <a:solidFill>
+                      <a:srgbClr val="FFFFFF"/>
+                    </a:solidFill>
+                  </a:tcPr>
+                </a:tc>
+                <a:tc>
+                  <a:txBody>
+                    <a:bodyPr/>
+                    <a:lstStyle/>
+                    <a:p>
+                      <a:pPr algn="ctr" indent="0" marL="0">
+                        <a:buNone/>
+                      </a:pPr>
+                      <a:r>
+                        <a:rPr lang="en-US" sz="1250" b="1" dirty="0">
+                          <a:solidFill>
+                            <a:srgbClr val="2C8A4A"/>
+                          </a:solidFill>
+                        </a:rPr>
+                        <a:t>prouvé</a:t>
+                      </a:r>
+                      <a:endParaRPr lang="en-US" sz="1250" dirty="0"/>
+                    </a:p>
+                  </a:txBody>
+                  <a:tcPr marL="50800" marR="50800" marT="50800" marB="50800" anchor="ctr">
+                    <a:lnL w="12700" cap="flat" cmpd="sng" algn="ctr">
+                      <a:solidFill>
+                        <a:srgbClr val="CADCFC"/>
+                      </a:solidFill>
+                      <a:prstDash val="solid"/>
+                      <a:round/>
+                      <a:headEnd type="none" w="med" len="med"/>
+                      <a:tailEnd type="none" w="med" len="med"/>
+                    </a:lnL>
+                    <a:lnR w="12700" cap="flat" cmpd="sng" algn="ctr">
+                      <a:solidFill>
+                        <a:srgbClr val="CADCFC"/>
+                      </a:solidFill>
+                      <a:prstDash val="solid"/>
+                      <a:round/>
+                      <a:headEnd type="none" w="med" len="med"/>
+                      <a:tailEnd type="none" w="med" len="med"/>
+                    </a:lnR>
+                    <a:lnT w="12700" cap="flat" cmpd="sng" algn="ctr">
+                      <a:solidFill>
+                        <a:srgbClr val="CADCFC"/>
+                      </a:solidFill>
+                      <a:prstDash val="solid"/>
+                      <a:round/>
+                      <a:headEnd type="none" w="med" len="med"/>
+                      <a:tailEnd type="none" w="med" len="med"/>
+                    </a:lnT>
+                    <a:lnB w="12700" cap="flat" cmpd="sng" algn="ctr">
+                      <a:solidFill>
+                        <a:srgbClr val="CADCFC"/>
+                      </a:solidFill>
+                      <a:prstDash val="solid"/>
+                      <a:round/>
+                      <a:headEnd type="none" w="med" len="med"/>
+                      <a:tailEnd type="none" w="med" len="med"/>
+                    </a:lnB>
+                    <a:solidFill>
+                      <a:srgbClr val="FFFFFF"/>
+                    </a:solidFill>
+                  </a:tcPr>
+                </a:tc>
+                <a:tc>
+                  <a:txBody>
+                    <a:bodyPr/>
+                    <a:lstStyle/>
+                    <a:p>
+                      <a:pPr algn="ctr" indent="0" marL="0">
+                        <a:buNone/>
+                      </a:pPr>
+                      <a:r>
+                        <a:rPr lang="en-US" sz="1250" b="1" dirty="0">
+                          <a:solidFill>
+                            <a:srgbClr val="2C8A4A"/>
+                          </a:solidFill>
+                        </a:rPr>
+                        <a:t>prouvé</a:t>
+                      </a:r>
+                      <a:endParaRPr lang="en-US" sz="1250" dirty="0"/>
+                    </a:p>
+                  </a:txBody>
+                  <a:tcPr marL="50800" marR="50800" marT="50800" marB="50800" anchor="ctr">
+                    <a:lnL w="12700" cap="flat" cmpd="sng" algn="ctr">
+                      <a:solidFill>
+                        <a:srgbClr val="CADCFC"/>
+                      </a:solidFill>
+                      <a:prstDash val="solid"/>
+                      <a:round/>
+                      <a:headEnd type="none" w="med" len="med"/>
+                      <a:tailEnd type="none" w="med" len="med"/>
+                    </a:lnL>
+                    <a:lnR w="12700" cap="flat" cmpd="sng" algn="ctr">
+                      <a:solidFill>
+                        <a:srgbClr val="CADCFC"/>
+                      </a:solidFill>
+                      <a:prstDash val="solid"/>
+                      <a:round/>
+                      <a:headEnd type="none" w="med" len="med"/>
+                      <a:tailEnd type="none" w="med" len="med"/>
+                    </a:lnR>
+                    <a:lnT w="12700" cap="flat" cmpd="sng" algn="ctr">
+                      <a:solidFill>
+                        <a:srgbClr val="CADCFC"/>
+                      </a:solidFill>
+                      <a:prstDash val="solid"/>
+                      <a:round/>
+                      <a:headEnd type="none" w="med" len="med"/>
+                      <a:tailEnd type="none" w="med" len="med"/>
+                    </a:lnT>
+                    <a:lnB w="12700" cap="flat" cmpd="sng" algn="ctr">
+                      <a:solidFill>
+                        <a:srgbClr val="CADCFC"/>
+                      </a:solidFill>
+                      <a:prstDash val="solid"/>
+                      <a:round/>
+                      <a:headEnd type="none" w="med" len="med"/>
+                      <a:tailEnd type="none" w="med" len="med"/>
+                    </a:lnB>
+                    <a:solidFill>
+                      <a:srgbClr val="FFFFFF"/>
+                    </a:solidFill>
+                  </a:tcPr>
+                </a:tc>
+                <a:tc>
+                  <a:txBody>
+                    <a:bodyPr/>
+                    <a:lstStyle/>
+                    <a:p>
+                      <a:pPr algn="ctr" indent="0" marL="0">
+                        <a:buNone/>
+                      </a:pPr>
+                      <a:r>
+                        <a:rPr lang="en-US" sz="1250" b="1" dirty="0">
+                          <a:solidFill>
+                            <a:srgbClr val="2C8A4A"/>
+                          </a:solidFill>
+                        </a:rPr>
+                        <a:t>prouvé</a:t>
+                      </a:r>
+                      <a:endParaRPr lang="en-US" sz="1250" dirty="0"/>
+                    </a:p>
+                  </a:txBody>
+                  <a:tcPr marL="50800" marR="50800" marT="50800" marB="50800" anchor="ctr">
+                    <a:lnL w="12700" cap="flat" cmpd="sng" algn="ctr">
+                      <a:solidFill>
+                        <a:srgbClr val="CADCFC"/>
+                      </a:solidFill>
+                      <a:prstDash val="solid"/>
+                      <a:round/>
+                      <a:headEnd type="none" w="med" len="med"/>
+                      <a:tailEnd type="none" w="med" len="med"/>
+                    </a:lnL>
+                    <a:lnR w="12700" cap="flat" cmpd="sng" algn="ctr">
+                      <a:solidFill>
+                        <a:srgbClr val="CADCFC"/>
+                      </a:solidFill>
+                      <a:prstDash val="solid"/>
+                      <a:round/>
+                      <a:headEnd type="none" w="med" len="med"/>
+                      <a:tailEnd type="none" w="med" len="med"/>
+                    </a:lnR>
+                    <a:lnT w="12700" cap="flat" cmpd="sng" algn="ctr">
+                      <a:solidFill>
+                        <a:srgbClr val="CADCFC"/>
+                      </a:solidFill>
+                      <a:prstDash val="solid"/>
+                      <a:round/>
+                      <a:headEnd type="none" w="med" len="med"/>
+                      <a:tailEnd type="none" w="med" len="med"/>
+                    </a:lnT>
+                    <a:lnB w="12700" cap="flat" cmpd="sng" algn="ctr">
+                      <a:solidFill>
+                        <a:srgbClr val="CADCFC"/>
+                      </a:solidFill>
+                      <a:prstDash val="solid"/>
+                      <a:round/>
+                      <a:headEnd type="none" w="med" len="med"/>
+                      <a:tailEnd type="none" w="med" len="med"/>
+                    </a:lnB>
+                    <a:solidFill>
+                      <a:srgbClr val="FFFFFF"/>
+                    </a:solidFill>
+                  </a:tcPr>
+                </a:tc>
+              </a:tr>
+              <a:tr h="402336">
+                <a:tc>
+                  <a:txBody>
+                    <a:bodyPr/>
+                    <a:lstStyle/>
+                    <a:p>
+                      <a:pPr algn="l" indent="0" marL="0">
+                        <a:buNone/>
+                      </a:pPr>
+                      <a:r>
+                        <a:rPr lang="en-US" sz="1250" b="1" dirty="0">
+                          <a:solidFill>
+                            <a:srgbClr val="1E2761"/>
+                          </a:solidFill>
+                        </a:rPr>
+                        <a:t>Joueur nul</a:t>
+                      </a:r>
+                      <a:endParaRPr lang="en-US" sz="1250" dirty="0"/>
+                    </a:p>
+                  </a:txBody>
+                  <a:tcPr marL="50800" marR="50800" marT="50800" marB="50800" anchor="ctr">
+                    <a:lnL w="12700" cap="flat" cmpd="sng" algn="ctr">
+                      <a:solidFill>
+                        <a:srgbClr val="CADCFC"/>
+                      </a:solidFill>
+                      <a:prstDash val="solid"/>
+                      <a:round/>
+                      <a:headEnd type="none" w="med" len="med"/>
+                      <a:tailEnd type="none" w="med" len="med"/>
+                    </a:lnL>
+                    <a:lnR w="12700" cap="flat" cmpd="sng" algn="ctr">
+                      <a:solidFill>
+                        <a:srgbClr val="CADCFC"/>
+                      </a:solidFill>
+                      <a:prstDash val="solid"/>
+                      <a:round/>
+                      <a:headEnd type="none" w="med" len="med"/>
+                      <a:tailEnd type="none" w="med" len="med"/>
+                    </a:lnR>
+                    <a:lnT w="12700" cap="flat" cmpd="sng" algn="ctr">
+                      <a:solidFill>
+                        <a:srgbClr val="CADCFC"/>
+                      </a:solidFill>
+                      <a:prstDash val="solid"/>
+                      <a:round/>
+                      <a:headEnd type="none" w="med" len="med"/>
+                      <a:tailEnd type="none" w="med" len="med"/>
+                    </a:lnT>
+                    <a:lnB w="12700" cap="flat" cmpd="sng" algn="ctr">
+                      <a:solidFill>
+                        <a:srgbClr val="CADCFC"/>
+                      </a:solidFill>
+                      <a:prstDash val="solid"/>
+                      <a:round/>
+                      <a:headEnd type="none" w="med" len="med"/>
+                      <a:tailEnd type="none" w="med" len="med"/>
+                    </a:lnB>
+                    <a:solidFill>
+                      <a:srgbClr val="FFFFFF"/>
+                    </a:solidFill>
+                  </a:tcPr>
+                </a:tc>
+                <a:tc>
+                  <a:txBody>
+                    <a:bodyPr/>
+                    <a:lstStyle/>
+                    <a:p>
+                      <a:pPr algn="ctr" indent="0" marL="0">
+                        <a:buNone/>
+                      </a:pPr>
+                      <a:r>
+                        <a:rPr lang="en-US" sz="1250" b="1" dirty="0">
+                          <a:solidFill>
+                            <a:srgbClr val="2C8A4A"/>
+                          </a:solidFill>
+                        </a:rPr>
+                        <a:t>prouvé</a:t>
+                      </a:r>
+                      <a:endParaRPr lang="en-US" sz="1250" dirty="0"/>
+                    </a:p>
+                  </a:txBody>
+                  <a:tcPr marL="50800" marR="50800" marT="50800" marB="50800" anchor="ctr">
+                    <a:lnL w="12700" cap="flat" cmpd="sng" algn="ctr">
+                      <a:solidFill>
+                        <a:srgbClr val="CADCFC"/>
+                      </a:solidFill>
+                      <a:prstDash val="solid"/>
+                      <a:round/>
+                      <a:headEnd type="none" w="med" len="med"/>
+                      <a:tailEnd type="none" w="med" len="med"/>
+                    </a:lnL>
+                    <a:lnR w="12700" cap="flat" cmpd="sng" algn="ctr">
+                      <a:solidFill>
+                        <a:srgbClr val="CADCFC"/>
+                      </a:solidFill>
+                      <a:prstDash val="solid"/>
+                      <a:round/>
+                      <a:headEnd type="none" w="med" len="med"/>
+                      <a:tailEnd type="none" w="med" len="med"/>
+                    </a:lnR>
+                    <a:lnT w="12700" cap="flat" cmpd="sng" algn="ctr">
+                      <a:solidFill>
+                        <a:srgbClr val="CADCFC"/>
+                      </a:solidFill>
+                      <a:prstDash val="solid"/>
+                      <a:round/>
+                      <a:headEnd type="none" w="med" len="med"/>
+                      <a:tailEnd type="none" w="med" len="med"/>
+                    </a:lnT>
+                    <a:lnB w="12700" cap="flat" cmpd="sng" algn="ctr">
+                      <a:solidFill>
+                        <a:srgbClr val="CADCFC"/>
+                      </a:solidFill>
+                      <a:prstDash val="solid"/>
+                      <a:round/>
+                      <a:headEnd type="none" w="med" len="med"/>
+                      <a:tailEnd type="none" w="med" len="med"/>
+                    </a:lnB>
+                    <a:solidFill>
+                      <a:srgbClr val="FFFFFF"/>
+                    </a:solidFill>
+                  </a:tcPr>
+                </a:tc>
+                <a:tc>
+                  <a:txBody>
+                    <a:bodyPr/>
+                    <a:lstStyle/>
+                    <a:p>
+                      <a:pPr algn="ctr" indent="0" marL="0">
+                        <a:buNone/>
+                      </a:pPr>
+                      <a:r>
+                        <a:rPr lang="en-US" sz="1250" b="1" dirty="0">
+                          <a:solidFill>
+                            <a:srgbClr val="2C8A4A"/>
+                          </a:solidFill>
+                        </a:rPr>
+                        <a:t>prouvé</a:t>
+                      </a:r>
+                      <a:endParaRPr lang="en-US" sz="1250" dirty="0"/>
+                    </a:p>
+                  </a:txBody>
+                  <a:tcPr marL="50800" marR="50800" marT="50800" marB="50800" anchor="ctr">
+                    <a:lnL w="12700" cap="flat" cmpd="sng" algn="ctr">
+                      <a:solidFill>
+                        <a:srgbClr val="CADCFC"/>
+                      </a:solidFill>
+                      <a:prstDash val="solid"/>
+                      <a:round/>
+                      <a:headEnd type="none" w="med" len="med"/>
+                      <a:tailEnd type="none" w="med" len="med"/>
+                    </a:lnL>
+                    <a:lnR w="12700" cap="flat" cmpd="sng" algn="ctr">
+                      <a:solidFill>
+                        <a:srgbClr val="CADCFC"/>
+                      </a:solidFill>
+                      <a:prstDash val="solid"/>
+                      <a:round/>
+                      <a:headEnd type="none" w="med" len="med"/>
+                      <a:tailEnd type="none" w="med" len="med"/>
+                    </a:lnR>
+                    <a:lnT w="12700" cap="flat" cmpd="sng" algn="ctr">
+                      <a:solidFill>
+                        <a:srgbClr val="CADCFC"/>
+                      </a:solidFill>
+                      <a:prstDash val="solid"/>
+                      <a:round/>
+                      <a:headEnd type="none" w="med" len="med"/>
+                      <a:tailEnd type="none" w="med" len="med"/>
+                    </a:lnT>
+                    <a:lnB w="12700" cap="flat" cmpd="sng" algn="ctr">
+                      <a:solidFill>
+                        <a:srgbClr val="CADCFC"/>
+                      </a:solidFill>
+                      <a:prstDash val="solid"/>
+                      <a:round/>
+                      <a:headEnd type="none" w="med" len="med"/>
+                      <a:tailEnd type="none" w="med" len="med"/>
+                    </a:lnB>
+                    <a:solidFill>
+                      <a:srgbClr val="FFFFFF"/>
+                    </a:solidFill>
+                  </a:tcPr>
+                </a:tc>
+                <a:tc>
+                  <a:txBody>
+                    <a:bodyPr/>
+                    <a:lstStyle/>
+                    <a:p>
+                      <a:pPr algn="ctr" indent="0" marL="0">
+                        <a:buNone/>
+                      </a:pPr>
+                      <a:r>
+                        <a:rPr lang="en-US" sz="1250" b="1" dirty="0">
+                          <a:solidFill>
+                            <a:srgbClr val="2C8A4A"/>
+                          </a:solidFill>
+                        </a:rPr>
+                        <a:t>prouvé</a:t>
+                      </a:r>
+                      <a:endParaRPr lang="en-US" sz="1250" dirty="0"/>
+                    </a:p>
+                  </a:txBody>
+                  <a:tcPr marL="50800" marR="50800" marT="50800" marB="50800" anchor="ctr">
+                    <a:lnL w="12700" cap="flat" cmpd="sng" algn="ctr">
+                      <a:solidFill>
+                        <a:srgbClr val="CADCFC"/>
+                      </a:solidFill>
+                      <a:prstDash val="solid"/>
+                      <a:round/>
+                      <a:headEnd type="none" w="med" len="med"/>
+                      <a:tailEnd type="none" w="med" len="med"/>
+                    </a:lnL>
+                    <a:lnR w="12700" cap="flat" cmpd="sng" algn="ctr">
+                      <a:solidFill>
+                        <a:srgbClr val="CADCFC"/>
+                      </a:solidFill>
+                      <a:prstDash val="solid"/>
+                      <a:round/>
+                      <a:headEnd type="none" w="med" len="med"/>
+                      <a:tailEnd type="none" w="med" len="med"/>
+                    </a:lnR>
+                    <a:lnT w="12700" cap="flat" cmpd="sng" algn="ctr">
+                      <a:solidFill>
+                        <a:srgbClr val="CADCFC"/>
+                      </a:solidFill>
+                      <a:prstDash val="solid"/>
+                      <a:round/>
+                      <a:headEnd type="none" w="med" len="med"/>
+                      <a:tailEnd type="none" w="med" len="med"/>
+                    </a:lnT>
+                    <a:lnB w="12700" cap="flat" cmpd="sng" algn="ctr">
+                      <a:solidFill>
+                        <a:srgbClr val="CADCFC"/>
+                      </a:solidFill>
+                      <a:prstDash val="solid"/>
+                      <a:round/>
+                      <a:headEnd type="none" w="med" len="med"/>
+                      <a:tailEnd type="none" w="med" len="med"/>
+                    </a:lnB>
+                    <a:solidFill>
+                      <a:srgbClr val="FFFFFF"/>
+                    </a:solidFill>
+                  </a:tcPr>
+                </a:tc>
+              </a:tr>
+              <a:tr h="402336">
+                <a:tc>
+                  <a:txBody>
+                    <a:bodyPr/>
+                    <a:lstStyle/>
+                    <a:p>
+                      <a:pPr algn="l" indent="0" marL="0">
+                        <a:buNone/>
+                      </a:pPr>
+                      <a:r>
+                        <a:rPr lang="en-US" sz="1250" b="1" dirty="0">
+                          <a:solidFill>
+                            <a:srgbClr val="1E2761"/>
+                          </a:solidFill>
+                        </a:rPr>
+                        <a:t>Efficacité (somme = 1)</a:t>
+                      </a:r>
+                      <a:endParaRPr lang="en-US" sz="1250" dirty="0"/>
+                    </a:p>
+                  </a:txBody>
+                  <a:tcPr marL="50800" marR="50800" marT="50800" marB="50800" anchor="ctr">
+                    <a:lnL w="12700" cap="flat" cmpd="sng" algn="ctr">
+                      <a:solidFill>
+                        <a:srgbClr val="CADCFC"/>
+                      </a:solidFill>
+                      <a:prstDash val="solid"/>
+                      <a:round/>
+                      <a:headEnd type="none" w="med" len="med"/>
+                      <a:tailEnd type="none" w="med" len="med"/>
+                    </a:lnL>
+                    <a:lnR w="12700" cap="flat" cmpd="sng" algn="ctr">
+                      <a:solidFill>
+                        <a:srgbClr val="CADCFC"/>
+                      </a:solidFill>
+                      <a:prstDash val="solid"/>
+                      <a:round/>
+                      <a:headEnd type="none" w="med" len="med"/>
+                      <a:tailEnd type="none" w="med" len="med"/>
+                    </a:lnR>
+                    <a:lnT w="12700" cap="flat" cmpd="sng" algn="ctr">
+                      <a:solidFill>
+                        <a:srgbClr val="CADCFC"/>
+                      </a:solidFill>
+                      <a:prstDash val="solid"/>
+                      <a:round/>
+                      <a:headEnd type="none" w="med" len="med"/>
+                      <a:tailEnd type="none" w="med" len="med"/>
+                    </a:lnT>
+                    <a:lnB w="12700" cap="flat" cmpd="sng" algn="ctr">
+                      <a:solidFill>
+                        <a:srgbClr val="CADCFC"/>
+                      </a:solidFill>
+                      <a:prstDash val="solid"/>
+                      <a:round/>
+                      <a:headEnd type="none" w="med" len="med"/>
+                      <a:tailEnd type="none" w="med" len="med"/>
+                    </a:lnB>
+                    <a:solidFill>
+                      <a:srgbClr val="FFFFFF"/>
+                    </a:solidFill>
+                  </a:tcPr>
+                </a:tc>
+                <a:tc>
+                  <a:txBody>
+                    <a:bodyPr/>
+                    <a:lstStyle/>
+                    <a:p>
+                      <a:pPr algn="ctr" indent="0" marL="0">
+                        <a:buNone/>
+                      </a:pPr>
+                      <a:r>
+                        <a:rPr lang="en-US" sz="1250" b="1" dirty="0">
+                          <a:solidFill>
+                            <a:srgbClr val="2C8A4A"/>
+                          </a:solidFill>
+                        </a:rPr>
+                        <a:t>prouvé</a:t>
+                      </a:r>
+                      <a:endParaRPr lang="en-US" sz="1250" dirty="0"/>
+                    </a:p>
+                  </a:txBody>
+                  <a:tcPr marL="50800" marR="50800" marT="50800" marB="50800" anchor="ctr">
+                    <a:lnL w="12700" cap="flat" cmpd="sng" algn="ctr">
+                      <a:solidFill>
+                        <a:srgbClr val="CADCFC"/>
+                      </a:solidFill>
+                      <a:prstDash val="solid"/>
+                      <a:round/>
+                      <a:headEnd type="none" w="med" len="med"/>
+                      <a:tailEnd type="none" w="med" len="med"/>
+                    </a:lnL>
+                    <a:lnR w="12700" cap="flat" cmpd="sng" algn="ctr">
+                      <a:solidFill>
+                        <a:srgbClr val="CADCFC"/>
+                      </a:solidFill>
+                      <a:prstDash val="solid"/>
+                      <a:round/>
+                      <a:headEnd type="none" w="med" len="med"/>
+                      <a:tailEnd type="none" w="med" len="med"/>
+                    </a:lnR>
+                    <a:lnT w="12700" cap="flat" cmpd="sng" algn="ctr">
+                      <a:solidFill>
+                        <a:srgbClr val="CADCFC"/>
+                      </a:solidFill>
+                      <a:prstDash val="solid"/>
+                      <a:round/>
+                      <a:headEnd type="none" w="med" len="med"/>
+                      <a:tailEnd type="none" w="med" len="med"/>
+                    </a:lnT>
+                    <a:lnB w="12700" cap="flat" cmpd="sng" algn="ctr">
+                      <a:solidFill>
+                        <a:srgbClr val="CADCFC"/>
+                      </a:solidFill>
+                      <a:prstDash val="solid"/>
+                      <a:round/>
+                      <a:headEnd type="none" w="med" len="med"/>
+                      <a:tailEnd type="none" w="med" len="med"/>
+                    </a:lnB>
+                    <a:solidFill>
+                      <a:srgbClr val="FFFFFF"/>
+                    </a:solidFill>
+                  </a:tcPr>
+                </a:tc>
+                <a:tc>
+                  <a:txBody>
+                    <a:bodyPr/>
+                    <a:lstStyle/>
+                    <a:p>
+                      <a:pPr algn="ctr" indent="0" marL="0">
+                        <a:buNone/>
+                      </a:pPr>
+                      <a:r>
+                        <a:rPr lang="en-US" sz="1250" b="1" dirty="0">
+                          <a:solidFill>
+                            <a:srgbClr val="C0392B"/>
+                          </a:solidFill>
+                        </a:rPr>
+                        <a:t>violé</a:t>
+                      </a:r>
+                      <a:endParaRPr lang="en-US" sz="1250" dirty="0"/>
+                    </a:p>
+                  </a:txBody>
+                  <a:tcPr marL="50800" marR="50800" marT="50800" marB="50800" anchor="ctr">
+                    <a:lnL w="12700" cap="flat" cmpd="sng" algn="ctr">
+                      <a:solidFill>
+                        <a:srgbClr val="CADCFC"/>
+                      </a:solidFill>
+                      <a:prstDash val="solid"/>
+                      <a:round/>
+                      <a:headEnd type="none" w="med" len="med"/>
+                      <a:tailEnd type="none" w="med" len="med"/>
+                    </a:lnL>
+                    <a:lnR w="12700" cap="flat" cmpd="sng" algn="ctr">
+                      <a:solidFill>
+                        <a:srgbClr val="CADCFC"/>
+                      </a:solidFill>
+                      <a:prstDash val="solid"/>
+                      <a:round/>
+                      <a:headEnd type="none" w="med" len="med"/>
+                      <a:tailEnd type="none" w="med" len="med"/>
+                    </a:lnR>
+                    <a:lnT w="12700" cap="flat" cmpd="sng" algn="ctr">
+                      <a:solidFill>
+                        <a:srgbClr val="CADCFC"/>
+                      </a:solidFill>
+                      <a:prstDash val="solid"/>
+                      <a:round/>
+                      <a:headEnd type="none" w="med" len="med"/>
+                      <a:tailEnd type="none" w="med" len="med"/>
+                    </a:lnT>
+                    <a:lnB w="12700" cap="flat" cmpd="sng" algn="ctr">
+                      <a:solidFill>
+                        <a:srgbClr val="CADCFC"/>
+                      </a:solidFill>
+                      <a:prstDash val="solid"/>
+                      <a:round/>
+                      <a:headEnd type="none" w="med" len="med"/>
+                      <a:tailEnd type="none" w="med" len="med"/>
+                    </a:lnB>
+                    <a:solidFill>
+                      <a:srgbClr val="FFFFFF"/>
+                    </a:solidFill>
+                  </a:tcPr>
+                </a:tc>
+                <a:tc>
+                  <a:txBody>
+                    <a:bodyPr/>
+                    <a:lstStyle/>
+                    <a:p>
+                      <a:pPr algn="ctr" indent="0" marL="0">
+                        <a:buNone/>
+                      </a:pPr>
+                      <a:r>
+                        <a:rPr lang="en-US" sz="1250" b="1" dirty="0">
+                          <a:solidFill>
+                            <a:srgbClr val="2C8A4A"/>
+                          </a:solidFill>
+                        </a:rPr>
+                        <a:t>prouvé</a:t>
+                      </a:r>
+                      <a:endParaRPr lang="en-US" sz="1250" dirty="0"/>
+                    </a:p>
+                  </a:txBody>
+                  <a:tcPr marL="50800" marR="50800" marT="50800" marB="50800" anchor="ctr">
+                    <a:lnL w="12700" cap="flat" cmpd="sng" algn="ctr">
+                      <a:solidFill>
+                        <a:srgbClr val="CADCFC"/>
+                      </a:solidFill>
+                      <a:prstDash val="solid"/>
+                      <a:round/>
+                      <a:headEnd type="none" w="med" len="med"/>
+                      <a:tailEnd type="none" w="med" len="med"/>
+                    </a:lnL>
+                    <a:lnR w="12700" cap="flat" cmpd="sng" algn="ctr">
+                      <a:solidFill>
+                        <a:srgbClr val="CADCFC"/>
+                      </a:solidFill>
+                      <a:prstDash val="solid"/>
+                      <a:round/>
+                      <a:headEnd type="none" w="med" len="med"/>
+                      <a:tailEnd type="none" w="med" len="med"/>
+                    </a:lnR>
+                    <a:lnT w="12700" cap="flat" cmpd="sng" algn="ctr">
+                      <a:solidFill>
+                        <a:srgbClr val="CADCFC"/>
+                      </a:solidFill>
+                      <a:prstDash val="solid"/>
+                      <a:round/>
+                      <a:headEnd type="none" w="med" len="med"/>
+                      <a:tailEnd type="none" w="med" len="med"/>
+                    </a:lnT>
+                    <a:lnB w="12700" cap="flat" cmpd="sng" algn="ctr">
+                      <a:solidFill>
+                        <a:srgbClr val="CADCFC"/>
+                      </a:solidFill>
+                      <a:prstDash val="solid"/>
+                      <a:round/>
+                      <a:headEnd type="none" w="med" len="med"/>
+                      <a:tailEnd type="none" w="med" len="med"/>
+                    </a:lnB>
+                    <a:solidFill>
+                      <a:srgbClr val="FFFFFF"/>
+                    </a:solidFill>
+                  </a:tcPr>
+                </a:tc>
+              </a:tr>
+              <a:tr h="402336">
+                <a:tc>
+                  <a:txBody>
+                    <a:bodyPr/>
+                    <a:lstStyle/>
+                    <a:p>
+                      <a:pPr algn="l" indent="0" marL="0">
+                        <a:buNone/>
+                      </a:pPr>
+                      <a:r>
+                        <a:rPr lang="en-US" sz="1250" b="1" dirty="0">
+                          <a:solidFill>
+                            <a:srgbClr val="1E2761"/>
+                          </a:solidFill>
+                        </a:rPr>
+                        <a:t>Additivité</a:t>
+                      </a:r>
+                      <a:endParaRPr lang="en-US" sz="1250" dirty="0"/>
+                    </a:p>
+                  </a:txBody>
+                  <a:tcPr marL="50800" marR="50800" marT="50800" marB="50800" anchor="ctr">
+                    <a:lnL w="12700" cap="flat" cmpd="sng" algn="ctr">
+                      <a:solidFill>
+                        <a:srgbClr val="CADCFC"/>
+                      </a:solidFill>
+                      <a:prstDash val="solid"/>
+                      <a:round/>
+                      <a:headEnd type="none" w="med" len="med"/>
+                      <a:tailEnd type="none" w="med" len="med"/>
+                    </a:lnL>
+                    <a:lnR w="12700" cap="flat" cmpd="sng" algn="ctr">
+                      <a:solidFill>
+                        <a:srgbClr val="CADCFC"/>
+                      </a:solidFill>
+                      <a:prstDash val="solid"/>
+                      <a:round/>
+                      <a:headEnd type="none" w="med" len="med"/>
+                      <a:tailEnd type="none" w="med" len="med"/>
+                    </a:lnR>
+                    <a:lnT w="12700" cap="flat" cmpd="sng" algn="ctr">
+                      <a:solidFill>
+                        <a:srgbClr val="CADCFC"/>
+                      </a:solidFill>
+                      <a:prstDash val="solid"/>
+                      <a:round/>
+                      <a:headEnd type="none" w="med" len="med"/>
+                      <a:tailEnd type="none" w="med" len="med"/>
+                    </a:lnT>
+                    <a:lnB w="12700" cap="flat" cmpd="sng" algn="ctr">
+                      <a:solidFill>
+                        <a:srgbClr val="CADCFC"/>
+                      </a:solidFill>
+                      <a:prstDash val="solid"/>
+                      <a:round/>
+                      <a:headEnd type="none" w="med" len="med"/>
+                      <a:tailEnd type="none" w="med" len="med"/>
+                    </a:lnB>
+                    <a:solidFill>
+                      <a:srgbClr val="FFFFFF"/>
+                    </a:solidFill>
+                  </a:tcPr>
+                </a:tc>
+                <a:tc>
+                  <a:txBody>
+                    <a:bodyPr/>
+                    <a:lstStyle/>
+                    <a:p>
+                      <a:pPr algn="ctr" indent="0" marL="0">
+                        <a:buNone/>
+                      </a:pPr>
+                      <a:r>
+                        <a:rPr lang="en-US" sz="1250" b="1" dirty="0">
+                          <a:solidFill>
+                            <a:srgbClr val="2C8A4A"/>
+                          </a:solidFill>
+                        </a:rPr>
+                        <a:t>prouvé</a:t>
+                      </a:r>
+                      <a:endParaRPr lang="en-US" sz="1250" dirty="0"/>
+                    </a:p>
+                  </a:txBody>
+                  <a:tcPr marL="50800" marR="50800" marT="50800" marB="50800" anchor="ctr">
+                    <a:lnL w="12700" cap="flat" cmpd="sng" algn="ctr">
+                      <a:solidFill>
+                        <a:srgbClr val="CADCFC"/>
+                      </a:solidFill>
+                      <a:prstDash val="solid"/>
+                      <a:round/>
+                      <a:headEnd type="none" w="med" len="med"/>
+                      <a:tailEnd type="none" w="med" len="med"/>
+                    </a:lnL>
+                    <a:lnR w="12700" cap="flat" cmpd="sng" algn="ctr">
+                      <a:solidFill>
+                        <a:srgbClr val="CADCFC"/>
+                      </a:solidFill>
+                      <a:prstDash val="solid"/>
+                      <a:round/>
+                      <a:headEnd type="none" w="med" len="med"/>
+                      <a:tailEnd type="none" w="med" len="med"/>
+                    </a:lnR>
+                    <a:lnT w="12700" cap="flat" cmpd="sng" algn="ctr">
+                      <a:solidFill>
+                        <a:srgbClr val="CADCFC"/>
+                      </a:solidFill>
+                      <a:prstDash val="solid"/>
+                      <a:round/>
+                      <a:headEnd type="none" w="med" len="med"/>
+                      <a:tailEnd type="none" w="med" len="med"/>
+                    </a:lnT>
+                    <a:lnB w="12700" cap="flat" cmpd="sng" algn="ctr">
+                      <a:solidFill>
+                        <a:srgbClr val="CADCFC"/>
+                      </a:solidFill>
+                      <a:prstDash val="solid"/>
+                      <a:round/>
+                      <a:headEnd type="none" w="med" len="med"/>
+                      <a:tailEnd type="none" w="med" len="med"/>
+                    </a:lnB>
+                    <a:solidFill>
+                      <a:srgbClr val="FFFFFF"/>
+                    </a:solidFill>
+                  </a:tcPr>
+                </a:tc>
+                <a:tc>
+                  <a:txBody>
+                    <a:bodyPr/>
+                    <a:lstStyle/>
+                    <a:p>
+                      <a:pPr algn="ctr" indent="0" marL="0">
+                        <a:buNone/>
+                      </a:pPr>
+                      <a:r>
+                        <a:rPr lang="en-US" sz="1250" b="1" dirty="0">
+                          <a:solidFill>
+                            <a:srgbClr val="C0392B"/>
+                          </a:solidFill>
+                        </a:rPr>
+                        <a:t>violé</a:t>
+                      </a:r>
+                      <a:endParaRPr lang="en-US" sz="1250" dirty="0"/>
+                    </a:p>
+                  </a:txBody>
+                  <a:tcPr marL="50800" marR="50800" marT="50800" marB="50800" anchor="ctr">
+                    <a:lnL w="12700" cap="flat" cmpd="sng" algn="ctr">
+                      <a:solidFill>
+                        <a:srgbClr val="CADCFC"/>
+                      </a:solidFill>
+                      <a:prstDash val="solid"/>
+                      <a:round/>
+                      <a:headEnd type="none" w="med" len="med"/>
+                      <a:tailEnd type="none" w="med" len="med"/>
+                    </a:lnL>
+                    <a:lnR w="12700" cap="flat" cmpd="sng" algn="ctr">
+                      <a:solidFill>
+                        <a:srgbClr val="CADCFC"/>
+                      </a:solidFill>
+                      <a:prstDash val="solid"/>
+                      <a:round/>
+                      <a:headEnd type="none" w="med" len="med"/>
+                      <a:tailEnd type="none" w="med" len="med"/>
+                    </a:lnR>
+                    <a:lnT w="12700" cap="flat" cmpd="sng" algn="ctr">
+                      <a:solidFill>
+                        <a:srgbClr val="CADCFC"/>
+                      </a:solidFill>
+                      <a:prstDash val="solid"/>
+                      <a:round/>
+                      <a:headEnd type="none" w="med" len="med"/>
+                      <a:tailEnd type="none" w="med" len="med"/>
+                    </a:lnT>
+                    <a:lnB w="12700" cap="flat" cmpd="sng" algn="ctr">
+                      <a:solidFill>
+                        <a:srgbClr val="CADCFC"/>
+                      </a:solidFill>
+                      <a:prstDash val="solid"/>
+                      <a:round/>
+                      <a:headEnd type="none" w="med" len="med"/>
+                      <a:tailEnd type="none" w="med" len="med"/>
+                    </a:lnB>
+                    <a:solidFill>
+                      <a:srgbClr val="FFFFFF"/>
+                    </a:solidFill>
+                  </a:tcPr>
+                </a:tc>
+                <a:tc>
+                  <a:txBody>
+                    <a:bodyPr/>
+                    <a:lstStyle/>
+                    <a:p>
+                      <a:pPr algn="ctr" indent="0" marL="0">
+                        <a:buNone/>
+                      </a:pPr>
+                      <a:r>
+                        <a:rPr lang="en-US" sz="1250" b="1" dirty="0">
+                          <a:solidFill>
+                            <a:srgbClr val="5B6478"/>
+                          </a:solidFill>
+                        </a:rPr>
+                        <a:t>non défini</a:t>
+                      </a:r>
+                      <a:endParaRPr lang="en-US" sz="1250" dirty="0"/>
+                    </a:p>
+                  </a:txBody>
+                  <a:tcPr marL="50800" marR="50800" marT="50800" marB="50800" anchor="ctr">
+                    <a:lnL w="12700" cap="flat" cmpd="sng" algn="ctr">
+                      <a:solidFill>
+                        <a:srgbClr val="CADCFC"/>
+                      </a:solidFill>
+                      <a:prstDash val="solid"/>
+                      <a:round/>
+                      <a:headEnd type="none" w="med" len="med"/>
+                      <a:tailEnd type="none" w="med" len="med"/>
+                    </a:lnL>
+                    <a:lnR w="12700" cap="flat" cmpd="sng" algn="ctr">
+                      <a:solidFill>
+                        <a:srgbClr val="CADCFC"/>
+                      </a:solidFill>
+                      <a:prstDash val="solid"/>
+                      <a:round/>
+                      <a:headEnd type="none" w="med" len="med"/>
+                      <a:tailEnd type="none" w="med" len="med"/>
+                    </a:lnR>
+                    <a:lnT w="12700" cap="flat" cmpd="sng" algn="ctr">
+                      <a:solidFill>
+                        <a:srgbClr val="CADCFC"/>
+                      </a:solidFill>
+                      <a:prstDash val="solid"/>
+                      <a:round/>
+                      <a:headEnd type="none" w="med" len="med"/>
+                      <a:tailEnd type="none" w="med" len="med"/>
+                    </a:lnT>
+                    <a:lnB w="12700" cap="flat" cmpd="sng" algn="ctr">
+                      <a:solidFill>
+                        <a:srgbClr val="CADCFC"/>
+                      </a:solidFill>
+                      <a:prstDash val="solid"/>
+                      <a:round/>
+                      <a:headEnd type="none" w="med" len="med"/>
+                      <a:tailEnd type="none" w="med" len="med"/>
+                    </a:lnB>
+                    <a:solidFill>
+                      <a:srgbClr val="FFFFFF"/>
+                    </a:solidFill>
+                  </a:tcPr>
+                </a:tc>
+              </a:tr>
+            </a:tbl>
+          </a:graphicData>
+        </a:graphic>
+      </p:graphicFrame>
+      <p:sp>
+        <p:nvSpPr>
+          <p:cNvPr id="6" name="Text 3"/>
+          <p:cNvSpPr/>
+          <p:nvPr/>
+        </p:nvSpPr>
+        <p:spPr>
+          <a:xfrm>
+            <a:off x="731520" y="4572000"/>
+            <a:ext cx="10698480" cy="914400"/>
+          </a:xfrm>
+          <a:prstGeom prst="rect">
+            <a:avLst/>
+          </a:prstGeom>
+          <a:noFill/>
+          <a:ln/>
+        </p:spPr>
+        <p:txBody>
+          <a:bodyPr wrap="square" lIns="0" tIns="0" rIns="0" bIns="0" rtlCol="0" anchor="t"/>
           <a:lstStyle/>
           <a:p>
             <a:pPr indent="0" marL="0">
               <a:buNone/>
             </a:pPr>
             <a:r>
-              <a:rPr lang="en-US" sz="1700" b="1" dirty="0">
-                <a:solidFill>
-                  <a:srgbClr val="F2A900"/>
-                </a:solidFill>
-                <a:latin typeface="Georgia" pitchFamily="34" charset="0"/>
-                <a:ea typeface="Georgia" pitchFamily="34" charset="-122"/>
-                <a:cs typeface="Georgia" pitchFamily="34" charset="-120"/>
-              </a:rPr>
-              <a:t>Garantie de correction</a:t>
-            </a:r>
-            <a:endParaRPr lang="en-US" sz="1700" dirty="0"/>
-          </a:p>
-        </p:txBody>
-      </p:sp>
-      <p:sp>
-        <p:nvSpPr>
-          <p:cNvPr id="7" name="Text 5"/>
-          <p:cNvSpPr/>
-          <p:nvPr/>
-        </p:nvSpPr>
-        <p:spPr>
-          <a:xfrm>
-            <a:off x="7818120" y="2286000"/>
-            <a:ext cx="3383280" cy="1920240"/>
-          </a:xfrm>
-          <a:prstGeom prst="rect">
-            <a:avLst/>
-          </a:prstGeom>
-          <a:noFill/>
-          <a:ln/>
-        </p:spPr>
-        <p:txBody>
-          <a:bodyPr wrap="square" lIns="0" tIns="0" rIns="0" bIns="0" rtlCol="0" anchor="t"/>
-          <a:lstStyle/>
-          <a:p>
-            <a:pPr indent="0" marL="0">
-              <a:spcAft>
-                <a:spcPts val="600"/>
-              </a:spcAft>
-              <a:buNone/>
-            </a:pPr>
-            <a:r>
-              <a:rPr lang="en-US" sz="1400" dirty="0">
-                <a:solidFill>
-                  <a:srgbClr val="CADCFC"/>
-                </a:solidFill>
-              </a:rPr>
-              <a:t>Deux voies indépendantes :</a:t>
-            </a:r>
-            <a:endParaRPr lang="en-US" sz="1400" dirty="0"/>
-          </a:p>
-          <a:p>
-            <a:pPr marL="342900" indent="-342900">
-              <a:buSzPct val="100000"/>
-              <a:buChar char="•"/>
-            </a:pPr>
-            <a:r>
-              <a:rPr lang="en-US" sz="1400" dirty="0">
-                <a:solidFill>
-                  <a:srgbClr val="FFFFFF"/>
-                </a:solidFill>
-              </a:rPr>
-              <a:t>énumération combinatoire (Python)</a:t>
-            </a:r>
-            <a:endParaRPr lang="en-US" sz="1400" dirty="0"/>
-          </a:p>
-          <a:p>
-            <a:pPr marL="342900" indent="-342900">
-              <a:spcAft>
-                <a:spcPts val="800"/>
-              </a:spcAft>
-              <a:buSzPct val="100000"/>
-              <a:buChar char="•"/>
-            </a:pPr>
-            <a:r>
-              <a:rPr lang="en-US" sz="1400" dirty="0">
-                <a:solidFill>
-                  <a:srgbClr val="FFFFFF"/>
-                </a:solidFill>
-              </a:rPr>
-              <a:t>encodage symbolique (Z3)</a:t>
-            </a:r>
-            <a:endParaRPr lang="en-US" sz="1400" dirty="0"/>
-          </a:p>
-          <a:p>
-            <a:pPr indent="0" marL="0">
-              <a:buNone/>
-            </a:pPr>
-            <a:r>
-              <a:rPr lang="en-US" sz="1300" i="1" dirty="0">
-                <a:solidFill>
-                  <a:srgbClr val="CADCFC"/>
-                </a:solidFill>
-              </a:rPr>
-              <a:t>Concordance systématique vérifiée par les tests : même statut, mêmes swings, mêmes coalitions minimales.</a:t>
-            </a:r>
-            <a:endParaRPr lang="en-US" sz="1400" dirty="0"/>
-          </a:p>
-        </p:txBody>
-      </p:sp>
-      <p:sp>
-        <p:nvSpPr>
-          <p:cNvPr id="8" name="Text 6"/>
-          <p:cNvSpPr/>
-          <p:nvPr/>
-        </p:nvSpPr>
-        <p:spPr>
-          <a:xfrm>
-            <a:off x="731520" y="5212080"/>
-            <a:ext cx="10698480" cy="457200"/>
-          </a:xfrm>
-          <a:prstGeom prst="rect">
-            <a:avLst/>
-          </a:prstGeom>
-          <a:noFill/>
-          <a:ln/>
-        </p:spPr>
-        <p:txBody>
-          <a:bodyPr wrap="square" lIns="0" tIns="0" rIns="0" bIns="0" rtlCol="0" anchor="ctr"/>
-          <a:lstStyle/>
-          <a:p>
-            <a:pPr indent="0" marL="0">
-              <a:buNone/>
-            </a:pPr>
-            <a:r>
-              <a:rPr lang="en-US" sz="1300" i="1" dirty="0">
+              <a:rPr lang="en-US" sz="1250" i="1" dirty="0">
                 <a:solidFill>
                   <a:srgbClr val="5B6478"/>
                 </a:solidFill>
               </a:rPr>
-              <a:t>À ces tailles, Z3 sert d'oracle de validation croisée plutôt que d'accélérateur.</a:t>
-            </a:r>
-            <a:endParaRPr lang="en-US" sz="1300" dirty="0"/>
-          </a:p>
-        </p:txBody>
-      </p:sp>
-      <p:sp>
-        <p:nvSpPr>
-          <p:cNvPr id="9" name="Text 7"/>
+              <a:t>Lecture : l'efficacité est violée par le Banzhaf brut (somme 0,75 sur [3 ; 1, 1, 1]) ; l'additivité l'est par le normalisé, le brut étant additif. Aucune variante ne concilie les deux, seul Shapley-Shubik y parvient. Preuve bornée par n, à la manière de Tang et Lin (2009).</a:t>
+            </a:r>
+            <a:endParaRPr lang="en-US" sz="1250" dirty="0"/>
+          </a:p>
+        </p:txBody>
+      </p:sp>
+      <p:sp>
+        <p:nvSpPr>
+          <p:cNvPr id="7" name="Text 4"/>
           <p:cNvSpPr/>
           <p:nvPr/>
         </p:nvSpPr>
@@ -9320,7 +8578,7 @@
       </p:sp>
       <p:sp>
         <p:nvSpPr>
-          <p:cNvPr id="10" name="Text 8"/>
+          <p:cNvPr id="8" name="Text 5"/>
           <p:cNvSpPr/>
           <p:nvPr/>
         </p:nvSpPr>
@@ -9348,7 +8606,7 @@
                   <a:srgbClr val="5B6478"/>
                 </a:solidFill>
               </a:rPr>
-              <a:t>6 / 15</a:t>
+              <a:t>6 / 13</a:t>
             </a:r>
             <a:endParaRPr lang="en-US" sz="900" dirty="0"/>
           </a:p>
@@ -9439,74 +8697,53 @@
                 <a:ea typeface="Georgia" pitchFamily="34" charset="-122"/>
                 <a:cs typeface="Georgia" pitchFamily="34" charset="-120"/>
               </a:rPr>
-              <a:t>Volet symbolique 2 : preuve des axiomes par Z3</a:t>
+              <a:t>Application : Assemblée nationale 2024</a:t>
             </a:r>
             <a:endParaRPr lang="en-US" sz="2700" dirty="0"/>
           </a:p>
         </p:txBody>
       </p:sp>
-      <p:sp>
-        <p:nvSpPr>
-          <p:cNvPr id="4" name="Text 2"/>
-          <p:cNvSpPr/>
-          <p:nvPr/>
-        </p:nvSpPr>
-        <p:spPr>
-          <a:xfrm>
-            <a:off x="731520" y="1325880"/>
-            <a:ext cx="10698480" cy="914400"/>
-          </a:xfrm>
-          <a:prstGeom prst="rect">
-            <a:avLst/>
-          </a:prstGeom>
-          <a:noFill/>
-          <a:ln/>
-        </p:spPr>
-        <p:txBody>
-          <a:bodyPr wrap="square" lIns="0" tIns="0" rIns="0" bIns="0" rtlCol="0" anchor="ctr"/>
-          <a:lstStyle/>
-          <a:p>
-            <a:pPr indent="0" marL="0">
-              <a:lnSpc>
-                <a:spcPct val="115000"/>
-              </a:lnSpc>
-              <a:buNone/>
-            </a:pPr>
-            <a:r>
-              <a:rPr lang="en-US" sz="1500" dirty="0">
-                <a:solidFill>
-                  <a:srgbClr val="333333"/>
-                </a:solidFill>
-              </a:rPr>
-              <a:t>Les axiomes des trois indices sont prouvés par Z3. Pour n joueurs fixé, les valeurs des coalitions deviennent des variables Z3 ; chaque axiome est prouvé en montrant que sa négation est insatisfaisable (UNSAT).</a:t>
-            </a:r>
-            <a:endParaRPr lang="en-US" sz="1500" dirty="0"/>
-          </a:p>
-        </p:txBody>
-      </p:sp>
-      <p:sp>
-        <p:nvSpPr>
-          <p:cNvPr id="5" name="Shape 3"/>
-          <p:cNvSpPr/>
-          <p:nvPr/>
-        </p:nvSpPr>
-        <p:spPr>
-          <a:xfrm>
-            <a:off x="731520" y="2423160"/>
-            <a:ext cx="5212080" cy="1143000"/>
+      <p:pic>
+        <p:nvPicPr>
+          <p:cNvPr id="4" name="Image 0" descr="/private/tmp/claude-501/-Users-iliaskalalou-EPITA-IA-symbolic/41e9eafa-8b36-4a62-b3f1-971646836a16/scratchpad/slides_t1/power_2024.png">    </p:cNvPr>
+          <p:cNvPicPr>
+            <a:picLocks noChangeAspect="1"/>
+          </p:cNvPicPr>
+          <p:nvPr/>
+        </p:nvPicPr>
+        <p:blipFill>
+          <a:blip r:embed="rId1"/>
+          <a:srcRect l="0" r="0" t="0" b="0"/>
+          <a:stretch/>
+        </p:blipFill>
+        <p:spPr>
+          <a:xfrm>
+            <a:off x="640080" y="1325880"/>
+            <a:ext cx="7315200" cy="4206240"/>
+          </a:xfrm>
+          <a:prstGeom prst="rect">
+            <a:avLst/>
+          </a:prstGeom>
+        </p:spPr>
+      </p:pic>
+      <p:sp>
+        <p:nvSpPr>
+          <p:cNvPr id="5" name="Shape 2"/>
+          <p:cNvSpPr/>
+          <p:nvPr/>
+        </p:nvSpPr>
+        <p:spPr>
+          <a:xfrm>
+            <a:off x="8183880" y="1554480"/>
+            <a:ext cx="3291840" cy="3657600"/>
           </a:xfrm>
           <a:prstGeom prst="rect">
             <a:avLst/>
           </a:prstGeom>
           <a:solidFill>
-            <a:srgbClr val="FFFFFF"/>
+            <a:srgbClr val="1E2761"/>
           </a:solidFill>
-          <a:ln w="19050">
-            <a:solidFill>
-              <a:srgbClr val="CADCFC"/>
-            </a:solidFill>
-            <a:prstDash val="solid"/>
-          </a:ln>
+          <a:ln/>
           <a:effectLst>
             <a:outerShdw sx="100000" sy="100000" kx="0" ky="0" algn="bl" rotWithShape="0" blurRad="88900" dist="38100" dir="8100000">
               <a:srgbClr val="000000">
@@ -9518,72 +8755,14 @@
       </p:sp>
       <p:sp>
         <p:nvSpPr>
-          <p:cNvPr id="6" name="Shape 4"/>
-          <p:cNvSpPr/>
-          <p:nvPr/>
-        </p:nvSpPr>
-        <p:spPr>
-          <a:xfrm>
-            <a:off x="731520" y="2423160"/>
-            <a:ext cx="109728" cy="1143000"/>
-          </a:xfrm>
-          <a:prstGeom prst="rect">
-            <a:avLst/>
-          </a:prstGeom>
-          <a:solidFill>
-            <a:srgbClr val="2C8A4A"/>
-          </a:solidFill>
-          <a:ln/>
-        </p:spPr>
-      </p:sp>
-      <p:sp>
-        <p:nvSpPr>
-          <p:cNvPr id="7" name="Text 5"/>
-          <p:cNvSpPr/>
-          <p:nvPr/>
-        </p:nvSpPr>
-        <p:spPr>
-          <a:xfrm>
-            <a:off x="4709160" y="2587752"/>
-            <a:ext cx="1097280" cy="320040"/>
-          </a:xfrm>
-          <a:prstGeom prst="rect">
-            <a:avLst/>
-          </a:prstGeom>
-          <a:solidFill>
-            <a:srgbClr val="2C8A4A"/>
-          </a:solidFill>
-          <a:ln/>
-        </p:spPr>
-        <p:txBody>
-          <a:bodyPr wrap="square" lIns="0" tIns="0" rIns="0" bIns="0" rtlCol="0" anchor="ctr"/>
-          <a:lstStyle/>
-          <a:p>
-            <a:pPr algn="ctr" indent="0" marL="0">
-              <a:buNone/>
-            </a:pPr>
-            <a:r>
-              <a:rPr lang="en-US" sz="1100" b="1" dirty="0">
-                <a:solidFill>
-                  <a:srgbClr val="FFFFFF"/>
-                </a:solidFill>
-              </a:rPr>
-              <a:t>PROUVÉ</a:t>
-            </a:r>
-            <a:endParaRPr lang="en-US" sz="1100" dirty="0"/>
-          </a:p>
-        </p:txBody>
-      </p:sp>
-      <p:sp>
-        <p:nvSpPr>
-          <p:cNvPr id="8" name="Text 6"/>
-          <p:cNvSpPr/>
-          <p:nvPr/>
-        </p:nvSpPr>
-        <p:spPr>
-          <a:xfrm>
-            <a:off x="1005840" y="2560320"/>
-            <a:ext cx="3657600" cy="365760"/>
+          <p:cNvPr id="6" name="Text 3"/>
+          <p:cNvSpPr/>
+          <p:nvPr/>
+        </p:nvSpPr>
+        <p:spPr>
+          <a:xfrm>
+            <a:off x="8412480" y="1783080"/>
+            <a:ext cx="2834640" cy="411480"/>
           </a:xfrm>
           <a:prstGeom prst="rect">
             <a:avLst/>
@@ -9599,30 +8778,30 @@
               <a:buNone/>
             </a:pPr>
             <a:r>
-              <a:rPr lang="en-US" sz="1700" b="1" dirty="0">
-                <a:solidFill>
-                  <a:srgbClr val="1E2761"/>
+              <a:rPr lang="en-US" sz="1800" b="1" dirty="0">
+                <a:solidFill>
+                  <a:srgbClr val="F2A900"/>
                 </a:solidFill>
                 <a:latin typeface="Georgia" pitchFamily="34" charset="0"/>
                 <a:ea typeface="Georgia" pitchFamily="34" charset="-122"/>
                 <a:cs typeface="Georgia" pitchFamily="34" charset="-120"/>
               </a:rPr>
-              <a:t>Efficacité</a:t>
-            </a:r>
-            <a:endParaRPr lang="en-US" sz="1700" dirty="0"/>
-          </a:p>
-        </p:txBody>
-      </p:sp>
-      <p:sp>
-        <p:nvSpPr>
-          <p:cNvPr id="9" name="Text 7"/>
-          <p:cNvSpPr/>
-          <p:nvPr/>
-        </p:nvSpPr>
-        <p:spPr>
-          <a:xfrm>
-            <a:off x="1005840" y="2953512"/>
-            <a:ext cx="4663440" cy="548640"/>
+              <a:t>Lecture</a:t>
+            </a:r>
+            <a:endParaRPr lang="en-US" sz="1800" dirty="0"/>
+          </a:p>
+        </p:txBody>
+      </p:sp>
+      <p:sp>
+        <p:nvSpPr>
+          <p:cNvPr id="7" name="Text 4"/>
+          <p:cNvSpPr/>
+          <p:nvPr/>
+        </p:nvSpPr>
+        <p:spPr>
+          <a:xfrm>
+            <a:off x="8412480" y="2286000"/>
+            <a:ext cx="2834640" cy="2743200"/>
           </a:xfrm>
           <a:prstGeom prst="rect">
             <a:avLst/>
@@ -9634,555 +8813,61 @@
           <a:bodyPr wrap="square" lIns="0" tIns="0" rIns="0" bIns="0" rtlCol="0" anchor="t"/>
           <a:lstStyle/>
           <a:p>
-            <a:pPr indent="0" marL="0">
-              <a:buNone/>
-            </a:pPr>
-            <a:r>
-              <a:rPr lang="en-US" sz="1250" dirty="0">
-                <a:solidFill>
-                  <a:srgbClr val="333333"/>
-                </a:solidFill>
-              </a:rPr>
-              <a:t>La somme des pouvoirs égale la valeur de la grande coalition.</a:t>
-            </a:r>
-            <a:endParaRPr lang="en-US" sz="1250" dirty="0"/>
-          </a:p>
-        </p:txBody>
-      </p:sp>
-      <p:sp>
-        <p:nvSpPr>
-          <p:cNvPr id="10" name="Shape 8"/>
-          <p:cNvSpPr/>
-          <p:nvPr/>
-        </p:nvSpPr>
-        <p:spPr>
-          <a:xfrm>
-            <a:off x="6217920" y="2423160"/>
-            <a:ext cx="5212080" cy="1143000"/>
-          </a:xfrm>
-          <a:prstGeom prst="rect">
-            <a:avLst/>
-          </a:prstGeom>
-          <a:solidFill>
-            <a:srgbClr val="FFFFFF"/>
-          </a:solidFill>
-          <a:ln w="19050">
-            <a:solidFill>
-              <a:srgbClr val="CADCFC"/>
-            </a:solidFill>
-            <a:prstDash val="solid"/>
-          </a:ln>
-          <a:effectLst>
-            <a:outerShdw sx="100000" sy="100000" kx="0" ky="0" algn="bl" rotWithShape="0" blurRad="88900" dist="38100" dir="8100000">
-              <a:srgbClr val="000000">
-                <a:alpha val="12000"/>
-              </a:srgbClr>
-            </a:outerShdw>
-          </a:effectLst>
-        </p:spPr>
-      </p:sp>
-      <p:sp>
-        <p:nvSpPr>
-          <p:cNvPr id="11" name="Shape 9"/>
-          <p:cNvSpPr/>
-          <p:nvPr/>
-        </p:nvSpPr>
-        <p:spPr>
-          <a:xfrm>
-            <a:off x="6217920" y="2423160"/>
-            <a:ext cx="109728" cy="1143000"/>
-          </a:xfrm>
-          <a:prstGeom prst="rect">
-            <a:avLst/>
-          </a:prstGeom>
-          <a:solidFill>
-            <a:srgbClr val="2C8A4A"/>
-          </a:solidFill>
-          <a:ln/>
-        </p:spPr>
-      </p:sp>
-      <p:sp>
-        <p:nvSpPr>
-          <p:cNvPr id="12" name="Text 10"/>
-          <p:cNvSpPr/>
-          <p:nvPr/>
-        </p:nvSpPr>
-        <p:spPr>
-          <a:xfrm>
-            <a:off x="10195560" y="2587752"/>
-            <a:ext cx="1097280" cy="320040"/>
-          </a:xfrm>
-          <a:prstGeom prst="rect">
-            <a:avLst/>
-          </a:prstGeom>
-          <a:solidFill>
-            <a:srgbClr val="2C8A4A"/>
-          </a:solidFill>
-          <a:ln/>
-        </p:spPr>
-        <p:txBody>
-          <a:bodyPr wrap="square" lIns="0" tIns="0" rIns="0" bIns="0" rtlCol="0" anchor="ctr"/>
-          <a:lstStyle/>
-          <a:p>
-            <a:pPr algn="ctr" indent="0" marL="0">
-              <a:buNone/>
-            </a:pPr>
-            <a:r>
-              <a:rPr lang="en-US" sz="1100" b="1" dirty="0">
+            <a:pPr marL="342900" indent="-342900">
+              <a:spcAft>
+                <a:spcPts val="800"/>
+              </a:spcAft>
+              <a:buSzPct val="100000"/>
+              <a:buChar char="•"/>
+            </a:pPr>
+            <a:r>
+              <a:rPr lang="en-US" sz="1350" dirty="0">
                 <a:solidFill>
                   <a:srgbClr val="FFFFFF"/>
                 </a:solidFill>
               </a:rPr>
-              <a:t>PROUVÉ</a:t>
-            </a:r>
-            <a:endParaRPr lang="en-US" sz="1100" dirty="0"/>
-          </a:p>
-        </p:txBody>
-      </p:sp>
-      <p:sp>
-        <p:nvSpPr>
-          <p:cNvPr id="13" name="Text 11"/>
-          <p:cNvSpPr/>
-          <p:nvPr/>
-        </p:nvSpPr>
-        <p:spPr>
-          <a:xfrm>
-            <a:off x="6492240" y="2560320"/>
-            <a:ext cx="3657600" cy="365760"/>
-          </a:xfrm>
-          <a:prstGeom prst="rect">
-            <a:avLst/>
-          </a:prstGeom>
-          <a:noFill/>
-          <a:ln/>
-        </p:spPr>
-        <p:txBody>
-          <a:bodyPr wrap="square" lIns="0" tIns="0" rIns="0" bIns="0" rtlCol="0" anchor="ctr"/>
-          <a:lstStyle/>
-          <a:p>
-            <a:pPr indent="0" marL="0">
-              <a:buNone/>
-            </a:pPr>
-            <a:r>
-              <a:rPr lang="en-US" sz="1700" b="1" dirty="0">
-                <a:solidFill>
-                  <a:srgbClr val="1E2761"/>
-                </a:solidFill>
-                <a:latin typeface="Georgia" pitchFamily="34" charset="0"/>
-                <a:ea typeface="Georgia" pitchFamily="34" charset="-122"/>
-                <a:cs typeface="Georgia" pitchFamily="34" charset="-120"/>
-              </a:rPr>
-              <a:t>Joueur nul</a:t>
-            </a:r>
-            <a:endParaRPr lang="en-US" sz="1700" dirty="0"/>
-          </a:p>
-        </p:txBody>
-      </p:sp>
-      <p:sp>
-        <p:nvSpPr>
-          <p:cNvPr id="14" name="Text 12"/>
-          <p:cNvSpPr/>
-          <p:nvPr/>
-        </p:nvSpPr>
-        <p:spPr>
-          <a:xfrm>
-            <a:off x="6492240" y="2953512"/>
-            <a:ext cx="4663440" cy="548640"/>
-          </a:xfrm>
-          <a:prstGeom prst="rect">
-            <a:avLst/>
-          </a:prstGeom>
-          <a:noFill/>
-          <a:ln/>
-        </p:spPr>
-        <p:txBody>
-          <a:bodyPr wrap="square" lIns="0" tIns="0" rIns="0" bIns="0" rtlCol="0" anchor="t"/>
-          <a:lstStyle/>
-          <a:p>
-            <a:pPr indent="0" marL="0">
-              <a:buNone/>
-            </a:pPr>
-            <a:r>
-              <a:rPr lang="en-US" sz="1250" dirty="0">
-                <a:solidFill>
-                  <a:srgbClr val="333333"/>
-                </a:solidFill>
-              </a:rPr>
-              <a:t>Un joueur sans influence reçoit un pouvoir nul.</a:t>
-            </a:r>
-            <a:endParaRPr lang="en-US" sz="1250" dirty="0"/>
-          </a:p>
-        </p:txBody>
-      </p:sp>
-      <p:sp>
-        <p:nvSpPr>
-          <p:cNvPr id="15" name="Shape 13"/>
-          <p:cNvSpPr/>
-          <p:nvPr/>
-        </p:nvSpPr>
-        <p:spPr>
-          <a:xfrm>
-            <a:off x="731520" y="3749040"/>
-            <a:ext cx="5212080" cy="1143000"/>
-          </a:xfrm>
-          <a:prstGeom prst="rect">
-            <a:avLst/>
-          </a:prstGeom>
-          <a:solidFill>
-            <a:srgbClr val="FFFFFF"/>
-          </a:solidFill>
-          <a:ln w="19050">
-            <a:solidFill>
-              <a:srgbClr val="CADCFC"/>
-            </a:solidFill>
-            <a:prstDash val="solid"/>
-          </a:ln>
-          <a:effectLst>
-            <a:outerShdw sx="100000" sy="100000" kx="0" ky="0" algn="bl" rotWithShape="0" blurRad="88900" dist="38100" dir="8100000">
-              <a:srgbClr val="000000">
-                <a:alpha val="12000"/>
-              </a:srgbClr>
-            </a:outerShdw>
-          </a:effectLst>
-        </p:spPr>
-      </p:sp>
-      <p:sp>
-        <p:nvSpPr>
-          <p:cNvPr id="16" name="Shape 14"/>
-          <p:cNvSpPr/>
-          <p:nvPr/>
-        </p:nvSpPr>
-        <p:spPr>
-          <a:xfrm>
-            <a:off x="731520" y="3749040"/>
-            <a:ext cx="109728" cy="1143000"/>
-          </a:xfrm>
-          <a:prstGeom prst="rect">
-            <a:avLst/>
-          </a:prstGeom>
-          <a:solidFill>
-            <a:srgbClr val="2C8A4A"/>
-          </a:solidFill>
-          <a:ln/>
-        </p:spPr>
-      </p:sp>
-      <p:sp>
-        <p:nvSpPr>
-          <p:cNvPr id="17" name="Text 15"/>
-          <p:cNvSpPr/>
-          <p:nvPr/>
-        </p:nvSpPr>
-        <p:spPr>
-          <a:xfrm>
-            <a:off x="4709160" y="3913632"/>
-            <a:ext cx="1097280" cy="320040"/>
-          </a:xfrm>
-          <a:prstGeom prst="rect">
-            <a:avLst/>
-          </a:prstGeom>
-          <a:solidFill>
-            <a:srgbClr val="2C8A4A"/>
-          </a:solidFill>
-          <a:ln/>
-        </p:spPr>
-        <p:txBody>
-          <a:bodyPr wrap="square" lIns="0" tIns="0" rIns="0" bIns="0" rtlCol="0" anchor="ctr"/>
-          <a:lstStyle/>
-          <a:p>
-            <a:pPr algn="ctr" indent="0" marL="0">
-              <a:buNone/>
-            </a:pPr>
-            <a:r>
-              <a:rPr lang="en-US" sz="1100" b="1" dirty="0">
+              <a:t>Aucun groupe n'a la majorité absolue (289 / 577).</a:t>
+            </a:r>
+            <a:endParaRPr lang="en-US" sz="1350" dirty="0"/>
+          </a:p>
+          <a:p>
+            <a:pPr marL="342900" indent="-342900">
+              <a:spcAft>
+                <a:spcPts val="800"/>
+              </a:spcAft>
+              <a:buSzPct val="100000"/>
+              <a:buChar char="•"/>
+            </a:pPr>
+            <a:r>
+              <a:rPr lang="en-US" sz="1350" dirty="0">
                 <a:solidFill>
                   <a:srgbClr val="FFFFFF"/>
                 </a:solidFill>
               </a:rPr>
-              <a:t>PROUVÉ</a:t>
-            </a:r>
-            <a:endParaRPr lang="en-US" sz="1100" dirty="0"/>
-          </a:p>
-        </p:txBody>
-      </p:sp>
-      <p:sp>
-        <p:nvSpPr>
-          <p:cNvPr id="18" name="Text 16"/>
-          <p:cNvSpPr/>
-          <p:nvPr/>
-        </p:nvSpPr>
-        <p:spPr>
-          <a:xfrm>
-            <a:off x="1005840" y="3886200"/>
-            <a:ext cx="3657600" cy="365760"/>
-          </a:xfrm>
-          <a:prstGeom prst="rect">
-            <a:avLst/>
-          </a:prstGeom>
-          <a:noFill/>
-          <a:ln/>
-        </p:spPr>
-        <p:txBody>
-          <a:bodyPr wrap="square" lIns="0" tIns="0" rIns="0" bIns="0" rtlCol="0" anchor="ctr"/>
-          <a:lstStyle/>
-          <a:p>
-            <a:pPr indent="0" marL="0">
-              <a:buNone/>
-            </a:pPr>
-            <a:r>
-              <a:rPr lang="en-US" sz="1700" b="1" dirty="0">
-                <a:solidFill>
-                  <a:srgbClr val="1E2761"/>
-                </a:solidFill>
-                <a:latin typeface="Georgia" pitchFamily="34" charset="0"/>
-                <a:ea typeface="Georgia" pitchFamily="34" charset="-122"/>
-                <a:cs typeface="Georgia" pitchFamily="34" charset="-120"/>
-              </a:rPr>
-              <a:t>Symétrie</a:t>
-            </a:r>
-            <a:endParaRPr lang="en-US" sz="1700" dirty="0"/>
-          </a:p>
-        </p:txBody>
-      </p:sp>
-      <p:sp>
-        <p:nvSpPr>
-          <p:cNvPr id="19" name="Text 17"/>
-          <p:cNvSpPr/>
-          <p:nvPr/>
-        </p:nvSpPr>
-        <p:spPr>
-          <a:xfrm>
-            <a:off x="1005840" y="4279392"/>
-            <a:ext cx="4663440" cy="548640"/>
-          </a:xfrm>
-          <a:prstGeom prst="rect">
-            <a:avLst/>
-          </a:prstGeom>
-          <a:noFill/>
-          <a:ln/>
-        </p:spPr>
-        <p:txBody>
-          <a:bodyPr wrap="square" lIns="0" tIns="0" rIns="0" bIns="0" rtlCol="0" anchor="t"/>
-          <a:lstStyle/>
-          <a:p>
-            <a:pPr indent="0" marL="0">
-              <a:buNone/>
-            </a:pPr>
-            <a:r>
-              <a:rPr lang="en-US" sz="1250" dirty="0">
-                <a:solidFill>
-                  <a:srgbClr val="333333"/>
-                </a:solidFill>
-              </a:rPr>
-              <a:t>Deux joueurs interchangeables reçoivent le même pouvoir.</a:t>
-            </a:r>
-            <a:endParaRPr lang="en-US" sz="1250" dirty="0"/>
-          </a:p>
-        </p:txBody>
-      </p:sp>
-      <p:sp>
-        <p:nvSpPr>
-          <p:cNvPr id="20" name="Shape 18"/>
-          <p:cNvSpPr/>
-          <p:nvPr/>
-        </p:nvSpPr>
-        <p:spPr>
-          <a:xfrm>
-            <a:off x="6217920" y="3749040"/>
-            <a:ext cx="5212080" cy="1143000"/>
-          </a:xfrm>
-          <a:prstGeom prst="rect">
-            <a:avLst/>
-          </a:prstGeom>
-          <a:solidFill>
-            <a:srgbClr val="FFFFFF"/>
-          </a:solidFill>
-          <a:ln w="19050">
-            <a:solidFill>
-              <a:srgbClr val="CADCFC"/>
-            </a:solidFill>
-            <a:prstDash val="solid"/>
-          </a:ln>
-          <a:effectLst>
-            <a:outerShdw sx="100000" sy="100000" kx="0" ky="0" algn="bl" rotWithShape="0" blurRad="88900" dist="38100" dir="8100000">
-              <a:srgbClr val="000000">
-                <a:alpha val="12000"/>
-              </a:srgbClr>
-            </a:outerShdw>
-          </a:effectLst>
-        </p:spPr>
-      </p:sp>
-      <p:sp>
-        <p:nvSpPr>
-          <p:cNvPr id="21" name="Shape 19"/>
-          <p:cNvSpPr/>
-          <p:nvPr/>
-        </p:nvSpPr>
-        <p:spPr>
-          <a:xfrm>
-            <a:off x="6217920" y="3749040"/>
-            <a:ext cx="109728" cy="1143000"/>
-          </a:xfrm>
-          <a:prstGeom prst="rect">
-            <a:avLst/>
-          </a:prstGeom>
-          <a:solidFill>
-            <a:srgbClr val="2C8A4A"/>
-          </a:solidFill>
-          <a:ln/>
-        </p:spPr>
-      </p:sp>
-      <p:sp>
-        <p:nvSpPr>
-          <p:cNvPr id="22" name="Text 20"/>
-          <p:cNvSpPr/>
-          <p:nvPr/>
-        </p:nvSpPr>
-        <p:spPr>
-          <a:xfrm>
-            <a:off x="10195560" y="3913632"/>
-            <a:ext cx="1097280" cy="320040"/>
-          </a:xfrm>
-          <a:prstGeom prst="rect">
-            <a:avLst/>
-          </a:prstGeom>
-          <a:solidFill>
-            <a:srgbClr val="2C8A4A"/>
-          </a:solidFill>
-          <a:ln/>
-        </p:spPr>
-        <p:txBody>
-          <a:bodyPr wrap="square" lIns="0" tIns="0" rIns="0" bIns="0" rtlCol="0" anchor="ctr"/>
-          <a:lstStyle/>
-          <a:p>
-            <a:pPr algn="ctr" indent="0" marL="0">
-              <a:buNone/>
-            </a:pPr>
-            <a:r>
-              <a:rPr lang="en-US" sz="1100" b="1" dirty="0">
+              <a:t>Sous Shapley-Shubik, le RN passe de 22,1 % de sièges à 24,8 % de pouvoir.</a:t>
+            </a:r>
+            <a:endParaRPr lang="en-US" sz="1350" dirty="0"/>
+          </a:p>
+          <a:p>
+            <a:pPr marL="342900" indent="-342900">
+              <a:buSzPct val="100000"/>
+              <a:buChar char="•"/>
+            </a:pPr>
+            <a:r>
+              <a:rPr lang="en-US" sz="1350" dirty="0">
                 <a:solidFill>
                   <a:srgbClr val="FFFFFF"/>
                 </a:solidFill>
               </a:rPr>
-              <a:t>PROUVÉ</a:t>
-            </a:r>
-            <a:endParaRPr lang="en-US" sz="1100" dirty="0"/>
-          </a:p>
-        </p:txBody>
-      </p:sp>
-      <p:sp>
-        <p:nvSpPr>
-          <p:cNvPr id="23" name="Text 21"/>
-          <p:cNvSpPr/>
-          <p:nvPr/>
-        </p:nvSpPr>
-        <p:spPr>
-          <a:xfrm>
-            <a:off x="6492240" y="3886200"/>
-            <a:ext cx="3657600" cy="365760"/>
-          </a:xfrm>
-          <a:prstGeom prst="rect">
-            <a:avLst/>
-          </a:prstGeom>
-          <a:noFill/>
-          <a:ln/>
-        </p:spPr>
-        <p:txBody>
-          <a:bodyPr wrap="square" lIns="0" tIns="0" rIns="0" bIns="0" rtlCol="0" anchor="ctr"/>
-          <a:lstStyle/>
-          <a:p>
-            <a:pPr indent="0" marL="0">
-              <a:buNone/>
-            </a:pPr>
-            <a:r>
-              <a:rPr lang="en-US" sz="1700" b="1" dirty="0">
-                <a:solidFill>
-                  <a:srgbClr val="1E2761"/>
-                </a:solidFill>
-                <a:latin typeface="Georgia" pitchFamily="34" charset="0"/>
-                <a:ea typeface="Georgia" pitchFamily="34" charset="-122"/>
-                <a:cs typeface="Georgia" pitchFamily="34" charset="-120"/>
-              </a:rPr>
-              <a:t>Additivité</a:t>
-            </a:r>
-            <a:endParaRPr lang="en-US" sz="1700" dirty="0"/>
-          </a:p>
-        </p:txBody>
-      </p:sp>
-      <p:sp>
-        <p:nvSpPr>
-          <p:cNvPr id="24" name="Text 22"/>
-          <p:cNvSpPr/>
-          <p:nvPr/>
-        </p:nvSpPr>
-        <p:spPr>
-          <a:xfrm>
-            <a:off x="6492240" y="4279392"/>
-            <a:ext cx="4663440" cy="548640"/>
-          </a:xfrm>
-          <a:prstGeom prst="rect">
-            <a:avLst/>
-          </a:prstGeom>
-          <a:noFill/>
-          <a:ln/>
-        </p:spPr>
-        <p:txBody>
-          <a:bodyPr wrap="square" lIns="0" tIns="0" rIns="0" bIns="0" rtlCol="0" anchor="t"/>
-          <a:lstStyle/>
-          <a:p>
-            <a:pPr indent="0" marL="0">
-              <a:buNone/>
-            </a:pPr>
-            <a:r>
-              <a:rPr lang="en-US" sz="1250" dirty="0">
-                <a:solidFill>
-                  <a:srgbClr val="333333"/>
-                </a:solidFill>
-              </a:rPr>
-              <a:t>Le pouvoir est additif sur la somme de deux jeux (Shapley-Shubik).</a:t>
-            </a:r>
-            <a:endParaRPr lang="en-US" sz="1250" dirty="0"/>
-          </a:p>
-        </p:txBody>
-      </p:sp>
-      <p:sp>
-        <p:nvSpPr>
-          <p:cNvPr id="25" name="Text 23"/>
-          <p:cNvSpPr/>
-          <p:nvPr/>
-        </p:nvSpPr>
-        <p:spPr>
-          <a:xfrm>
-            <a:off x="731520" y="5212080"/>
-            <a:ext cx="10698480" cy="548640"/>
-          </a:xfrm>
-          <a:prstGeom prst="rect">
-            <a:avLst/>
-          </a:prstGeom>
-          <a:noFill/>
-          <a:ln/>
-        </p:spPr>
-        <p:txBody>
-          <a:bodyPr wrap="square" lIns="0" tIns="0" rIns="0" bIns="0" rtlCol="0" anchor="ctr"/>
-          <a:lstStyle/>
-          <a:p>
-            <a:pPr indent="0" marL="0">
-              <a:buNone/>
-            </a:pPr>
-            <a:r>
-              <a:rPr lang="en-US" sz="1300" i="1" dirty="0">
-                <a:solidFill>
-                  <a:srgbClr val="5B6478"/>
-                </a:solidFill>
-              </a:rPr>
-              <a:t>Ce qui distingue les indices : Z3 établit que seul Shapley-Shubik concilie efficacité et additivité. Banzhaf viole l'efficacité (contre-exemple exhibé par Z3). Preuve bornée par n, à la manière de Tang et Lin (2009).</a:t>
-            </a:r>
-            <a:endParaRPr lang="en-US" sz="1300" dirty="0"/>
-          </a:p>
-        </p:txBody>
-      </p:sp>
-      <p:sp>
-        <p:nvSpPr>
-          <p:cNvPr id="26" name="Text 24"/>
+              <a:t>Deegan-Packel égalise fortement : de 7,0 % à 10,7 % seulement.</a:t>
+            </a:r>
+            <a:endParaRPr lang="en-US" sz="1350" dirty="0"/>
+          </a:p>
+        </p:txBody>
+      </p:sp>
+      <p:sp>
+        <p:nvSpPr>
+          <p:cNvPr id="8" name="Text 5"/>
           <p:cNvSpPr/>
           <p:nvPr/>
         </p:nvSpPr>
@@ -10218,7 +8903,7 @@
       </p:sp>
       <p:sp>
         <p:nvSpPr>
-          <p:cNvPr id="27" name="Text 25"/>
+          <p:cNvPr id="9" name="Text 6"/>
           <p:cNvSpPr/>
           <p:nvPr/>
         </p:nvSpPr>
@@ -10246,7 +8931,7 @@
                   <a:srgbClr val="5B6478"/>
                 </a:solidFill>
               </a:rPr>
-              <a:t>7 / 15</a:t>
+              <a:t>7 / 13</a:t>
             </a:r>
             <a:endParaRPr lang="en-US" sz="900" dirty="0"/>
           </a:p>
@@ -10337,53 +9022,74 @@
                 <a:ea typeface="Georgia" pitchFamily="34" charset="-122"/>
                 <a:cs typeface="Georgia" pitchFamily="34" charset="-120"/>
               </a:rPr>
-              <a:t>Application : Assemblée nationale 2024</a:t>
+              <a:t>Coalitions réelles : l'Assemblée en blocs</a:t>
             </a:r>
             <a:endParaRPr lang="en-US" sz="2700" dirty="0"/>
           </a:p>
         </p:txBody>
       </p:sp>
-      <p:pic>
-        <p:nvPicPr>
-          <p:cNvPr id="4" name="Image 0" descr="/private/tmp/claude-501/-Users-iliaskalalou-EPITA-IA-symbolic/41e9eafa-8b36-4a62-b3f1-971646836a16/scratchpad/slides_t1/power_2024.png">    </p:cNvPr>
-          <p:cNvPicPr>
-            <a:picLocks noChangeAspect="1"/>
-          </p:cNvPicPr>
-          <p:nvPr/>
-        </p:nvPicPr>
-        <p:blipFill>
-          <a:blip r:embed="rId1"/>
-          <a:srcRect l="0" r="0" t="0" b="0"/>
-          <a:stretch/>
-        </p:blipFill>
-        <p:spPr>
-          <a:xfrm>
-            <a:off x="640080" y="1325880"/>
-            <a:ext cx="7315200" cy="4206240"/>
-          </a:xfrm>
-          <a:prstGeom prst="rect">
-            <a:avLst/>
-          </a:prstGeom>
-        </p:spPr>
-      </p:pic>
-      <p:sp>
-        <p:nvSpPr>
-          <p:cNvPr id="5" name="Shape 2"/>
-          <p:cNvSpPr/>
-          <p:nvPr/>
-        </p:nvSpPr>
-        <p:spPr>
-          <a:xfrm>
-            <a:off x="8183880" y="1554480"/>
-            <a:ext cx="3291840" cy="3657600"/>
+      <p:sp>
+        <p:nvSpPr>
+          <p:cNvPr id="4" name="Text 2"/>
+          <p:cNvSpPr/>
+          <p:nvPr/>
+        </p:nvSpPr>
+        <p:spPr>
+          <a:xfrm>
+            <a:off x="731520" y="1280160"/>
+            <a:ext cx="10698480" cy="640080"/>
+          </a:xfrm>
+          <a:prstGeom prst="rect">
+            <a:avLst/>
+          </a:prstGeom>
+          <a:noFill/>
+          <a:ln/>
+        </p:spPr>
+        <p:txBody>
+          <a:bodyPr wrap="square" lIns="0" tIns="0" rIns="0" bIns="0" rtlCol="0" anchor="ctr"/>
+          <a:lstStyle/>
+          <a:p>
+            <a:pPr indent="0" marL="0">
+              <a:lnSpc>
+                <a:spcPct val="115000"/>
+              </a:lnSpc>
+              <a:buNone/>
+            </a:pPr>
+            <a:r>
+              <a:rPr lang="en-US" sz="1500" dirty="0">
+                <a:solidFill>
+                  <a:srgbClr val="333333"/>
+                </a:solidFill>
+              </a:rPr>
+              <a:t>Au-delà des groupes, on agrège l'Assemblée 2024 en blocs politiques (NFP, Ensemble, RN, DR...), comme le demande le sujet. Le paradoxe réapparaît en grand.</a:t>
+            </a:r>
+            <a:endParaRPr lang="en-US" sz="1500" dirty="0"/>
+          </a:p>
+        </p:txBody>
+      </p:sp>
+      <p:sp>
+        <p:nvSpPr>
+          <p:cNvPr id="5" name="Shape 3"/>
+          <p:cNvSpPr/>
+          <p:nvPr/>
+        </p:nvSpPr>
+        <p:spPr>
+          <a:xfrm>
+            <a:off x="731520" y="2057400"/>
+            <a:ext cx="6675120" cy="3108960"/>
           </a:xfrm>
           <a:prstGeom prst="rect">
             <a:avLst/>
           </a:prstGeom>
           <a:solidFill>
-            <a:srgbClr val="1E2761"/>
+            <a:srgbClr val="FFFFFF"/>
           </a:solidFill>
-          <a:ln/>
+          <a:ln w="19050">
+            <a:solidFill>
+              <a:srgbClr val="CADCFC"/>
+            </a:solidFill>
+            <a:prstDash val="solid"/>
+          </a:ln>
           <a:effectLst>
             <a:outerShdw sx="100000" sy="100000" kx="0" ky="0" algn="bl" rotWithShape="0" blurRad="88900" dist="38100" dir="8100000">
               <a:srgbClr val="000000">
@@ -10395,14 +9101,14 @@
       </p:sp>
       <p:sp>
         <p:nvSpPr>
-          <p:cNvPr id="6" name="Text 3"/>
-          <p:cNvSpPr/>
-          <p:nvPr/>
-        </p:nvSpPr>
-        <p:spPr>
-          <a:xfrm>
-            <a:off x="8412480" y="1783080"/>
-            <a:ext cx="2834640" cy="411480"/>
+          <p:cNvPr id="6" name="Text 4"/>
+          <p:cNvSpPr/>
+          <p:nvPr/>
+        </p:nvSpPr>
+        <p:spPr>
+          <a:xfrm>
+            <a:off x="960120" y="2240280"/>
+            <a:ext cx="6217920" cy="365760"/>
           </a:xfrm>
           <a:prstGeom prst="rect">
             <a:avLst/>
@@ -10418,30 +9124,456 @@
               <a:buNone/>
             </a:pPr>
             <a:r>
-              <a:rPr lang="en-US" sz="1800" b="1" dirty="0">
-                <a:solidFill>
-                  <a:srgbClr val="F2A900"/>
+              <a:rPr lang="en-US" sz="1600" b="1" dirty="0">
+                <a:solidFill>
+                  <a:srgbClr val="1E2761"/>
                 </a:solidFill>
                 <a:latin typeface="Georgia" pitchFamily="34" charset="0"/>
                 <a:ea typeface="Georgia" pitchFamily="34" charset="-122"/>
                 <a:cs typeface="Georgia" pitchFamily="34" charset="-120"/>
               </a:rPr>
-              <a:t>Lecture</a:t>
-            </a:r>
-            <a:endParaRPr lang="en-US" sz="1800" dirty="0"/>
-          </a:p>
-        </p:txBody>
-      </p:sp>
-      <p:sp>
-        <p:nvSpPr>
-          <p:cNvPr id="7" name="Text 4"/>
-          <p:cNvSpPr/>
-          <p:nvPr/>
-        </p:nvSpPr>
-        <p:spPr>
-          <a:xfrm>
-            <a:off x="8412480" y="2286000"/>
-            <a:ext cx="2834640" cy="2743200"/>
+              <a:t>Trois blocs se partagent tout le pouvoir</a:t>
+            </a:r>
+            <a:endParaRPr lang="en-US" sz="1600" dirty="0"/>
+          </a:p>
+        </p:txBody>
+      </p:sp>
+      <p:sp>
+        <p:nvSpPr>
+          <p:cNvPr id="7" name="Text 5"/>
+          <p:cNvSpPr/>
+          <p:nvPr/>
+        </p:nvSpPr>
+        <p:spPr>
+          <a:xfrm>
+            <a:off x="960120" y="2743200"/>
+            <a:ext cx="2011680" cy="457200"/>
+          </a:xfrm>
+          <a:prstGeom prst="rect">
+            <a:avLst/>
+          </a:prstGeom>
+          <a:noFill/>
+          <a:ln/>
+        </p:spPr>
+        <p:txBody>
+          <a:bodyPr wrap="square" lIns="0" tIns="0" rIns="0" bIns="0" rtlCol="0" anchor="ctr"/>
+          <a:lstStyle/>
+          <a:p>
+            <a:pPr indent="0" marL="0">
+              <a:buNone/>
+            </a:pPr>
+            <a:r>
+              <a:rPr lang="en-US" sz="1500" b="1" dirty="0">
+                <a:solidFill>
+                  <a:srgbClr val="1E2761"/>
+                </a:solidFill>
+              </a:rPr>
+              <a:t>NFP</a:t>
+            </a:r>
+            <a:endParaRPr lang="en-US" sz="1500" dirty="0"/>
+          </a:p>
+        </p:txBody>
+      </p:sp>
+      <p:sp>
+        <p:nvSpPr>
+          <p:cNvPr id="8" name="Text 6"/>
+          <p:cNvSpPr/>
+          <p:nvPr/>
+        </p:nvSpPr>
+        <p:spPr>
+          <a:xfrm>
+            <a:off x="2926080" y="2743200"/>
+            <a:ext cx="1828800" cy="457200"/>
+          </a:xfrm>
+          <a:prstGeom prst="rect">
+            <a:avLst/>
+          </a:prstGeom>
+          <a:noFill/>
+          <a:ln/>
+        </p:spPr>
+        <p:txBody>
+          <a:bodyPr wrap="square" lIns="0" tIns="0" rIns="0" bIns="0" rtlCol="0" anchor="ctr"/>
+          <a:lstStyle/>
+          <a:p>
+            <a:pPr indent="0" marL="0">
+              <a:buNone/>
+            </a:pPr>
+            <a:r>
+              <a:rPr lang="en-US" sz="1400" dirty="0">
+                <a:solidFill>
+                  <a:srgbClr val="333333"/>
+                </a:solidFill>
+              </a:rPr>
+              <a:t>193 sièges</a:t>
+            </a:r>
+            <a:endParaRPr lang="en-US" sz="1400" dirty="0"/>
+          </a:p>
+        </p:txBody>
+      </p:sp>
+      <p:sp>
+        <p:nvSpPr>
+          <p:cNvPr id="9" name="Text 7"/>
+          <p:cNvSpPr/>
+          <p:nvPr/>
+        </p:nvSpPr>
+        <p:spPr>
+          <a:xfrm>
+            <a:off x="4754880" y="2743200"/>
+            <a:ext cx="2468880" cy="457200"/>
+          </a:xfrm>
+          <a:prstGeom prst="rect">
+            <a:avLst/>
+          </a:prstGeom>
+          <a:noFill/>
+          <a:ln/>
+        </p:spPr>
+        <p:txBody>
+          <a:bodyPr wrap="square" lIns="0" tIns="0" rIns="0" bIns="0" rtlCol="0" anchor="ctr"/>
+          <a:lstStyle/>
+          <a:p>
+            <a:pPr indent="0" marL="0">
+              <a:buNone/>
+            </a:pPr>
+            <a:r>
+              <a:rPr lang="en-US" sz="1500" b="1" dirty="0">
+                <a:solidFill>
+                  <a:srgbClr val="F2A900"/>
+                </a:solidFill>
+              </a:rPr>
+              <a:t>33,3 % de pouvoir</a:t>
+            </a:r>
+            <a:endParaRPr lang="en-US" sz="1500" dirty="0"/>
+          </a:p>
+        </p:txBody>
+      </p:sp>
+      <p:sp>
+        <p:nvSpPr>
+          <p:cNvPr id="10" name="Text 8"/>
+          <p:cNvSpPr/>
+          <p:nvPr/>
+        </p:nvSpPr>
+        <p:spPr>
+          <a:xfrm>
+            <a:off x="960120" y="3310128"/>
+            <a:ext cx="2011680" cy="457200"/>
+          </a:xfrm>
+          <a:prstGeom prst="rect">
+            <a:avLst/>
+          </a:prstGeom>
+          <a:noFill/>
+          <a:ln/>
+        </p:spPr>
+        <p:txBody>
+          <a:bodyPr wrap="square" lIns="0" tIns="0" rIns="0" bIns="0" rtlCol="0" anchor="ctr"/>
+          <a:lstStyle/>
+          <a:p>
+            <a:pPr indent="0" marL="0">
+              <a:buNone/>
+            </a:pPr>
+            <a:r>
+              <a:rPr lang="en-US" sz="1500" b="1" dirty="0">
+                <a:solidFill>
+                  <a:srgbClr val="1E2761"/>
+                </a:solidFill>
+              </a:rPr>
+              <a:t>Ensemble</a:t>
+            </a:r>
+            <a:endParaRPr lang="en-US" sz="1500" dirty="0"/>
+          </a:p>
+        </p:txBody>
+      </p:sp>
+      <p:sp>
+        <p:nvSpPr>
+          <p:cNvPr id="11" name="Text 9"/>
+          <p:cNvSpPr/>
+          <p:nvPr/>
+        </p:nvSpPr>
+        <p:spPr>
+          <a:xfrm>
+            <a:off x="2926080" y="3310128"/>
+            <a:ext cx="1828800" cy="457200"/>
+          </a:xfrm>
+          <a:prstGeom prst="rect">
+            <a:avLst/>
+          </a:prstGeom>
+          <a:noFill/>
+          <a:ln/>
+        </p:spPr>
+        <p:txBody>
+          <a:bodyPr wrap="square" lIns="0" tIns="0" rIns="0" bIns="0" rtlCol="0" anchor="ctr"/>
+          <a:lstStyle/>
+          <a:p>
+            <a:pPr indent="0" marL="0">
+              <a:buNone/>
+            </a:pPr>
+            <a:r>
+              <a:rPr lang="en-US" sz="1400" dirty="0">
+                <a:solidFill>
+                  <a:srgbClr val="333333"/>
+                </a:solidFill>
+              </a:rPr>
+              <a:t>166 sièges</a:t>
+            </a:r>
+            <a:endParaRPr lang="en-US" sz="1400" dirty="0"/>
+          </a:p>
+        </p:txBody>
+      </p:sp>
+      <p:sp>
+        <p:nvSpPr>
+          <p:cNvPr id="12" name="Text 10"/>
+          <p:cNvSpPr/>
+          <p:nvPr/>
+        </p:nvSpPr>
+        <p:spPr>
+          <a:xfrm>
+            <a:off x="4754880" y="3310128"/>
+            <a:ext cx="2468880" cy="457200"/>
+          </a:xfrm>
+          <a:prstGeom prst="rect">
+            <a:avLst/>
+          </a:prstGeom>
+          <a:noFill/>
+          <a:ln/>
+        </p:spPr>
+        <p:txBody>
+          <a:bodyPr wrap="square" lIns="0" tIns="0" rIns="0" bIns="0" rtlCol="0" anchor="ctr"/>
+          <a:lstStyle/>
+          <a:p>
+            <a:pPr indent="0" marL="0">
+              <a:buNone/>
+            </a:pPr>
+            <a:r>
+              <a:rPr lang="en-US" sz="1500" b="1" dirty="0">
+                <a:solidFill>
+                  <a:srgbClr val="F2A900"/>
+                </a:solidFill>
+              </a:rPr>
+              <a:t>33,3 % de pouvoir</a:t>
+            </a:r>
+            <a:endParaRPr lang="en-US" sz="1500" dirty="0"/>
+          </a:p>
+        </p:txBody>
+      </p:sp>
+      <p:sp>
+        <p:nvSpPr>
+          <p:cNvPr id="13" name="Text 11"/>
+          <p:cNvSpPr/>
+          <p:nvPr/>
+        </p:nvSpPr>
+        <p:spPr>
+          <a:xfrm>
+            <a:off x="960120" y="3877056"/>
+            <a:ext cx="2011680" cy="457200"/>
+          </a:xfrm>
+          <a:prstGeom prst="rect">
+            <a:avLst/>
+          </a:prstGeom>
+          <a:noFill/>
+          <a:ln/>
+        </p:spPr>
+        <p:txBody>
+          <a:bodyPr wrap="square" lIns="0" tIns="0" rIns="0" bIns="0" rtlCol="0" anchor="ctr"/>
+          <a:lstStyle/>
+          <a:p>
+            <a:pPr indent="0" marL="0">
+              <a:buNone/>
+            </a:pPr>
+            <a:r>
+              <a:rPr lang="en-US" sz="1500" b="1" dirty="0">
+                <a:solidFill>
+                  <a:srgbClr val="1E2761"/>
+                </a:solidFill>
+              </a:rPr>
+              <a:t>RN</a:t>
+            </a:r>
+            <a:endParaRPr lang="en-US" sz="1500" dirty="0"/>
+          </a:p>
+        </p:txBody>
+      </p:sp>
+      <p:sp>
+        <p:nvSpPr>
+          <p:cNvPr id="14" name="Text 12"/>
+          <p:cNvSpPr/>
+          <p:nvPr/>
+        </p:nvSpPr>
+        <p:spPr>
+          <a:xfrm>
+            <a:off x="2926080" y="3877056"/>
+            <a:ext cx="1828800" cy="457200"/>
+          </a:xfrm>
+          <a:prstGeom prst="rect">
+            <a:avLst/>
+          </a:prstGeom>
+          <a:noFill/>
+          <a:ln/>
+        </p:spPr>
+        <p:txBody>
+          <a:bodyPr wrap="square" lIns="0" tIns="0" rIns="0" bIns="0" rtlCol="0" anchor="ctr"/>
+          <a:lstStyle/>
+          <a:p>
+            <a:pPr indent="0" marL="0">
+              <a:buNone/>
+            </a:pPr>
+            <a:r>
+              <a:rPr lang="en-US" sz="1400" dirty="0">
+                <a:solidFill>
+                  <a:srgbClr val="333333"/>
+                </a:solidFill>
+              </a:rPr>
+              <a:t>126 sièges</a:t>
+            </a:r>
+            <a:endParaRPr lang="en-US" sz="1400" dirty="0"/>
+          </a:p>
+        </p:txBody>
+      </p:sp>
+      <p:sp>
+        <p:nvSpPr>
+          <p:cNvPr id="15" name="Text 13"/>
+          <p:cNvSpPr/>
+          <p:nvPr/>
+        </p:nvSpPr>
+        <p:spPr>
+          <a:xfrm>
+            <a:off x="4754880" y="3877056"/>
+            <a:ext cx="2468880" cy="457200"/>
+          </a:xfrm>
+          <a:prstGeom prst="rect">
+            <a:avLst/>
+          </a:prstGeom>
+          <a:noFill/>
+          <a:ln/>
+        </p:spPr>
+        <p:txBody>
+          <a:bodyPr wrap="square" lIns="0" tIns="0" rIns="0" bIns="0" rtlCol="0" anchor="ctr"/>
+          <a:lstStyle/>
+          <a:p>
+            <a:pPr indent="0" marL="0">
+              <a:buNone/>
+            </a:pPr>
+            <a:r>
+              <a:rPr lang="en-US" sz="1500" b="1" dirty="0">
+                <a:solidFill>
+                  <a:srgbClr val="F2A900"/>
+                </a:solidFill>
+              </a:rPr>
+              <a:t>33,3 % de pouvoir</a:t>
+            </a:r>
+            <a:endParaRPr lang="en-US" sz="1500" dirty="0"/>
+          </a:p>
+        </p:txBody>
+      </p:sp>
+      <p:sp>
+        <p:nvSpPr>
+          <p:cNvPr id="16" name="Text 14"/>
+          <p:cNvSpPr/>
+          <p:nvPr/>
+        </p:nvSpPr>
+        <p:spPr>
+          <a:xfrm>
+            <a:off x="960120" y="4572000"/>
+            <a:ext cx="6217920" cy="457200"/>
+          </a:xfrm>
+          <a:prstGeom prst="rect">
+            <a:avLst/>
+          </a:prstGeom>
+          <a:noFill/>
+          <a:ln/>
+        </p:spPr>
+        <p:txBody>
+          <a:bodyPr wrap="square" lIns="0" tIns="0" rIns="0" bIns="0" rtlCol="0" anchor="ctr"/>
+          <a:lstStyle/>
+          <a:p>
+            <a:pPr indent="0" marL="0">
+              <a:buNone/>
+            </a:pPr>
+            <a:r>
+              <a:rPr lang="en-US" sz="1250" i="1" dirty="0">
+                <a:solidFill>
+                  <a:srgbClr val="5B6478"/>
+                </a:solidFill>
+              </a:rPr>
+              <a:t>DR, LIOT et UDR : 0 % de pouvoir malgré leurs sièges (jamais pivots).</a:t>
+            </a:r>
+            <a:endParaRPr lang="en-US" sz="1250" dirty="0"/>
+          </a:p>
+        </p:txBody>
+      </p:sp>
+      <p:sp>
+        <p:nvSpPr>
+          <p:cNvPr id="17" name="Shape 15"/>
+          <p:cNvSpPr/>
+          <p:nvPr/>
+        </p:nvSpPr>
+        <p:spPr>
+          <a:xfrm>
+            <a:off x="7680960" y="2057400"/>
+            <a:ext cx="3749040" cy="3108960"/>
+          </a:xfrm>
+          <a:prstGeom prst="rect">
+            <a:avLst/>
+          </a:prstGeom>
+          <a:solidFill>
+            <a:srgbClr val="1E2761"/>
+          </a:solidFill>
+          <a:ln/>
+          <a:effectLst>
+            <a:outerShdw sx="100000" sy="100000" kx="0" ky="0" algn="bl" rotWithShape="0" blurRad="88900" dist="38100" dir="8100000">
+              <a:srgbClr val="000000">
+                <a:alpha val="12000"/>
+              </a:srgbClr>
+            </a:outerShdw>
+          </a:effectLst>
+        </p:spPr>
+      </p:sp>
+      <p:sp>
+        <p:nvSpPr>
+          <p:cNvPr id="18" name="Text 16"/>
+          <p:cNvSpPr/>
+          <p:nvPr/>
+        </p:nvSpPr>
+        <p:spPr>
+          <a:xfrm>
+            <a:off x="7909560" y="2212848"/>
+            <a:ext cx="3291840" cy="365760"/>
+          </a:xfrm>
+          <a:prstGeom prst="rect">
+            <a:avLst/>
+          </a:prstGeom>
+          <a:noFill/>
+          <a:ln/>
+        </p:spPr>
+        <p:txBody>
+          <a:bodyPr wrap="square" lIns="0" tIns="0" rIns="0" bIns="0" rtlCol="0" anchor="ctr"/>
+          <a:lstStyle/>
+          <a:p>
+            <a:pPr indent="0" marL="0">
+              <a:buNone/>
+            </a:pPr>
+            <a:r>
+              <a:rPr lang="en-US" sz="1500" b="1" dirty="0">
+                <a:solidFill>
+                  <a:srgbClr val="F2A900"/>
+                </a:solidFill>
+                <a:latin typeface="Georgia" pitchFamily="34" charset="0"/>
+                <a:ea typeface="Georgia" pitchFamily="34" charset="-122"/>
+                <a:cs typeface="Georgia" pitchFamily="34" charset="-120"/>
+              </a:rPr>
+              <a:t>Contrefactuel : unir la gauche ?</a:t>
+            </a:r>
+            <a:endParaRPr lang="en-US" sz="1500" dirty="0"/>
+          </a:p>
+        </p:txBody>
+      </p:sp>
+      <p:sp>
+        <p:nvSpPr>
+          <p:cNvPr id="19" name="Text 17"/>
+          <p:cNvSpPr/>
+          <p:nvPr/>
+        </p:nvSpPr>
+        <p:spPr>
+          <a:xfrm>
+            <a:off x="7909560" y="2587752"/>
+            <a:ext cx="3291840" cy="502920"/>
           </a:xfrm>
           <a:prstGeom prst="rect">
             <a:avLst/>
@@ -10453,61 +9585,282 @@
           <a:bodyPr wrap="square" lIns="0" tIns="0" rIns="0" bIns="0" rtlCol="0" anchor="t"/>
           <a:lstStyle/>
           <a:p>
-            <a:pPr marL="342900" indent="-342900">
-              <a:spcAft>
-                <a:spcPts val="800"/>
-              </a:spcAft>
-              <a:buSzPct val="100000"/>
-              <a:buChar char="•"/>
-            </a:pPr>
-            <a:r>
-              <a:rPr lang="en-US" sz="1350" dirty="0">
+            <a:pPr indent="0" marL="0">
+              <a:buNone/>
+            </a:pPr>
+            <a:r>
+              <a:rPr lang="en-US" sz="1100" dirty="0">
+                <a:solidFill>
+                  <a:srgbClr val="CADCFC"/>
+                </a:solidFill>
+              </a:rPr>
+              <a:t>Toutes choses égales par ailleurs : seuls les groupes de gauche fusionnent.</a:t>
+            </a:r>
+            <a:endParaRPr lang="en-US" sz="1100" dirty="0"/>
+          </a:p>
+        </p:txBody>
+      </p:sp>
+      <p:sp>
+        <p:nvSpPr>
+          <p:cNvPr id="20" name="Text 18"/>
+          <p:cNvSpPr/>
+          <p:nvPr/>
+        </p:nvSpPr>
+        <p:spPr>
+          <a:xfrm>
+            <a:off x="7909560" y="3154680"/>
+            <a:ext cx="685800" cy="365760"/>
+          </a:xfrm>
+          <a:prstGeom prst="rect">
+            <a:avLst/>
+          </a:prstGeom>
+          <a:noFill/>
+          <a:ln/>
+        </p:spPr>
+        <p:txBody>
+          <a:bodyPr wrap="square" lIns="0" tIns="0" rIns="0" bIns="0" rtlCol="0" anchor="ctr"/>
+          <a:lstStyle/>
+          <a:p>
+            <a:pPr indent="0" marL="0">
+              <a:buNone/>
+            </a:pPr>
+            <a:r>
+              <a:rPr lang="en-US" sz="1500" b="1" dirty="0">
                 <a:solidFill>
                   <a:srgbClr val="FFFFFF"/>
                 </a:solidFill>
-              </a:rPr>
-              <a:t>Aucun groupe n'a la majorité absolue (289 / 577).</a:t>
-            </a:r>
-            <a:endParaRPr lang="en-US" sz="1350" dirty="0"/>
-          </a:p>
-          <a:p>
-            <a:pPr marL="342900" indent="-342900">
-              <a:spcAft>
-                <a:spcPts val="800"/>
-              </a:spcAft>
-              <a:buSzPct val="100000"/>
-              <a:buChar char="•"/>
-            </a:pPr>
-            <a:r>
-              <a:rPr lang="en-US" sz="1350" dirty="0">
+                <a:latin typeface="Georgia" pitchFamily="34" charset="0"/>
+                <a:ea typeface="Georgia" pitchFamily="34" charset="-122"/>
+                <a:cs typeface="Georgia" pitchFamily="34" charset="-120"/>
+              </a:rPr>
+              <a:t>2024</a:t>
+            </a:r>
+            <a:endParaRPr lang="en-US" sz="1500" dirty="0"/>
+          </a:p>
+        </p:txBody>
+      </p:sp>
+      <p:sp>
+        <p:nvSpPr>
+          <p:cNvPr id="21" name="Text 19"/>
+          <p:cNvSpPr/>
+          <p:nvPr/>
+        </p:nvSpPr>
+        <p:spPr>
+          <a:xfrm>
+            <a:off x="8595360" y="3154680"/>
+            <a:ext cx="1600200" cy="365760"/>
+          </a:xfrm>
+          <a:prstGeom prst="rect">
+            <a:avLst/>
+          </a:prstGeom>
+          <a:noFill/>
+          <a:ln/>
+        </p:spPr>
+        <p:txBody>
+          <a:bodyPr wrap="square" lIns="0" tIns="0" rIns="0" bIns="0" rtlCol="0" anchor="ctr"/>
+          <a:lstStyle/>
+          <a:p>
+            <a:pPr indent="0" marL="0">
+              <a:buNone/>
+            </a:pPr>
+            <a:r>
+              <a:rPr lang="en-US" sz="1150" dirty="0">
+                <a:solidFill>
+                  <a:srgbClr val="CADCFC"/>
+                </a:solidFill>
+              </a:rPr>
+              <a:t>32,7 %  vers  41,7 %</a:t>
+            </a:r>
+            <a:endParaRPr lang="en-US" sz="1150" dirty="0"/>
+          </a:p>
+        </p:txBody>
+      </p:sp>
+      <p:sp>
+        <p:nvSpPr>
+          <p:cNvPr id="22" name="Text 20"/>
+          <p:cNvSpPr/>
+          <p:nvPr/>
+        </p:nvSpPr>
+        <p:spPr>
+          <a:xfrm>
+            <a:off x="10195560" y="3154680"/>
+            <a:ext cx="1051560" cy="365760"/>
+          </a:xfrm>
+          <a:prstGeom prst="rect">
+            <a:avLst/>
+          </a:prstGeom>
+          <a:noFill/>
+          <a:ln/>
+        </p:spPr>
+        <p:txBody>
+          <a:bodyPr wrap="square" lIns="0" tIns="0" rIns="0" bIns="0" rtlCol="0" anchor="ctr"/>
+          <a:lstStyle/>
+          <a:p>
+            <a:pPr algn="r" indent="0" marL="0">
+              <a:buNone/>
+            </a:pPr>
+            <a:r>
+              <a:rPr lang="en-US" sz="1400" b="1" dirty="0">
+                <a:solidFill>
+                  <a:srgbClr val="2C8A4A"/>
+                </a:solidFill>
+              </a:rPr>
+              <a:t>+9,0 pt</a:t>
+            </a:r>
+            <a:endParaRPr lang="en-US" sz="1400" dirty="0"/>
+          </a:p>
+        </p:txBody>
+      </p:sp>
+      <p:sp>
+        <p:nvSpPr>
+          <p:cNvPr id="23" name="Text 21"/>
+          <p:cNvSpPr/>
+          <p:nvPr/>
+        </p:nvSpPr>
+        <p:spPr>
+          <a:xfrm>
+            <a:off x="7909560" y="3813048"/>
+            <a:ext cx="685800" cy="365760"/>
+          </a:xfrm>
+          <a:prstGeom prst="rect">
+            <a:avLst/>
+          </a:prstGeom>
+          <a:noFill/>
+          <a:ln/>
+        </p:spPr>
+        <p:txBody>
+          <a:bodyPr wrap="square" lIns="0" tIns="0" rIns="0" bIns="0" rtlCol="0" anchor="ctr"/>
+          <a:lstStyle/>
+          <a:p>
+            <a:pPr indent="0" marL="0">
+              <a:buNone/>
+            </a:pPr>
+            <a:r>
+              <a:rPr lang="en-US" sz="1500" b="1" dirty="0">
                 <a:solidFill>
                   <a:srgbClr val="FFFFFF"/>
                 </a:solidFill>
-              </a:rPr>
-              <a:t>Sous Shapley-Shubik, le RN passe de 22,1 % de sièges à 24,8 % de pouvoir.</a:t>
-            </a:r>
-            <a:endParaRPr lang="en-US" sz="1350" dirty="0"/>
-          </a:p>
-          <a:p>
-            <a:pPr marL="342900" indent="-342900">
-              <a:buSzPct val="100000"/>
-              <a:buChar char="•"/>
-            </a:pPr>
-            <a:r>
-              <a:rPr lang="en-US" sz="1350" dirty="0">
-                <a:solidFill>
-                  <a:srgbClr val="FFFFFF"/>
-                </a:solidFill>
-              </a:rPr>
-              <a:t>Deegan-Packel égalise fortement : de 7,0 % à 10,7 % seulement.</a:t>
-            </a:r>
-            <a:endParaRPr lang="en-US" sz="1350" dirty="0"/>
-          </a:p>
-        </p:txBody>
-      </p:sp>
-      <p:sp>
-        <p:nvSpPr>
-          <p:cNvPr id="8" name="Text 5"/>
+                <a:latin typeface="Georgia" pitchFamily="34" charset="0"/>
+                <a:ea typeface="Georgia" pitchFamily="34" charset="-122"/>
+                <a:cs typeface="Georgia" pitchFamily="34" charset="-120"/>
+              </a:rPr>
+              <a:t>2022</a:t>
+            </a:r>
+            <a:endParaRPr lang="en-US" sz="1500" dirty="0"/>
+          </a:p>
+        </p:txBody>
+      </p:sp>
+      <p:sp>
+        <p:nvSpPr>
+          <p:cNvPr id="24" name="Text 22"/>
+          <p:cNvSpPr/>
+          <p:nvPr/>
+        </p:nvSpPr>
+        <p:spPr>
+          <a:xfrm>
+            <a:off x="8595360" y="3813048"/>
+            <a:ext cx="1600200" cy="365760"/>
+          </a:xfrm>
+          <a:prstGeom prst="rect">
+            <a:avLst/>
+          </a:prstGeom>
+          <a:noFill/>
+          <a:ln/>
+        </p:spPr>
+        <p:txBody>
+          <a:bodyPr wrap="square" lIns="0" tIns="0" rIns="0" bIns="0" rtlCol="0" anchor="ctr"/>
+          <a:lstStyle/>
+          <a:p>
+            <a:pPr indent="0" marL="0">
+              <a:buNone/>
+            </a:pPr>
+            <a:r>
+              <a:rPr lang="en-US" sz="1150" dirty="0">
+                <a:solidFill>
+                  <a:srgbClr val="CADCFC"/>
+                </a:solidFill>
+              </a:rPr>
+              <a:t>24,1 %  vers  27,1 %</a:t>
+            </a:r>
+            <a:endParaRPr lang="en-US" sz="1150" dirty="0"/>
+          </a:p>
+        </p:txBody>
+      </p:sp>
+      <p:sp>
+        <p:nvSpPr>
+          <p:cNvPr id="25" name="Text 23"/>
+          <p:cNvSpPr/>
+          <p:nvPr/>
+        </p:nvSpPr>
+        <p:spPr>
+          <a:xfrm>
+            <a:off x="10195560" y="3813048"/>
+            <a:ext cx="1051560" cy="365760"/>
+          </a:xfrm>
+          <a:prstGeom prst="rect">
+            <a:avLst/>
+          </a:prstGeom>
+          <a:noFill/>
+          <a:ln/>
+        </p:spPr>
+        <p:txBody>
+          <a:bodyPr wrap="square" lIns="0" tIns="0" rIns="0" bIns="0" rtlCol="0" anchor="ctr"/>
+          <a:lstStyle/>
+          <a:p>
+            <a:pPr algn="r" indent="0" marL="0">
+              <a:buNone/>
+            </a:pPr>
+            <a:r>
+              <a:rPr lang="en-US" sz="1400" b="1" dirty="0">
+                <a:solidFill>
+                  <a:srgbClr val="2C8A4A"/>
+                </a:solidFill>
+              </a:rPr>
+              <a:t>+3,1 pt</a:t>
+            </a:r>
+            <a:endParaRPr lang="en-US" sz="1400" dirty="0"/>
+          </a:p>
+        </p:txBody>
+      </p:sp>
+      <p:sp>
+        <p:nvSpPr>
+          <p:cNvPr id="26" name="Text 24"/>
+          <p:cNvSpPr/>
+          <p:nvPr/>
+        </p:nvSpPr>
+        <p:spPr>
+          <a:xfrm>
+            <a:off x="7909560" y="4526280"/>
+            <a:ext cx="3291840" cy="658368"/>
+          </a:xfrm>
+          <a:prstGeom prst="rect">
+            <a:avLst/>
+          </a:prstGeom>
+          <a:noFill/>
+          <a:ln/>
+        </p:spPr>
+        <p:txBody>
+          <a:bodyPr wrap="square" lIns="0" tIns="0" rIns="0" bIns="0" rtlCol="0" anchor="t"/>
+          <a:lstStyle/>
+          <a:p>
+            <a:pPr indent="0" marL="0">
+              <a:buNone/>
+            </a:pPr>
+            <a:r>
+              <a:rPr lang="en-US" sz="1050" i="1" dirty="0">
+                <a:solidFill>
+                  <a:srgbClr val="CADCFC"/>
+                </a:solidFill>
+              </a:rPr>
+              <a:t>L'union paie toujours. Mais le pouvoir de pivot est relatif : en 2022, la consolidation du camp présidentiel retire à elle seule 5,0 pts à la gauche, sans que celle-ci bouge.</a:t>
+            </a:r>
+            <a:endParaRPr lang="en-US" sz="1050" dirty="0"/>
+          </a:p>
+        </p:txBody>
+      </p:sp>
+      <p:sp>
+        <p:nvSpPr>
+          <p:cNvPr id="27" name="Text 25"/>
           <p:cNvSpPr/>
           <p:nvPr/>
         </p:nvSpPr>
@@ -10543,7 +9896,7 @@
       </p:sp>
       <p:sp>
         <p:nvSpPr>
-          <p:cNvPr id="9" name="Text 6"/>
+          <p:cNvPr id="28" name="Text 26"/>
           <p:cNvSpPr/>
           <p:nvPr/>
         </p:nvSpPr>
@@ -10571,7 +9924,7 @@
                   <a:srgbClr val="5B6478"/>
                 </a:solidFill>
               </a:rPr>
-              <a:t>8 / 15</a:t>
+              <a:t>8 / 13</a:t>
             </a:r>
             <a:endParaRPr lang="en-US" sz="900" dirty="0"/>
           </a:p>
@@ -10662,45 +10015,263 @@
                 <a:ea typeface="Georgia" pitchFamily="34" charset="-122"/>
                 <a:cs typeface="Georgia" pitchFamily="34" charset="-120"/>
               </a:rPr>
-              <a:t>Pouvoir contre sièges : qui gagne, qui perd</a:t>
+              <a:t>Confrontation à un vote réel : la censure de 2024</a:t>
             </a:r>
             <a:endParaRPr lang="en-US" sz="2700" dirty="0"/>
           </a:p>
         </p:txBody>
       </p:sp>
-      <p:pic>
-        <p:nvPicPr>
-          <p:cNvPr id="4" name="Image 0" descr="/private/tmp/claude-501/-Users-iliaskalalou-EPITA-IA-symbolic/41e9eafa-8b36-4a62-b3f1-971646836a16/scratchpad/slides_t1/gap_2024.png">    </p:cNvPr>
-          <p:cNvPicPr>
-            <a:picLocks noChangeAspect="1"/>
-          </p:cNvPicPr>
-          <p:nvPr/>
-        </p:nvPicPr>
-        <p:blipFill>
-          <a:blip r:embed="rId1"/>
-          <a:srcRect l="0" r="0" t="0" b="0"/>
-          <a:stretch/>
-        </p:blipFill>
-        <p:spPr>
-          <a:xfrm>
-            <a:off x="640080" y="1325880"/>
-            <a:ext cx="7315200" cy="4206240"/>
-          </a:xfrm>
-          <a:prstGeom prst="rect">
-            <a:avLst/>
-          </a:prstGeom>
-        </p:spPr>
-      </p:pic>
-      <p:sp>
-        <p:nvSpPr>
-          <p:cNvPr id="5" name="Shape 2"/>
-          <p:cNvSpPr/>
-          <p:nvPr/>
-        </p:nvSpPr>
-        <p:spPr>
-          <a:xfrm>
-            <a:off x="8183880" y="1554480"/>
-            <a:ext cx="3291840" cy="2926080"/>
+      <p:sp>
+        <p:nvSpPr>
+          <p:cNvPr id="4" name="Text 2"/>
+          <p:cNvSpPr/>
+          <p:nvPr/>
+        </p:nvSpPr>
+        <p:spPr>
+          <a:xfrm>
+            <a:off x="731520" y="1280160"/>
+            <a:ext cx="10698480" cy="640080"/>
+          </a:xfrm>
+          <a:prstGeom prst="rect">
+            <a:avLst/>
+          </a:prstGeom>
+          <a:noFill/>
+          <a:ln/>
+        </p:spPr>
+        <p:txBody>
+          <a:bodyPr wrap="square" lIns="0" tIns="0" rIns="0" bIns="0" rtlCol="0" anchor="ctr"/>
+          <a:lstStyle/>
+          <a:p>
+            <a:pPr indent="0" marL="0">
+              <a:lnSpc>
+                <a:spcPct val="115000"/>
+              </a:lnSpc>
+              <a:buNone/>
+            </a:pPr>
+            <a:r>
+              <a:rPr lang="en-US" sz="1500" dirty="0">
+                <a:solidFill>
+                  <a:srgbClr val="333333"/>
+                </a:solidFill>
+              </a:rPr>
+              <a:t>La théorie prédit un pouvoir a priori. La motion de censure du gouvernement Barnier (4 décembre 2024) fournit un vote réel pour la confronter.</a:t>
+            </a:r>
+            <a:endParaRPr lang="en-US" sz="1500" dirty="0"/>
+          </a:p>
+        </p:txBody>
+      </p:sp>
+      <p:sp>
+        <p:nvSpPr>
+          <p:cNvPr id="5" name="Shape 3"/>
+          <p:cNvSpPr/>
+          <p:nvPr/>
+        </p:nvSpPr>
+        <p:spPr>
+          <a:xfrm>
+            <a:off x="731520" y="2057400"/>
+            <a:ext cx="5120640" cy="3200400"/>
+          </a:xfrm>
+          <a:prstGeom prst="rect">
+            <a:avLst/>
+          </a:prstGeom>
+          <a:solidFill>
+            <a:srgbClr val="1E2761"/>
+          </a:solidFill>
+          <a:ln/>
+          <a:effectLst>
+            <a:outerShdw sx="100000" sy="100000" kx="0" ky="0" algn="bl" rotWithShape="0" blurRad="88900" dist="38100" dir="8100000">
+              <a:srgbClr val="000000">
+                <a:alpha val="12000"/>
+              </a:srgbClr>
+            </a:outerShdw>
+          </a:effectLst>
+        </p:spPr>
+      </p:sp>
+      <p:sp>
+        <p:nvSpPr>
+          <p:cNvPr id="6" name="Text 4"/>
+          <p:cNvSpPr/>
+          <p:nvPr/>
+        </p:nvSpPr>
+        <p:spPr>
+          <a:xfrm>
+            <a:off x="960120" y="2240280"/>
+            <a:ext cx="4663440" cy="365760"/>
+          </a:xfrm>
+          <a:prstGeom prst="rect">
+            <a:avLst/>
+          </a:prstGeom>
+          <a:noFill/>
+          <a:ln/>
+        </p:spPr>
+        <p:txBody>
+          <a:bodyPr wrap="square" lIns="0" tIns="0" rIns="0" bIns="0" rtlCol="0" anchor="ctr"/>
+          <a:lstStyle/>
+          <a:p>
+            <a:pPr indent="0" marL="0">
+              <a:buNone/>
+            </a:pPr>
+            <a:r>
+              <a:rPr lang="en-US" sz="1600" b="1" dirty="0">
+                <a:solidFill>
+                  <a:srgbClr val="F2A900"/>
+                </a:solidFill>
+                <a:latin typeface="Georgia" pitchFamily="34" charset="0"/>
+                <a:ea typeface="Georgia" pitchFamily="34" charset="-122"/>
+                <a:cs typeface="Georgia" pitchFamily="34" charset="-120"/>
+              </a:rPr>
+              <a:t>Coalition NFP + RN + UDR</a:t>
+            </a:r>
+            <a:endParaRPr lang="en-US" sz="1600" dirty="0"/>
+          </a:p>
+        </p:txBody>
+      </p:sp>
+      <p:sp>
+        <p:nvSpPr>
+          <p:cNvPr id="7" name="Text 5"/>
+          <p:cNvSpPr/>
+          <p:nvPr/>
+        </p:nvSpPr>
+        <p:spPr>
+          <a:xfrm>
+            <a:off x="960120" y="2743200"/>
+            <a:ext cx="4663440" cy="548640"/>
+          </a:xfrm>
+          <a:prstGeom prst="rect">
+            <a:avLst/>
+          </a:prstGeom>
+          <a:noFill/>
+          <a:ln/>
+        </p:spPr>
+        <p:txBody>
+          <a:bodyPr wrap="square" lIns="0" tIns="0" rIns="0" bIns="0" rtlCol="0" anchor="ctr"/>
+          <a:lstStyle/>
+          <a:p>
+            <a:pPr indent="0" marL="0">
+              <a:buNone/>
+            </a:pPr>
+            <a:r>
+              <a:rPr lang="en-US" sz="3400" b="1" dirty="0">
+                <a:solidFill>
+                  <a:srgbClr val="FFFFFF"/>
+                </a:solidFill>
+                <a:latin typeface="Georgia" pitchFamily="34" charset="0"/>
+                <a:ea typeface="Georgia" pitchFamily="34" charset="-122"/>
+                <a:cs typeface="Georgia" pitchFamily="34" charset="-120"/>
+              </a:rPr>
+              <a:t>335</a:t>
+            </a:r>
+            <a:pPr indent="0" marL="0">
+              <a:buNone/>
+            </a:pPr>
+            <a:r>
+              <a:rPr lang="en-US" sz="1300" dirty="0">
+                <a:solidFill>
+                  <a:srgbClr val="CADCFC"/>
+                </a:solidFill>
+              </a:rPr>
+              <a:t>  sièges si discipline parfaite</a:t>
+            </a:r>
+            <a:endParaRPr lang="en-US" sz="3400" dirty="0"/>
+          </a:p>
+        </p:txBody>
+      </p:sp>
+      <p:sp>
+        <p:nvSpPr>
+          <p:cNvPr id="8" name="Text 6"/>
+          <p:cNvSpPr/>
+          <p:nvPr/>
+        </p:nvSpPr>
+        <p:spPr>
+          <a:xfrm>
+            <a:off x="960120" y="3383280"/>
+            <a:ext cx="4663440" cy="548640"/>
+          </a:xfrm>
+          <a:prstGeom prst="rect">
+            <a:avLst/>
+          </a:prstGeom>
+          <a:noFill/>
+          <a:ln/>
+        </p:spPr>
+        <p:txBody>
+          <a:bodyPr wrap="square" lIns="0" tIns="0" rIns="0" bIns="0" rtlCol="0" anchor="ctr"/>
+          <a:lstStyle/>
+          <a:p>
+            <a:pPr indent="0" marL="0">
+              <a:buNone/>
+            </a:pPr>
+            <a:r>
+              <a:rPr lang="en-US" sz="3400" b="1" dirty="0">
+                <a:solidFill>
+                  <a:srgbClr val="F2A900"/>
+                </a:solidFill>
+                <a:latin typeface="Georgia" pitchFamily="34" charset="0"/>
+                <a:ea typeface="Georgia" pitchFamily="34" charset="-122"/>
+                <a:cs typeface="Georgia" pitchFamily="34" charset="-120"/>
+              </a:rPr>
+              <a:t>331</a:t>
+            </a:r>
+            <a:pPr indent="0" marL="0">
+              <a:buNone/>
+            </a:pPr>
+            <a:r>
+              <a:rPr lang="en-US" sz="1300" dirty="0">
+                <a:solidFill>
+                  <a:srgbClr val="CADCFC"/>
+                </a:solidFill>
+              </a:rPr>
+              <a:t>  voix réelles (seuil requis : 288)</a:t>
+            </a:r>
+            <a:endParaRPr lang="en-US" sz="3400" dirty="0"/>
+          </a:p>
+        </p:txBody>
+      </p:sp>
+      <p:sp>
+        <p:nvSpPr>
+          <p:cNvPr id="9" name="Text 7"/>
+          <p:cNvSpPr/>
+          <p:nvPr/>
+        </p:nvSpPr>
+        <p:spPr>
+          <a:xfrm>
+            <a:off x="960120" y="4114800"/>
+            <a:ext cx="4663440" cy="822960"/>
+          </a:xfrm>
+          <a:prstGeom prst="rect">
+            <a:avLst/>
+          </a:prstGeom>
+          <a:noFill/>
+          <a:ln/>
+        </p:spPr>
+        <p:txBody>
+          <a:bodyPr wrap="square" lIns="0" tIns="0" rIns="0" bIns="0" rtlCol="0" anchor="t"/>
+          <a:lstStyle/>
+          <a:p>
+            <a:pPr indent="0" marL="0">
+              <a:buNone/>
+            </a:pPr>
+            <a:r>
+              <a:rPr lang="en-US" sz="1250" i="1" dirty="0">
+                <a:solidFill>
+                  <a:srgbClr val="CADCFC"/>
+                </a:solidFill>
+              </a:rPr>
+              <a:t>Coalition gagnante mais non minimale. Groupes réellement critiques : RN, LFI, SOC.</a:t>
+            </a:r>
+            <a:endParaRPr lang="en-US" sz="1250" dirty="0"/>
+          </a:p>
+        </p:txBody>
+      </p:sp>
+      <p:sp>
+        <p:nvSpPr>
+          <p:cNvPr id="10" name="Shape 8"/>
+          <p:cNvSpPr/>
+          <p:nvPr/>
+        </p:nvSpPr>
+        <p:spPr>
+          <a:xfrm>
+            <a:off x="6126480" y="2057400"/>
+            <a:ext cx="5303520" cy="3200400"/>
           </a:xfrm>
           <a:prstGeom prst="rect">
             <a:avLst/>
@@ -10725,14 +10296,14 @@
       </p:sp>
       <p:sp>
         <p:nvSpPr>
-          <p:cNvPr id="6" name="Text 3"/>
-          <p:cNvSpPr/>
-          <p:nvPr/>
-        </p:nvSpPr>
-        <p:spPr>
-          <a:xfrm>
-            <a:off x="8412480" y="1783080"/>
-            <a:ext cx="2834640" cy="731520"/>
+          <p:cNvPr id="11" name="Text 9"/>
+          <p:cNvSpPr/>
+          <p:nvPr/>
+        </p:nvSpPr>
+        <p:spPr>
+          <a:xfrm>
+            <a:off x="6355080" y="2240280"/>
+            <a:ext cx="4846320" cy="640080"/>
           </a:xfrm>
           <a:prstGeom prst="rect">
             <a:avLst/>
@@ -10756,7 +10327,7 @@
                 <a:ea typeface="Georgia" pitchFamily="34" charset="-122"/>
                 <a:cs typeface="Georgia" pitchFamily="34" charset="-120"/>
               </a:rPr>
-              <a:t>Écart Shapley-Shubik moins part de sièges</a:t>
+              <a:t>L'écart mesure l'imperfection de la discipline</a:t>
             </a:r>
             <a:endParaRPr lang="en-US" sz="1500" dirty="0"/>
           </a:p>
@@ -10764,14 +10335,14 @@
       </p:sp>
       <p:sp>
         <p:nvSpPr>
-          <p:cNvPr id="7" name="Text 4"/>
-          <p:cNvSpPr/>
-          <p:nvPr/>
-        </p:nvSpPr>
-        <p:spPr>
-          <a:xfrm>
-            <a:off x="8412480" y="2606040"/>
-            <a:ext cx="2834640" cy="1828800"/>
+          <p:cNvPr id="12" name="Text 10"/>
+          <p:cNvSpPr/>
+          <p:nvPr/>
+        </p:nvSpPr>
+        <p:spPr>
+          <a:xfrm>
+            <a:off x="6355080" y="2880360"/>
+            <a:ext cx="4846320" cy="2286000"/>
           </a:xfrm>
           <a:prstGeom prst="rect">
             <a:avLst/>
@@ -10783,38 +10354,52 @@
           <a:bodyPr wrap="square" lIns="0" tIns="0" rIns="0" bIns="0" rtlCol="0" anchor="t"/>
           <a:lstStyle/>
           <a:p>
-            <a:pPr marL="342900" indent="-342900">
+            <a:pPr indent="0" marL="0">
               <a:spcAft>
                 <a:spcPts val="1000"/>
               </a:spcAft>
+              <a:buNone/>
+            </a:pPr>
+            <a:r>
+              <a:rPr lang="en-US" sz="1350" dirty="0">
+                <a:solidFill>
+                  <a:srgbClr val="333333"/>
+                </a:solidFill>
+              </a:rPr>
+              <a:t>Notre modèle suppose une discipline de vote parfaite. L'écart de 4 voix entre 335 et 331 la met à l'épreuve.</a:t>
+            </a:r>
+            <a:endParaRPr lang="en-US" sz="1350" dirty="0"/>
+          </a:p>
+          <a:p>
+            <a:pPr marL="342900" indent="-342900">
               <a:buSzPct val="100000"/>
               <a:buChar char="•"/>
             </a:pPr>
             <a:r>
-              <a:rPr lang="en-US" sz="1350" dirty="0">
-                <a:solidFill>
-                  <a:srgbClr val="333333"/>
-                </a:solidFill>
-              </a:rPr>
-              <a:t>Barres vertes : pouvoir supérieur au poids (grands blocs centraux).</a:t>
+              <a:rPr lang="en-US" sz="1400" dirty="0">
+                <a:solidFill>
+                  <a:srgbClr val="C0392B"/>
+                </a:solidFill>
+              </a:rPr>
+              <a:t>6 défections internes à la coalition</a:t>
             </a:r>
             <a:endParaRPr lang="en-US" sz="1350" dirty="0"/>
           </a:p>
           <a:p>
             <a:pPr marL="342900" indent="-342900">
               <a:spcAft>
-                <a:spcPts val="1000"/>
+                <a:spcPts val="800"/>
               </a:spcAft>
               <a:buSzPct val="100000"/>
               <a:buChar char="•"/>
             </a:pPr>
             <a:r>
-              <a:rPr lang="en-US" sz="1350" dirty="0">
-                <a:solidFill>
-                  <a:srgbClr val="333333"/>
-                </a:solidFill>
-              </a:rPr>
-              <a:t>Barres rouges : poids supérieur au pouvoir (petits groupes).</a:t>
+              <a:rPr lang="en-US" sz="1400" dirty="0">
+                <a:solidFill>
+                  <a:srgbClr val="2C8A4A"/>
+                </a:solidFill>
+              </a:rPr>
+              <a:t>2 ralliements externes (1 non-inscrit, 1 LIOT)</a:t>
             </a:r>
             <a:endParaRPr lang="en-US" sz="1350" dirty="0"/>
           </a:p>
@@ -10823,12 +10408,12 @@
               <a:buNone/>
             </a:pPr>
             <a:r>
-              <a:rPr lang="en-US" sz="1300" i="1" dirty="0">
-                <a:solidFill>
-                  <a:srgbClr val="555555"/>
-                </a:solidFill>
-              </a:rPr>
-              <a:t>Le scrutin majoritaire concentre le pouvoir de pivot sur les plus gros.</a:t>
+              <a:rPr lang="en-US" sz="1250" i="1" dirty="0">
+                <a:solidFill>
+                  <a:srgbClr val="5B6478"/>
+                </a:solidFill>
+              </a:rPr>
+              <a:t>L'écart net cache donc des mouvements de sens opposés.</a:t>
             </a:r>
             <a:endParaRPr lang="en-US" sz="1350" dirty="0"/>
           </a:p>
@@ -10836,7 +10421,7 @@
       </p:sp>
       <p:sp>
         <p:nvSpPr>
-          <p:cNvPr id="8" name="Text 5"/>
+          <p:cNvPr id="13" name="Text 11"/>
           <p:cNvSpPr/>
           <p:nvPr/>
         </p:nvSpPr>
@@ -10872,7 +10457,7 @@
       </p:sp>
       <p:sp>
         <p:nvSpPr>
-          <p:cNvPr id="9" name="Text 6"/>
+          <p:cNvPr id="14" name="Text 12"/>
           <p:cNvSpPr/>
           <p:nvPr/>
         </p:nvSpPr>
@@ -10900,7 +10485,7 @@
                   <a:srgbClr val="5B6478"/>
                 </a:solidFill>
               </a:rPr>
-              <a:t>9 / 15</a:t>
+              <a:t>9 / 13</a:t>
             </a:r>
             <a:endParaRPr lang="en-US" sz="900" dirty="0"/>
           </a:p>

--- a/presentation.pptx
+++ b/presentation.pptx
@@ -3806,7 +3806,7 @@
                   <a:srgbClr val="333333"/>
                 </a:solidFill>
               </a:rPr>
-              <a:t>131 tests : instances de référence et concordance</a:t>
+              <a:t>135 tests : instances de référence et concordance</a:t>
             </a:r>
             <a:endParaRPr lang="en-US" sz="1200" dirty="0"/>
           </a:p>
@@ -3908,7 +3908,7 @@
                 <a:ea typeface="Georgia" pitchFamily="34" charset="-122"/>
                 <a:cs typeface="Georgia" pitchFamily="34" charset="-120"/>
               </a:rPr>
-              <a:t>3107</a:t>
+              <a:t>3246</a:t>
             </a:r>
             <a:endParaRPr lang="en-US" sz="2600" dirty="0"/>
           </a:p>
@@ -3983,7 +3983,7 @@
                 <a:ea typeface="Georgia" pitchFamily="34" charset="-122"/>
                 <a:cs typeface="Georgia" pitchFamily="34" charset="-120"/>
               </a:rPr>
-              <a:t>131</a:t>
+              <a:t>135</a:t>
             </a:r>
             <a:endParaRPr lang="en-US" sz="2600" dirty="0"/>
           </a:p>
